--- a/software testing/notes/Week7 IntegrationTesting.pptx
+++ b/software testing/notes/Week7 IntegrationTesting.pptx
@@ -1,47 +1,47 @@
 
 <file path=ppt/presentation.xml><?xml version="1.0" encoding="utf-8"?>
-<p:presentation xmlns:a="http://schemas.openxmlformats.org/drawingml/2006/main" xmlns:r="http://schemas.openxmlformats.org/officeDocument/2006/relationships" xmlns:p="http://schemas.openxmlformats.org/presentationml/2006/main" saveSubsetFonts="1">
+<p:presentation xmlns:a="http://schemas.openxmlformats.org/drawingml/2006/main" xmlns:r="http://schemas.openxmlformats.org/officeDocument/2006/relationships" xmlns:p="http://schemas.openxmlformats.org/presentationml/2006/main">
   <p:sldMasterIdLst>
     <p:sldMasterId id="2147483648" r:id="rId1"/>
   </p:sldMasterIdLst>
   <p:notesMasterIdLst>
-    <p:notesMasterId r:id="rId36"/>
+    <p:notesMasterId r:id="rId4"/>
   </p:notesMasterIdLst>
   <p:sldIdLst>
-    <p:sldId id="272" r:id="rId2"/>
-    <p:sldId id="270" r:id="rId3"/>
-    <p:sldId id="271" r:id="rId4"/>
-    <p:sldId id="273" r:id="rId5"/>
-    <p:sldId id="274" r:id="rId6"/>
-    <p:sldId id="275" r:id="rId7"/>
-    <p:sldId id="276" r:id="rId8"/>
-    <p:sldId id="277" r:id="rId9"/>
-    <p:sldId id="257" r:id="rId10"/>
-    <p:sldId id="258" r:id="rId11"/>
-    <p:sldId id="260" r:id="rId12"/>
-    <p:sldId id="261" r:id="rId13"/>
-    <p:sldId id="262" r:id="rId14"/>
-    <p:sldId id="263" r:id="rId15"/>
-    <p:sldId id="264" r:id="rId16"/>
-    <p:sldId id="265" r:id="rId17"/>
-    <p:sldId id="266" r:id="rId18"/>
-    <p:sldId id="267" r:id="rId19"/>
-    <p:sldId id="268" r:id="rId20"/>
-    <p:sldId id="269" r:id="rId21"/>
-    <p:sldId id="278" r:id="rId22"/>
-    <p:sldId id="279" r:id="rId23"/>
-    <p:sldId id="280" r:id="rId24"/>
-    <p:sldId id="281" r:id="rId25"/>
-    <p:sldId id="282" r:id="rId26"/>
-    <p:sldId id="283" r:id="rId27"/>
-    <p:sldId id="284" r:id="rId28"/>
-    <p:sldId id="285" r:id="rId29"/>
-    <p:sldId id="286" r:id="rId30"/>
-    <p:sldId id="287" r:id="rId31"/>
-    <p:sldId id="290" r:id="rId32"/>
-    <p:sldId id="288" r:id="rId33"/>
-    <p:sldId id="289" r:id="rId34"/>
-    <p:sldId id="291" r:id="rId35"/>
+    <p:sldId id="272" r:id="rId3"/>
+    <p:sldId id="270" r:id="rId5"/>
+    <p:sldId id="271" r:id="rId6"/>
+    <p:sldId id="273" r:id="rId7"/>
+    <p:sldId id="274" r:id="rId8"/>
+    <p:sldId id="275" r:id="rId9"/>
+    <p:sldId id="276" r:id="rId10"/>
+    <p:sldId id="277" r:id="rId11"/>
+    <p:sldId id="257" r:id="rId12"/>
+    <p:sldId id="258" r:id="rId13"/>
+    <p:sldId id="260" r:id="rId14"/>
+    <p:sldId id="261" r:id="rId15"/>
+    <p:sldId id="262" r:id="rId16"/>
+    <p:sldId id="263" r:id="rId17"/>
+    <p:sldId id="264" r:id="rId18"/>
+    <p:sldId id="265" r:id="rId19"/>
+    <p:sldId id="266" r:id="rId20"/>
+    <p:sldId id="267" r:id="rId21"/>
+    <p:sldId id="268" r:id="rId22"/>
+    <p:sldId id="269" r:id="rId23"/>
+    <p:sldId id="278" r:id="rId24"/>
+    <p:sldId id="279" r:id="rId25"/>
+    <p:sldId id="280" r:id="rId26"/>
+    <p:sldId id="281" r:id="rId27"/>
+    <p:sldId id="282" r:id="rId28"/>
+    <p:sldId id="283" r:id="rId29"/>
+    <p:sldId id="284" r:id="rId30"/>
+    <p:sldId id="285" r:id="rId31"/>
+    <p:sldId id="286" r:id="rId32"/>
+    <p:sldId id="287" r:id="rId33"/>
+    <p:sldId id="290" r:id="rId34"/>
+    <p:sldId id="288" r:id="rId35"/>
+    <p:sldId id="289" r:id="rId36"/>
+    <p:sldId id="291" r:id="rId37"/>
   </p:sldIdLst>
   <p:sldSz cx="12192000" cy="6858000"/>
   <p:notesSz cx="6858000" cy="9144000"/>
@@ -140,11 +140,6 @@
       </a:defRPr>
     </a:lvl9pPr>
   </p:defaultTextStyle>
-  <p:extLst>
-    <p:ext uri="{EFAFB233-063F-42B5-8137-9DF3F51BA10A}">
-      <p15:sldGuideLst xmlns:p15="http://schemas.microsoft.com/office/powerpoint/2012/main"/>
-    </p:ext>
-  </p:extLst>
 </p:presentation>
 </file>
 
@@ -230,7 +225,6 @@
           <a:p>
             <a:fld id="{FA3E5F1F-1D83-474D-A42D-CD906E0C3A3A}" type="datetimeFigureOut">
               <a:rPr lang="en-US" smtClean="0"/>
-              <a:t>3/10/2026</a:t>
             </a:fld>
             <a:endParaRPr lang="en-US"/>
           </a:p>
@@ -297,6 +291,7 @@
               <a:rPr lang="en-US" smtClean="0"/>
               <a:t>Click to edit Master text styles</a:t>
             </a:r>
+            <a:endParaRPr lang="en-US" smtClean="0"/>
           </a:p>
           <a:p>
             <a:pPr lvl="1"/>
@@ -304,6 +299,7 @@
               <a:rPr lang="en-US" smtClean="0"/>
               <a:t>Second level</a:t>
             </a:r>
+            <a:endParaRPr lang="en-US" smtClean="0"/>
           </a:p>
           <a:p>
             <a:pPr lvl="2"/>
@@ -311,6 +307,7 @@
               <a:rPr lang="en-US" smtClean="0"/>
               <a:t>Third level</a:t>
             </a:r>
+            <a:endParaRPr lang="en-US" smtClean="0"/>
           </a:p>
           <a:p>
             <a:pPr lvl="3"/>
@@ -318,6 +315,7 @@
               <a:rPr lang="en-US" smtClean="0"/>
               <a:t>Fourth level</a:t>
             </a:r>
+            <a:endParaRPr lang="en-US" smtClean="0"/>
           </a:p>
           <a:p>
             <a:pPr lvl="4"/>
@@ -389,18 +387,12 @@
           <a:p>
             <a:fld id="{0A726568-9AD2-4C38-92B6-D453E16076B3}" type="slidenum">
               <a:rPr lang="en-US" smtClean="0"/>
-              <a:t>‹#›</a:t>
             </a:fld>
             <a:endParaRPr lang="en-US"/>
           </a:p>
         </p:txBody>
       </p:sp>
     </p:spTree>
-    <p:extLst>
-      <p:ext uri="{BB962C8B-B14F-4D97-AF65-F5344CB8AC3E}">
-        <p14:creationId xmlns:p14="http://schemas.microsoft.com/office/powerpoint/2010/main" val="1688784251"/>
-      </p:ext>
-    </p:extLst>
   </p:cSld>
   <p:clrMap bg1="lt1" tx1="dk1" bg2="lt2" tx2="dk2" accent1="accent1" accent2="accent2" accent3="accent3" accent4="accent4" accent5="accent5" accent6="accent6" hlink="hlink" folHlink="folHlink"/>
   <p:notesStyle>
@@ -527,7 +519,6 @@
         </p:nvSpPr>
         <p:spPr>
           <a:noFill/>
-          <a:ln/>
           <a:extLst>
             <a:ext uri="{909E8E84-426E-40DD-AFC4-6F175D3DCCD1}">
               <a14:hiddenFill xmlns:a14="http://schemas.microsoft.com/office/drawing/2010/main">
@@ -657,6 +648,11 @@
               </a:rPr>
               <a:t>Handouts</a:t>
             </a:r>
+            <a:endParaRPr lang="en-US" sz="1100" b="0" smtClean="0">
+              <a:solidFill>
+                <a:schemeClr val="tx1"/>
+              </a:solidFill>
+            </a:endParaRPr>
           </a:p>
         </p:txBody>
       </p:sp>
@@ -672,7 +668,6 @@
         </p:nvSpPr>
         <p:spPr>
           <a:noFill/>
-          <a:ln/>
           <a:extLst>
             <a:ext uri="{909E8E84-426E-40DD-AFC4-6F175D3DCCD1}">
               <a14:hiddenFill xmlns:a14="http://schemas.microsoft.com/office/drawing/2010/main">
@@ -800,8 +795,6 @@
                   <a:schemeClr val="tx1"/>
                 </a:solidFill>
               </a:rPr>
-              <a:pPr/>
-              <a:t>1</a:t>
             </a:fld>
             <a:endParaRPr lang="en-US" sz="1100" b="0">
               <a:solidFill>
@@ -821,9 +814,7 @@
             <p:ph type="sldImg"/>
           </p:nvPr>
         </p:nvSpPr>
-        <p:spPr>
-          <a:ln/>
-        </p:spPr>
+        <p:spPr/>
       </p:sp>
       <p:sp>
         <p:nvSpPr>
@@ -837,7 +828,6 @@
         </p:nvSpPr>
         <p:spPr>
           <a:noFill/>
-          <a:ln/>
           <a:extLst>
             <a:ext uri="{909E8E84-426E-40DD-AFC4-6F175D3DCCD1}">
               <a14:hiddenFill xmlns:a14="http://schemas.microsoft.com/office/drawing/2010/main">
@@ -867,6 +857,7 @@
               <a:rPr lang="en-US" dirty="0" smtClean="0"/>
               <a:t>------------------------------------------------------------------</a:t>
             </a:r>
+            <a:endParaRPr lang="en-US" dirty="0" smtClean="0"/>
           </a:p>
           <a:p>
             <a:pPr eaLnBrk="1" hangingPunct="1"/>
@@ -874,6 +865,7 @@
               <a:rPr lang="en-US" dirty="0" smtClean="0"/>
               <a:t>------------------------------------------------------------------</a:t>
             </a:r>
+            <a:endParaRPr lang="en-US" dirty="0" smtClean="0"/>
           </a:p>
           <a:p>
             <a:pPr eaLnBrk="1" hangingPunct="1"/>
@@ -881,6 +873,7 @@
               <a:rPr lang="en-US" dirty="0" smtClean="0"/>
               <a:t>-------------------------------------------------------------------</a:t>
             </a:r>
+            <a:endParaRPr lang="en-US" dirty="0" smtClean="0"/>
           </a:p>
           <a:p>
             <a:pPr eaLnBrk="1" hangingPunct="1"/>
@@ -888,6 +881,7 @@
               <a:rPr lang="en-US" dirty="0" smtClean="0"/>
               <a:t>--------------------------------------------------------------------</a:t>
             </a:r>
+            <a:endParaRPr lang="en-US" dirty="0" smtClean="0"/>
           </a:p>
           <a:p>
             <a:pPr eaLnBrk="1" hangingPunct="1"/>
@@ -1043,8 +1037,6 @@
                   <a:schemeClr val="tx1"/>
                 </a:solidFill>
               </a:rPr>
-              <a:pPr algn="r"/>
-              <a:t>1</a:t>
             </a:fld>
             <a:endParaRPr lang="en-US" sz="1100" b="0" i="1">
               <a:solidFill>
@@ -1055,11 +1047,6 @@
         </p:txBody>
       </p:sp>
     </p:spTree>
-    <p:extLst>
-      <p:ext uri="{BB962C8B-B14F-4D97-AF65-F5344CB8AC3E}">
-        <p14:creationId xmlns:p14="http://schemas.microsoft.com/office/powerpoint/2010/main" val="762597557"/>
-      </p:ext>
-    </p:extLst>
   </p:cSld>
   <p:clrMapOvr>
     <a:masterClrMapping/>
@@ -1096,7 +1083,6 @@
         </p:nvSpPr>
         <p:spPr>
           <a:noFill/>
-          <a:ln/>
           <a:extLst>
             <a:ext uri="{909E8E84-426E-40DD-AFC4-6F175D3DCCD1}">
               <a14:hiddenFill xmlns:a14="http://schemas.microsoft.com/office/drawing/2010/main">
@@ -1226,6 +1212,11 @@
               </a:rPr>
               <a:t>Handouts</a:t>
             </a:r>
+            <a:endParaRPr lang="en-US" sz="1100" b="0" smtClean="0">
+              <a:solidFill>
+                <a:schemeClr val="tx1"/>
+              </a:solidFill>
+            </a:endParaRPr>
           </a:p>
         </p:txBody>
       </p:sp>
@@ -1241,7 +1232,6 @@
         </p:nvSpPr>
         <p:spPr>
           <a:noFill/>
-          <a:ln/>
           <a:extLst>
             <a:ext uri="{909E8E84-426E-40DD-AFC4-6F175D3DCCD1}">
               <a14:hiddenFill xmlns:a14="http://schemas.microsoft.com/office/drawing/2010/main">
@@ -1369,8 +1359,6 @@
                   <a:schemeClr val="tx1"/>
                 </a:solidFill>
               </a:rPr>
-              <a:pPr/>
-              <a:t>12</a:t>
             </a:fld>
             <a:endParaRPr lang="en-US" sz="1100" b="0">
               <a:solidFill>
@@ -1390,9 +1378,7 @@
             <p:ph type="sldImg"/>
           </p:nvPr>
         </p:nvSpPr>
-        <p:spPr>
-          <a:ln/>
-        </p:spPr>
+        <p:spPr/>
       </p:sp>
       <p:sp>
         <p:nvSpPr>
@@ -1406,7 +1392,6 @@
         </p:nvSpPr>
         <p:spPr>
           <a:noFill/>
-          <a:ln/>
           <a:extLst>
             <a:ext uri="{909E8E84-426E-40DD-AFC4-6F175D3DCCD1}">
               <a14:hiddenFill xmlns:a14="http://schemas.microsoft.com/office/drawing/2010/main">
@@ -1437,11 +1422,6 @@
         </p:txBody>
       </p:sp>
     </p:spTree>
-    <p:extLst>
-      <p:ext uri="{BB962C8B-B14F-4D97-AF65-F5344CB8AC3E}">
-        <p14:creationId xmlns:p14="http://schemas.microsoft.com/office/powerpoint/2010/main" val="4165233717"/>
-      </p:ext>
-    </p:extLst>
   </p:cSld>
   <p:clrMapOvr>
     <a:masterClrMapping/>
@@ -1478,7 +1458,6 @@
         </p:nvSpPr>
         <p:spPr>
           <a:noFill/>
-          <a:ln/>
           <a:extLst>
             <a:ext uri="{909E8E84-426E-40DD-AFC4-6F175D3DCCD1}">
               <a14:hiddenFill xmlns:a14="http://schemas.microsoft.com/office/drawing/2010/main">
@@ -1608,6 +1587,11 @@
               </a:rPr>
               <a:t>Handouts</a:t>
             </a:r>
+            <a:endParaRPr lang="en-US" sz="1100" b="0" smtClean="0">
+              <a:solidFill>
+                <a:schemeClr val="tx1"/>
+              </a:solidFill>
+            </a:endParaRPr>
           </a:p>
         </p:txBody>
       </p:sp>
@@ -1623,7 +1607,6 @@
         </p:nvSpPr>
         <p:spPr>
           <a:noFill/>
-          <a:ln/>
           <a:extLst>
             <a:ext uri="{909E8E84-426E-40DD-AFC4-6F175D3DCCD1}">
               <a14:hiddenFill xmlns:a14="http://schemas.microsoft.com/office/drawing/2010/main">
@@ -1751,8 +1734,6 @@
                   <a:schemeClr val="tx1"/>
                 </a:solidFill>
               </a:rPr>
-              <a:pPr/>
-              <a:t>13</a:t>
             </a:fld>
             <a:endParaRPr lang="en-US" sz="1100" b="0">
               <a:solidFill>
@@ -1772,9 +1753,7 @@
             <p:ph type="sldImg"/>
           </p:nvPr>
         </p:nvSpPr>
-        <p:spPr>
-          <a:ln/>
-        </p:spPr>
+        <p:spPr/>
       </p:sp>
       <p:sp>
         <p:nvSpPr>
@@ -1788,7 +1767,6 @@
         </p:nvSpPr>
         <p:spPr>
           <a:noFill/>
-          <a:ln/>
           <a:extLst>
             <a:ext uri="{909E8E84-426E-40DD-AFC4-6F175D3DCCD1}">
               <a14:hiddenFill xmlns:a14="http://schemas.microsoft.com/office/drawing/2010/main">
@@ -1818,6 +1796,7 @@
               <a:rPr lang="en-US" dirty="0" smtClean="0"/>
               <a:t>What test cases need to be selected from the system integration test plan,</a:t>
             </a:r>
+            <a:endParaRPr lang="en-US" dirty="0" smtClean="0"/>
           </a:p>
           <a:p>
             <a:pPr eaLnBrk="1" hangingPunct="1"/>
@@ -1825,6 +1804,7 @@
               <a:rPr lang="en-US" dirty="0" smtClean="0"/>
               <a:t>as discussed in Section 7.6, in order to test the changes? Will these test</a:t>
             </a:r>
+            <a:endParaRPr lang="en-US" dirty="0" smtClean="0"/>
           </a:p>
           <a:p>
             <a:pPr eaLnBrk="1" hangingPunct="1"/>
@@ -1832,6 +1812,7 @@
               <a:rPr lang="en-US" dirty="0" smtClean="0"/>
               <a:t>cases give feature coverage of the new and modified features? If necessary,</a:t>
             </a:r>
+            <a:endParaRPr lang="en-US" dirty="0" smtClean="0"/>
           </a:p>
           <a:p>
             <a:pPr eaLnBrk="1" hangingPunct="1"/>
@@ -1839,6 +1820,7 @@
               <a:rPr lang="en-US" dirty="0" smtClean="0"/>
               <a:t>add new test cases to the system integration test plan.</a:t>
             </a:r>
+            <a:endParaRPr lang="en-US" dirty="0" smtClean="0"/>
           </a:p>
           <a:p>
             <a:pPr eaLnBrk="1" hangingPunct="1"/>
@@ -1850,6 +1832,7 @@
               <a:rPr lang="en-US" dirty="0" smtClean="0"/>
               <a:t>What existing test cases can be reused without modification in order to</a:t>
             </a:r>
+            <a:endParaRPr lang="en-US" dirty="0" smtClean="0"/>
           </a:p>
           <a:p>
             <a:pPr eaLnBrk="1" hangingPunct="1"/>
@@ -1857,6 +1840,7 @@
               <a:rPr lang="en-US" dirty="0" smtClean="0"/>
               <a:t>test the modified system? What previously failed test cases should now be</a:t>
             </a:r>
+            <a:endParaRPr lang="en-US" dirty="0" smtClean="0"/>
           </a:p>
           <a:p>
             <a:pPr eaLnBrk="1" hangingPunct="1"/>
@@ -1868,6 +1852,7 @@
               <a:rPr lang="en-US" dirty="0" smtClean="0"/>
               <a:t> in order to test the fixes in the new build?</a:t>
             </a:r>
+            <a:endParaRPr lang="en-US" dirty="0" smtClean="0"/>
           </a:p>
           <a:p>
             <a:pPr eaLnBrk="1" hangingPunct="1"/>
@@ -1879,6 +1864,7 @@
               <a:rPr lang="en-US" dirty="0" smtClean="0"/>
               <a:t>How should the scope of a partial regression test be determined? A full</a:t>
             </a:r>
+            <a:endParaRPr lang="en-US" dirty="0" smtClean="0"/>
           </a:p>
           <a:p>
             <a:pPr eaLnBrk="1" hangingPunct="1"/>
@@ -1886,6 +1872,7 @@
               <a:rPr lang="en-US" dirty="0" smtClean="0"/>
               <a:t>regression test may not be run on each build because of frequent turnaround</a:t>
             </a:r>
+            <a:endParaRPr lang="en-US" dirty="0" smtClean="0"/>
           </a:p>
           <a:p>
             <a:pPr eaLnBrk="1" hangingPunct="1"/>
@@ -1893,6 +1880,7 @@
               <a:rPr lang="en-US" dirty="0" smtClean="0"/>
               <a:t>of builds. At the least, any earlier test cases which pertain to areas that</a:t>
             </a:r>
+            <a:endParaRPr lang="en-US" dirty="0" smtClean="0"/>
           </a:p>
           <a:p>
             <a:pPr eaLnBrk="1" hangingPunct="1"/>
@@ -1908,6 +1896,7 @@
               <a:rPr lang="en-US" dirty="0" smtClean="0"/>
               <a:t>.</a:t>
             </a:r>
+            <a:endParaRPr lang="en-US" dirty="0" smtClean="0"/>
           </a:p>
           <a:p>
             <a:pPr eaLnBrk="1" hangingPunct="1"/>
@@ -1919,6 +1908,7 @@
               <a:rPr lang="en-US" dirty="0" smtClean="0"/>
               <a:t>What are the estimated time, resource demand, and cost to test this build?</a:t>
             </a:r>
+            <a:endParaRPr lang="en-US" dirty="0" smtClean="0"/>
           </a:p>
           <a:p>
             <a:pPr eaLnBrk="1" hangingPunct="1"/>
@@ -1934,6 +1924,7 @@
               <a:rPr lang="en-US" dirty="0" smtClean="0"/>
               <a:t>, because the integration test engineers may choose to wait for a later</a:t>
             </a:r>
+            <a:endParaRPr lang="en-US" dirty="0" smtClean="0"/>
           </a:p>
           <a:p>
             <a:pPr eaLnBrk="1" hangingPunct="1"/>
@@ -1941,15 +1932,11 @@
               <a:rPr lang="en-US" dirty="0" smtClean="0"/>
               <a:t>build.</a:t>
             </a:r>
+            <a:endParaRPr lang="en-US" dirty="0" smtClean="0"/>
           </a:p>
         </p:txBody>
       </p:sp>
     </p:spTree>
-    <p:extLst>
-      <p:ext uri="{BB962C8B-B14F-4D97-AF65-F5344CB8AC3E}">
-        <p14:creationId xmlns:p14="http://schemas.microsoft.com/office/powerpoint/2010/main" val="990305773"/>
-      </p:ext>
-    </p:extLst>
   </p:cSld>
   <p:clrMapOvr>
     <a:masterClrMapping/>
@@ -1986,7 +1973,6 @@
         </p:nvSpPr>
         <p:spPr>
           <a:noFill/>
-          <a:ln/>
           <a:extLst>
             <a:ext uri="{909E8E84-426E-40DD-AFC4-6F175D3DCCD1}">
               <a14:hiddenFill xmlns:a14="http://schemas.microsoft.com/office/drawing/2010/main">
@@ -2116,6 +2102,11 @@
               </a:rPr>
               <a:t>Handouts</a:t>
             </a:r>
+            <a:endParaRPr lang="en-US" sz="1100" b="0" smtClean="0">
+              <a:solidFill>
+                <a:schemeClr val="tx1"/>
+              </a:solidFill>
+            </a:endParaRPr>
           </a:p>
         </p:txBody>
       </p:sp>
@@ -2131,7 +2122,6 @@
         </p:nvSpPr>
         <p:spPr>
           <a:noFill/>
-          <a:ln/>
           <a:extLst>
             <a:ext uri="{909E8E84-426E-40DD-AFC4-6F175D3DCCD1}">
               <a14:hiddenFill xmlns:a14="http://schemas.microsoft.com/office/drawing/2010/main">
@@ -2259,8 +2249,6 @@
                   <a:schemeClr val="tx1"/>
                 </a:solidFill>
               </a:rPr>
-              <a:pPr/>
-              <a:t>14</a:t>
             </a:fld>
             <a:endParaRPr lang="en-US" sz="1100" b="0">
               <a:solidFill>
@@ -2280,9 +2268,7 @@
             <p:ph type="sldImg"/>
           </p:nvPr>
         </p:nvSpPr>
-        <p:spPr>
-          <a:ln/>
-        </p:spPr>
+        <p:spPr/>
       </p:sp>
       <p:sp>
         <p:nvSpPr>
@@ -2296,7 +2282,6 @@
         </p:nvSpPr>
         <p:spPr>
           <a:noFill/>
-          <a:ln/>
           <a:extLst>
             <a:ext uri="{909E8E84-426E-40DD-AFC4-6F175D3DCCD1}">
               <a14:hiddenFill xmlns:a14="http://schemas.microsoft.com/office/drawing/2010/main">
@@ -2325,6 +2310,7 @@
               <a:rPr lang="en-US" b="1" dirty="0" smtClean="0"/>
               <a:t>The "Integration Loop": How they work together</a:t>
             </a:r>
+            <a:endParaRPr lang="en-US" b="1" dirty="0" smtClean="0"/>
           </a:p>
           <a:p>
             <a:pPr>
@@ -2347,6 +2333,7 @@
               <a:rPr lang="en-US" dirty="0" smtClean="0"/>
               <a:t> in a central repository.</a:t>
             </a:r>
+            <a:endParaRPr lang="en-US" dirty="0" smtClean="0"/>
           </a:p>
           <a:p>
             <a:pPr>
@@ -2365,6 +2352,7 @@
               <a:rPr lang="en-US" dirty="0" smtClean="0"/>
               <a:t> a module into the integration branch.</a:t>
             </a:r>
+            <a:endParaRPr lang="en-US" dirty="0" smtClean="0"/>
           </a:p>
           <a:p>
             <a:pPr>
@@ -2403,6 +2391,7 @@
               <a:rPr lang="en-US" dirty="0" smtClean="0"/>
               <a:t>.</a:t>
             </a:r>
+            <a:endParaRPr lang="en-US" dirty="0" smtClean="0"/>
           </a:p>
           <a:p>
             <a:pPr>
@@ -2425,6 +2414,7 @@
               <a:rPr lang="en-US" dirty="0" smtClean="0"/>
               <a:t> tests.</a:t>
             </a:r>
+            <a:endParaRPr lang="en-US" dirty="0" smtClean="0"/>
           </a:p>
           <a:p>
             <a:pPr>
@@ -2451,6 +2441,7 @@
               <a:rPr lang="en-US" dirty="0" smtClean="0"/>
               <a:t>.</a:t>
             </a:r>
+            <a:endParaRPr lang="en-US" dirty="0" smtClean="0"/>
           </a:p>
           <a:p>
             <a:pPr>
@@ -2473,6 +2464,7 @@
               <a:rPr lang="en-US" dirty="0" smtClean="0"/>
               <a:t>.</a:t>
             </a:r>
+            <a:endParaRPr lang="en-US" dirty="0" smtClean="0"/>
           </a:p>
           <a:p>
             <a:pPr eaLnBrk="1" hangingPunct="1"/>
@@ -2481,11 +2473,6 @@
         </p:txBody>
       </p:sp>
     </p:spTree>
-    <p:extLst>
-      <p:ext uri="{BB962C8B-B14F-4D97-AF65-F5344CB8AC3E}">
-        <p14:creationId xmlns:p14="http://schemas.microsoft.com/office/powerpoint/2010/main" val="916190718"/>
-      </p:ext>
-    </p:extLst>
   </p:cSld>
   <p:clrMapOvr>
     <a:masterClrMapping/>
@@ -2522,7 +2509,6 @@
         </p:nvSpPr>
         <p:spPr>
           <a:noFill/>
-          <a:ln/>
           <a:extLst>
             <a:ext uri="{909E8E84-426E-40DD-AFC4-6F175D3DCCD1}">
               <a14:hiddenFill xmlns:a14="http://schemas.microsoft.com/office/drawing/2010/main">
@@ -2652,6 +2638,11 @@
               </a:rPr>
               <a:t>Handouts</a:t>
             </a:r>
+            <a:endParaRPr lang="en-US" sz="1100" b="0" smtClean="0">
+              <a:solidFill>
+                <a:schemeClr val="tx1"/>
+              </a:solidFill>
+            </a:endParaRPr>
           </a:p>
         </p:txBody>
       </p:sp>
@@ -2667,7 +2658,6 @@
         </p:nvSpPr>
         <p:spPr>
           <a:noFill/>
-          <a:ln/>
           <a:extLst>
             <a:ext uri="{909E8E84-426E-40DD-AFC4-6F175D3DCCD1}">
               <a14:hiddenFill xmlns:a14="http://schemas.microsoft.com/office/drawing/2010/main">
@@ -2795,8 +2785,6 @@
                   <a:schemeClr val="tx1"/>
                 </a:solidFill>
               </a:rPr>
-              <a:pPr/>
-              <a:t>15</a:t>
             </a:fld>
             <a:endParaRPr lang="en-US" sz="1100" b="0">
               <a:solidFill>
@@ -2816,9 +2804,7 @@
             <p:ph type="sldImg"/>
           </p:nvPr>
         </p:nvSpPr>
-        <p:spPr>
-          <a:ln/>
-        </p:spPr>
+        <p:spPr/>
       </p:sp>
       <p:sp>
         <p:nvSpPr>
@@ -2832,7 +2818,6 @@
         </p:nvSpPr>
         <p:spPr>
           <a:noFill/>
-          <a:ln/>
           <a:extLst>
             <a:ext uri="{909E8E84-426E-40DD-AFC4-6F175D3DCCD1}">
               <a14:hiddenFill xmlns:a14="http://schemas.microsoft.com/office/drawing/2010/main">
@@ -2863,11 +2848,6 @@
         </p:txBody>
       </p:sp>
     </p:spTree>
-    <p:extLst>
-      <p:ext uri="{BB962C8B-B14F-4D97-AF65-F5344CB8AC3E}">
-        <p14:creationId xmlns:p14="http://schemas.microsoft.com/office/powerpoint/2010/main" val="1668112482"/>
-      </p:ext>
-    </p:extLst>
   </p:cSld>
   <p:clrMapOvr>
     <a:masterClrMapping/>
@@ -2904,7 +2884,6 @@
         </p:nvSpPr>
         <p:spPr>
           <a:noFill/>
-          <a:ln/>
           <a:extLst>
             <a:ext uri="{909E8E84-426E-40DD-AFC4-6F175D3DCCD1}">
               <a14:hiddenFill xmlns:a14="http://schemas.microsoft.com/office/drawing/2010/main">
@@ -3034,6 +3013,11 @@
               </a:rPr>
               <a:t>Handouts</a:t>
             </a:r>
+            <a:endParaRPr lang="en-US" sz="1100" b="0" smtClean="0">
+              <a:solidFill>
+                <a:schemeClr val="tx1"/>
+              </a:solidFill>
+            </a:endParaRPr>
           </a:p>
         </p:txBody>
       </p:sp>
@@ -3049,7 +3033,6 @@
         </p:nvSpPr>
         <p:spPr>
           <a:noFill/>
-          <a:ln/>
           <a:extLst>
             <a:ext uri="{909E8E84-426E-40DD-AFC4-6F175D3DCCD1}">
               <a14:hiddenFill xmlns:a14="http://schemas.microsoft.com/office/drawing/2010/main">
@@ -3177,8 +3160,6 @@
                   <a:schemeClr val="tx1"/>
                 </a:solidFill>
               </a:rPr>
-              <a:pPr/>
-              <a:t>16</a:t>
             </a:fld>
             <a:endParaRPr lang="en-US" sz="1100" b="0">
               <a:solidFill>
@@ -3198,9 +3179,7 @@
             <p:ph type="sldImg"/>
           </p:nvPr>
         </p:nvSpPr>
-        <p:spPr>
-          <a:ln/>
-        </p:spPr>
+        <p:spPr/>
       </p:sp>
       <p:sp>
         <p:nvSpPr>
@@ -3214,7 +3193,6 @@
         </p:nvSpPr>
         <p:spPr>
           <a:noFill/>
-          <a:ln/>
           <a:extLst>
             <a:ext uri="{909E8E84-426E-40DD-AFC4-6F175D3DCCD1}">
               <a14:hiddenFill xmlns:a14="http://schemas.microsoft.com/office/drawing/2010/main">
@@ -3245,11 +3223,6 @@
         </p:txBody>
       </p:sp>
     </p:spTree>
-    <p:extLst>
-      <p:ext uri="{BB962C8B-B14F-4D97-AF65-F5344CB8AC3E}">
-        <p14:creationId xmlns:p14="http://schemas.microsoft.com/office/powerpoint/2010/main" val="587259562"/>
-      </p:ext>
-    </p:extLst>
   </p:cSld>
   <p:clrMapOvr>
     <a:masterClrMapping/>
@@ -3286,7 +3259,6 @@
         </p:nvSpPr>
         <p:spPr>
           <a:noFill/>
-          <a:ln/>
           <a:extLst>
             <a:ext uri="{909E8E84-426E-40DD-AFC4-6F175D3DCCD1}">
               <a14:hiddenFill xmlns:a14="http://schemas.microsoft.com/office/drawing/2010/main">
@@ -3416,6 +3388,11 @@
               </a:rPr>
               <a:t>Handouts</a:t>
             </a:r>
+            <a:endParaRPr lang="en-US" sz="1100" b="0" smtClean="0">
+              <a:solidFill>
+                <a:schemeClr val="tx1"/>
+              </a:solidFill>
+            </a:endParaRPr>
           </a:p>
         </p:txBody>
       </p:sp>
@@ -3431,7 +3408,6 @@
         </p:nvSpPr>
         <p:spPr>
           <a:noFill/>
-          <a:ln/>
           <a:extLst>
             <a:ext uri="{909E8E84-426E-40DD-AFC4-6F175D3DCCD1}">
               <a14:hiddenFill xmlns:a14="http://schemas.microsoft.com/office/drawing/2010/main">
@@ -3559,8 +3535,6 @@
                   <a:schemeClr val="tx1"/>
                 </a:solidFill>
               </a:rPr>
-              <a:pPr/>
-              <a:t>17</a:t>
             </a:fld>
             <a:endParaRPr lang="en-US" sz="1100" b="0">
               <a:solidFill>
@@ -3580,9 +3554,7 @@
             <p:ph type="sldImg"/>
           </p:nvPr>
         </p:nvSpPr>
-        <p:spPr>
-          <a:ln/>
-        </p:spPr>
+        <p:spPr/>
       </p:sp>
       <p:sp>
         <p:nvSpPr>
@@ -3596,7 +3568,6 @@
         </p:nvSpPr>
         <p:spPr>
           <a:noFill/>
-          <a:ln/>
           <a:extLst>
             <a:ext uri="{909E8E84-426E-40DD-AFC4-6F175D3DCCD1}">
               <a14:hiddenFill xmlns:a14="http://schemas.microsoft.com/office/drawing/2010/main">
@@ -3657,6 +3628,7 @@
               <a:rPr lang="en-US" dirty="0" smtClean="0"/>
               <a:t>. Even though the database isn't ready, the SIT engineer can already verify the "look and feel" and ensure the "Register" button correctly triggers the next screen. This builds immediate confidence that the user's primary "Trigger" works</a:t>
             </a:r>
+            <a:endParaRPr lang="en-US" dirty="0" smtClean="0"/>
           </a:p>
           <a:p>
             <a:pPr eaLnBrk="1" hangingPunct="1"/>
@@ -3688,6 +3660,7 @@
               <a:rPr lang="en-US" dirty="0" smtClean="0"/>
               <a:t> between the UI and the new Validator</a:t>
             </a:r>
+            <a:endParaRPr lang="en-US" dirty="0" smtClean="0"/>
           </a:p>
           <a:p>
             <a:pPr eaLnBrk="1" hangingPunct="1"/>
@@ -3722,10 +3695,6 @@
             <a:br>
               <a:rPr lang="en-US" dirty="0" smtClean="0"/>
             </a:br>
-            <a:r>
-              <a:rPr lang="en-US" dirty="0" smtClean="0"/>
-              <a:t/>
-            </a:r>
             <a:br>
               <a:rPr lang="en-US" dirty="0" smtClean="0"/>
             </a:br>
@@ -3740,12 +3709,6 @@
                 <a:latin typeface="Times New Roman" panose="02020603050405020304" pitchFamily="18" charset="0"/>
               </a:rPr>
             </a:br>
-            <a:r>
-              <a:rPr lang="en-US" b="1" dirty="0" smtClean="0">
-                <a:latin typeface="Times New Roman" panose="02020603050405020304" pitchFamily="18" charset="0"/>
-              </a:rPr>
-              <a:t/>
-            </a:r>
             <a:br>
               <a:rPr lang="en-US" b="1" dirty="0" smtClean="0">
                 <a:latin typeface="Times New Roman" panose="02020603050405020304" pitchFamily="18" charset="0"/>
@@ -3802,10 +3765,6 @@
             <a:br>
               <a:rPr lang="en-US" dirty="0" smtClean="0"/>
             </a:br>
-            <a:r>
-              <a:rPr lang="en-US" dirty="0" smtClean="0"/>
-              <a:t/>
-            </a:r>
             <a:br>
               <a:rPr lang="en-US" dirty="0" smtClean="0"/>
             </a:br>
@@ -3838,11 +3797,6 @@
         </p:txBody>
       </p:sp>
     </p:spTree>
-    <p:extLst>
-      <p:ext uri="{BB962C8B-B14F-4D97-AF65-F5344CB8AC3E}">
-        <p14:creationId xmlns:p14="http://schemas.microsoft.com/office/powerpoint/2010/main" val="1374746897"/>
-      </p:ext>
-    </p:extLst>
   </p:cSld>
   <p:clrMapOvr>
     <a:masterClrMapping/>
@@ -3879,7 +3833,6 @@
         </p:nvSpPr>
         <p:spPr>
           <a:noFill/>
-          <a:ln/>
           <a:extLst>
             <a:ext uri="{909E8E84-426E-40DD-AFC4-6F175D3DCCD1}">
               <a14:hiddenFill xmlns:a14="http://schemas.microsoft.com/office/drawing/2010/main">
@@ -4009,6 +3962,11 @@
               </a:rPr>
               <a:t>Handouts</a:t>
             </a:r>
+            <a:endParaRPr lang="en-US" sz="1100" b="0" smtClean="0">
+              <a:solidFill>
+                <a:schemeClr val="tx1"/>
+              </a:solidFill>
+            </a:endParaRPr>
           </a:p>
         </p:txBody>
       </p:sp>
@@ -4024,7 +3982,6 @@
         </p:nvSpPr>
         <p:spPr>
           <a:noFill/>
-          <a:ln/>
           <a:extLst>
             <a:ext uri="{909E8E84-426E-40DD-AFC4-6F175D3DCCD1}">
               <a14:hiddenFill xmlns:a14="http://schemas.microsoft.com/office/drawing/2010/main">
@@ -4152,8 +4109,6 @@
                   <a:schemeClr val="tx1"/>
                 </a:solidFill>
               </a:rPr>
-              <a:pPr/>
-              <a:t>18</a:t>
             </a:fld>
             <a:endParaRPr lang="en-US" sz="1100" b="0">
               <a:solidFill>
@@ -4173,9 +4128,7 @@
             <p:ph type="sldImg"/>
           </p:nvPr>
         </p:nvSpPr>
-        <p:spPr>
-          <a:ln/>
-        </p:spPr>
+        <p:spPr/>
       </p:sp>
       <p:sp>
         <p:nvSpPr>
@@ -4189,7 +4142,6 @@
         </p:nvSpPr>
         <p:spPr>
           <a:noFill/>
-          <a:ln/>
           <a:extLst>
             <a:ext uri="{909E8E84-426E-40DD-AFC4-6F175D3DCCD1}">
               <a14:hiddenFill xmlns:a14="http://schemas.microsoft.com/office/drawing/2010/main">
@@ -4220,11 +4172,6 @@
         </p:txBody>
       </p:sp>
     </p:spTree>
-    <p:extLst>
-      <p:ext uri="{BB962C8B-B14F-4D97-AF65-F5344CB8AC3E}">
-        <p14:creationId xmlns:p14="http://schemas.microsoft.com/office/powerpoint/2010/main" val="2102417938"/>
-      </p:ext>
-    </p:extLst>
   </p:cSld>
   <p:clrMapOvr>
     <a:masterClrMapping/>
@@ -4261,7 +4208,6 @@
         </p:nvSpPr>
         <p:spPr>
           <a:noFill/>
-          <a:ln/>
           <a:extLst>
             <a:ext uri="{909E8E84-426E-40DD-AFC4-6F175D3DCCD1}">
               <a14:hiddenFill xmlns:a14="http://schemas.microsoft.com/office/drawing/2010/main">
@@ -4391,6 +4337,11 @@
               </a:rPr>
               <a:t>Handouts</a:t>
             </a:r>
+            <a:endParaRPr lang="en-US" sz="1100" b="0" smtClean="0">
+              <a:solidFill>
+                <a:schemeClr val="tx1"/>
+              </a:solidFill>
+            </a:endParaRPr>
           </a:p>
         </p:txBody>
       </p:sp>
@@ -4406,7 +4357,6 @@
         </p:nvSpPr>
         <p:spPr>
           <a:noFill/>
-          <a:ln/>
           <a:extLst>
             <a:ext uri="{909E8E84-426E-40DD-AFC4-6F175D3DCCD1}">
               <a14:hiddenFill xmlns:a14="http://schemas.microsoft.com/office/drawing/2010/main">
@@ -4534,8 +4484,6 @@
                   <a:schemeClr val="tx1"/>
                 </a:solidFill>
               </a:rPr>
-              <a:pPr/>
-              <a:t>19</a:t>
             </a:fld>
             <a:endParaRPr lang="en-US" sz="1100" b="0">
               <a:solidFill>
@@ -4555,9 +4503,7 @@
             <p:ph type="sldImg"/>
           </p:nvPr>
         </p:nvSpPr>
-        <p:spPr>
-          <a:ln/>
-        </p:spPr>
+        <p:spPr/>
       </p:sp>
       <p:sp>
         <p:nvSpPr>
@@ -4571,7 +4517,6 @@
         </p:nvSpPr>
         <p:spPr>
           <a:noFill/>
-          <a:ln/>
           <a:extLst>
             <a:ext uri="{909E8E84-426E-40DD-AFC4-6F175D3DCCD1}">
               <a14:hiddenFill xmlns:a14="http://schemas.microsoft.com/office/drawing/2010/main">
@@ -4601,6 +4546,7 @@
               <a:rPr lang="en-US" dirty="0" smtClean="0"/>
               <a:t>Advantages: Examples</a:t>
             </a:r>
+            <a:endParaRPr lang="en-US" dirty="0" smtClean="0"/>
           </a:p>
           <a:p>
             <a:pPr eaLnBrk="1" hangingPunct="1"/>
@@ -4628,6 +4574,7 @@
               <a:rPr lang="en-US" dirty="0" smtClean="0"/>
               <a:t> (a small piece of code) that sends a specific Course ID (e.g., "Math 1060") to the module and verifies that it correctly returns the course details. It is much easier to write this "dummy" caller than to simulate the complex responses a database would provide in a top-down stub.</a:t>
             </a:r>
+            <a:endParaRPr lang="en-US" dirty="0" smtClean="0"/>
           </a:p>
           <a:p>
             <a:pPr eaLnBrk="1" hangingPunct="1"/>
@@ -4651,6 +4598,7 @@
               <a:rPr lang="en-US" dirty="0" smtClean="0"/>
               <a:t> (which records every transaction) is used by Registration, Grading, and Billing. By testing this low-level module first, you ensure the core "logging" foundation is bug-free. This provides a stable environment for the more complex modules that will be integrated later and rely on this service.</a:t>
             </a:r>
+            <a:endParaRPr lang="en-US" dirty="0" smtClean="0"/>
           </a:p>
           <a:p>
             <a:pPr eaLnBrk="1" hangingPunct="1"/>
@@ -4671,13 +4619,13 @@
               <a:buSzTx/>
               <a:buFontTx/>
               <a:buNone/>
-              <a:tabLst/>
               <a:defRPr/>
             </a:pPr>
             <a:r>
               <a:rPr lang="en-US" b="1" dirty="0" smtClean="0"/>
               <a:t>Disadvantages: Examples</a:t>
             </a:r>
+            <a:endParaRPr lang="en-US" b="1" dirty="0" smtClean="0"/>
           </a:p>
           <a:p>
             <a:pPr eaLnBrk="1" hangingPunct="1"/>
@@ -4697,6 +4645,7 @@
               <a:rPr lang="en-US" dirty="0" smtClean="0"/>
               <a:t>. Only then do you realize the UI design requires a "Real-time Seat Counter" that your low-level architecture doesn't support. Because this structural flaw is found at the end, you have to rewrite several "finished" modules.</a:t>
             </a:r>
+            <a:endParaRPr lang="en-US" dirty="0" smtClean="0"/>
           </a:p>
           <a:p>
             <a:pPr eaLnBrk="1" hangingPunct="1"/>
@@ -4725,11 +4674,6 @@
         </p:txBody>
       </p:sp>
     </p:spTree>
-    <p:extLst>
-      <p:ext uri="{BB962C8B-B14F-4D97-AF65-F5344CB8AC3E}">
-        <p14:creationId xmlns:p14="http://schemas.microsoft.com/office/powerpoint/2010/main" val="1714155349"/>
-      </p:ext>
-    </p:extLst>
   </p:cSld>
   <p:clrMapOvr>
     <a:masterClrMapping/>
@@ -4766,7 +4710,6 @@
         </p:nvSpPr>
         <p:spPr>
           <a:noFill/>
-          <a:ln/>
           <a:extLst>
             <a:ext uri="{909E8E84-426E-40DD-AFC4-6F175D3DCCD1}">
               <a14:hiddenFill xmlns:a14="http://schemas.microsoft.com/office/drawing/2010/main">
@@ -4896,6 +4839,11 @@
               </a:rPr>
               <a:t>Handouts</a:t>
             </a:r>
+            <a:endParaRPr lang="en-US" sz="1100" b="0" smtClean="0">
+              <a:solidFill>
+                <a:schemeClr val="tx1"/>
+              </a:solidFill>
+            </a:endParaRPr>
           </a:p>
         </p:txBody>
       </p:sp>
@@ -4911,7 +4859,6 @@
         </p:nvSpPr>
         <p:spPr>
           <a:noFill/>
-          <a:ln/>
           <a:extLst>
             <a:ext uri="{909E8E84-426E-40DD-AFC4-6F175D3DCCD1}">
               <a14:hiddenFill xmlns:a14="http://schemas.microsoft.com/office/drawing/2010/main">
@@ -5039,8 +4986,6 @@
                   <a:schemeClr val="tx1"/>
                 </a:solidFill>
               </a:rPr>
-              <a:pPr/>
-              <a:t>20</a:t>
             </a:fld>
             <a:endParaRPr lang="en-US" sz="1100" b="0">
               <a:solidFill>
@@ -5060,9 +5005,7 @@
             <p:ph type="sldImg"/>
           </p:nvPr>
         </p:nvSpPr>
-        <p:spPr>
-          <a:ln/>
-        </p:spPr>
+        <p:spPr/>
       </p:sp>
       <p:sp>
         <p:nvSpPr>
@@ -5076,7 +5019,6 @@
         </p:nvSpPr>
         <p:spPr>
           <a:noFill/>
-          <a:ln/>
           <a:extLst>
             <a:ext uri="{909E8E84-426E-40DD-AFC4-6F175D3DCCD1}">
               <a14:hiddenFill xmlns:a14="http://schemas.microsoft.com/office/drawing/2010/main">
@@ -5107,11 +5049,6 @@
         </p:txBody>
       </p:sp>
     </p:spTree>
-    <p:extLst>
-      <p:ext uri="{BB962C8B-B14F-4D97-AF65-F5344CB8AC3E}">
-        <p14:creationId xmlns:p14="http://schemas.microsoft.com/office/powerpoint/2010/main" val="4116114741"/>
-      </p:ext>
-    </p:extLst>
   </p:cSld>
   <p:clrMapOvr>
     <a:masterClrMapping/>
@@ -5148,7 +5085,6 @@
         </p:nvSpPr>
         <p:spPr>
           <a:noFill/>
-          <a:ln/>
           <a:extLst>
             <a:ext uri="{909E8E84-426E-40DD-AFC4-6F175D3DCCD1}">
               <a14:hiddenFill xmlns:a14="http://schemas.microsoft.com/office/drawing/2010/main">
@@ -5278,6 +5214,11 @@
               </a:rPr>
               <a:t>Handouts</a:t>
             </a:r>
+            <a:endParaRPr lang="en-US" sz="1100" b="0" smtClean="0">
+              <a:solidFill>
+                <a:schemeClr val="tx1"/>
+              </a:solidFill>
+            </a:endParaRPr>
           </a:p>
         </p:txBody>
       </p:sp>
@@ -5293,7 +5234,6 @@
         </p:nvSpPr>
         <p:spPr>
           <a:noFill/>
-          <a:ln/>
           <a:extLst>
             <a:ext uri="{909E8E84-426E-40DD-AFC4-6F175D3DCCD1}">
               <a14:hiddenFill xmlns:a14="http://schemas.microsoft.com/office/drawing/2010/main">
@@ -5421,8 +5361,6 @@
                   <a:schemeClr val="tx1"/>
                 </a:solidFill>
               </a:rPr>
-              <a:pPr/>
-              <a:t>21</a:t>
             </a:fld>
             <a:endParaRPr lang="en-US" sz="1100" b="0">
               <a:solidFill>
@@ -5442,9 +5380,7 @@
             <p:ph type="sldImg"/>
           </p:nvPr>
         </p:nvSpPr>
-        <p:spPr>
-          <a:ln/>
-        </p:spPr>
+        <p:spPr/>
       </p:sp>
       <p:sp>
         <p:nvSpPr>
@@ -5458,7 +5394,6 @@
         </p:nvSpPr>
         <p:spPr>
           <a:noFill/>
-          <a:ln/>
           <a:extLst>
             <a:ext uri="{909E8E84-426E-40DD-AFC4-6F175D3DCCD1}">
               <a14:hiddenFill xmlns:a14="http://schemas.microsoft.com/office/drawing/2010/main">
@@ -5489,11 +5424,6 @@
         </p:txBody>
       </p:sp>
     </p:spTree>
-    <p:extLst>
-      <p:ext uri="{BB962C8B-B14F-4D97-AF65-F5344CB8AC3E}">
-        <p14:creationId xmlns:p14="http://schemas.microsoft.com/office/powerpoint/2010/main" val="4157318406"/>
-      </p:ext>
-    </p:extLst>
   </p:cSld>
   <p:clrMapOvr>
     <a:masterClrMapping/>
@@ -5530,7 +5460,6 @@
         </p:nvSpPr>
         <p:spPr>
           <a:noFill/>
-          <a:ln/>
           <a:extLst>
             <a:ext uri="{909E8E84-426E-40DD-AFC4-6F175D3DCCD1}">
               <a14:hiddenFill xmlns:a14="http://schemas.microsoft.com/office/drawing/2010/main">
@@ -5660,6 +5589,11 @@
               </a:rPr>
               <a:t>Handouts</a:t>
             </a:r>
+            <a:endParaRPr lang="en-US" sz="1100" b="0" smtClean="0">
+              <a:solidFill>
+                <a:schemeClr val="tx1"/>
+              </a:solidFill>
+            </a:endParaRPr>
           </a:p>
         </p:txBody>
       </p:sp>
@@ -5675,7 +5609,6 @@
         </p:nvSpPr>
         <p:spPr>
           <a:noFill/>
-          <a:ln/>
           <a:extLst>
             <a:ext uri="{909E8E84-426E-40DD-AFC4-6F175D3DCCD1}">
               <a14:hiddenFill xmlns:a14="http://schemas.microsoft.com/office/drawing/2010/main">
@@ -5803,8 +5736,6 @@
                   <a:schemeClr val="tx1"/>
                 </a:solidFill>
               </a:rPr>
-              <a:pPr/>
-              <a:t>2</a:t>
             </a:fld>
             <a:endParaRPr lang="en-US" sz="1100" b="0">
               <a:solidFill>
@@ -5824,9 +5755,7 @@
             <p:ph type="sldImg"/>
           </p:nvPr>
         </p:nvSpPr>
-        <p:spPr>
-          <a:ln/>
-        </p:spPr>
+        <p:spPr/>
       </p:sp>
       <p:sp>
         <p:nvSpPr>
@@ -5840,7 +5769,6 @@
         </p:nvSpPr>
         <p:spPr>
           <a:noFill/>
-          <a:ln/>
           <a:extLst>
             <a:ext uri="{909E8E84-426E-40DD-AFC4-6F175D3DCCD1}">
               <a14:hiddenFill xmlns:a14="http://schemas.microsoft.com/office/drawing/2010/main">
@@ -5871,11 +5799,6 @@
         </p:txBody>
       </p:sp>
     </p:spTree>
-    <p:extLst>
-      <p:ext uri="{BB962C8B-B14F-4D97-AF65-F5344CB8AC3E}">
-        <p14:creationId xmlns:p14="http://schemas.microsoft.com/office/powerpoint/2010/main" val="3299235281"/>
-      </p:ext>
-    </p:extLst>
   </p:cSld>
   <p:clrMapOvr>
     <a:masterClrMapping/>
@@ -5912,7 +5835,6 @@
         </p:nvSpPr>
         <p:spPr>
           <a:noFill/>
-          <a:ln/>
           <a:extLst>
             <a:ext uri="{909E8E84-426E-40DD-AFC4-6F175D3DCCD1}">
               <a14:hiddenFill xmlns:a14="http://schemas.microsoft.com/office/drawing/2010/main">
@@ -6042,6 +5964,11 @@
               </a:rPr>
               <a:t>Handouts</a:t>
             </a:r>
+            <a:endParaRPr lang="en-US" sz="1100" b="0" smtClean="0">
+              <a:solidFill>
+                <a:schemeClr val="tx1"/>
+              </a:solidFill>
+            </a:endParaRPr>
           </a:p>
         </p:txBody>
       </p:sp>
@@ -6057,7 +5984,6 @@
         </p:nvSpPr>
         <p:spPr>
           <a:noFill/>
-          <a:ln/>
           <a:extLst>
             <a:ext uri="{909E8E84-426E-40DD-AFC4-6F175D3DCCD1}">
               <a14:hiddenFill xmlns:a14="http://schemas.microsoft.com/office/drawing/2010/main">
@@ -6185,8 +6111,6 @@
                   <a:schemeClr val="tx1"/>
                 </a:solidFill>
               </a:rPr>
-              <a:pPr/>
-              <a:t>22</a:t>
             </a:fld>
             <a:endParaRPr lang="en-US" sz="1100" b="0">
               <a:solidFill>
@@ -6206,9 +6130,7 @@
             <p:ph type="sldImg"/>
           </p:nvPr>
         </p:nvSpPr>
-        <p:spPr>
-          <a:ln/>
-        </p:spPr>
+        <p:spPr/>
       </p:sp>
       <p:sp>
         <p:nvSpPr>
@@ -6222,7 +6144,6 @@
         </p:nvSpPr>
         <p:spPr>
           <a:noFill/>
-          <a:ln/>
           <a:extLst>
             <a:ext uri="{909E8E84-426E-40DD-AFC4-6F175D3DCCD1}">
               <a14:hiddenFill xmlns:a14="http://schemas.microsoft.com/office/drawing/2010/main">
@@ -6251,6 +6172,7 @@
               <a:rPr lang="en-US" b="1" dirty="0" smtClean="0"/>
               <a:t>1. Functional Characteristics (The "What")</a:t>
             </a:r>
+            <a:endParaRPr lang="en-US" b="1" dirty="0" smtClean="0"/>
           </a:p>
           <a:p>
             <a:r>
@@ -6265,6 +6187,7 @@
               <a:rPr lang="en-US" dirty="0" smtClean="0"/>
               <a:t> provided by the integrated modules. The architecture summary identifies which module provides a specific function (e.g., an API endpoint) and which modules consume that function.</a:t>
             </a:r>
+            <a:endParaRPr lang="en-US" dirty="0" smtClean="0"/>
           </a:p>
           <a:p>
             <a:r>
@@ -6283,12 +6206,14 @@
               <a:rPr lang="en-US" dirty="0" smtClean="0"/>
               <a:t>()) performs its intended business function correctly, accepting the right inputs and producing the right outputs.</a:t>
             </a:r>
+            <a:endParaRPr lang="en-US" dirty="0" smtClean="0"/>
           </a:p>
           <a:p>
             <a:r>
               <a:rPr lang="en-US" b="1" dirty="0" smtClean="0"/>
               <a:t>2. Internal Characteristics (The "How")</a:t>
             </a:r>
+            <a:endParaRPr lang="en-US" b="1" dirty="0" smtClean="0"/>
           </a:p>
           <a:p>
             <a:r>
@@ -6303,6 +6228,7 @@
               <a:rPr lang="en-US" dirty="0" smtClean="0"/>
               <a:t> that links the modules (the channels we previously discussed).</a:t>
             </a:r>
+            <a:endParaRPr lang="en-US" dirty="0" smtClean="0"/>
           </a:p>
           <a:p>
             <a:r>
@@ -6337,18 +6263,21 @@
               <a:rPr lang="en-US" dirty="0" smtClean="0"/>
               <a:t> (Procedure Call Interface). Errors here are typically integration bugs (e.g., a service sends a JSON object, but the receiving service expects XML).</a:t>
             </a:r>
+            <a:endParaRPr lang="en-US" dirty="0" smtClean="0"/>
           </a:p>
           <a:p>
             <a:r>
               <a:rPr lang="en-US" b="1" dirty="0" smtClean="0"/>
               <a:t>3. Performance Characteristics (The "Efficiency")</a:t>
             </a:r>
+            <a:endParaRPr lang="en-US" b="1" dirty="0" smtClean="0"/>
           </a:p>
           <a:p>
             <a:r>
               <a:rPr lang="en-US" dirty="0" smtClean="0"/>
               <a:t>This focus involves assessing the performance implications of the interfaces themselves.</a:t>
             </a:r>
+            <a:endParaRPr lang="en-US" dirty="0" smtClean="0"/>
           </a:p>
           <a:p>
             <a:r>
@@ -6367,6 +6296,7 @@
               <a:rPr lang="en-US" dirty="0" smtClean="0"/>
               <a:t> where integrated components slow down the overall system. For example, if a Use Case involves 10 sequential RESTful API calls between subsystems (Message Passing), the test summary must flag that integration point for latency and throughput measurement, ensuring the interfaces don't introduce unacceptable delays.</a:t>
             </a:r>
+            <a:endParaRPr lang="en-US" dirty="0" smtClean="0"/>
           </a:p>
           <a:p>
             <a:pPr eaLnBrk="1" hangingPunct="1"/>
@@ -6375,11 +6305,6 @@
         </p:txBody>
       </p:sp>
     </p:spTree>
-    <p:extLst>
-      <p:ext uri="{BB962C8B-B14F-4D97-AF65-F5344CB8AC3E}">
-        <p14:creationId xmlns:p14="http://schemas.microsoft.com/office/powerpoint/2010/main" val="3704201631"/>
-      </p:ext>
-    </p:extLst>
   </p:cSld>
   <p:clrMapOvr>
     <a:masterClrMapping/>
@@ -6416,7 +6341,6 @@
         </p:nvSpPr>
         <p:spPr>
           <a:noFill/>
-          <a:ln/>
           <a:extLst>
             <a:ext uri="{909E8E84-426E-40DD-AFC4-6F175D3DCCD1}">
               <a14:hiddenFill xmlns:a14="http://schemas.microsoft.com/office/drawing/2010/main">
@@ -6546,6 +6470,11 @@
               </a:rPr>
               <a:t>Handouts</a:t>
             </a:r>
+            <a:endParaRPr lang="en-US" sz="1100" b="0" smtClean="0">
+              <a:solidFill>
+                <a:schemeClr val="tx1"/>
+              </a:solidFill>
+            </a:endParaRPr>
           </a:p>
         </p:txBody>
       </p:sp>
@@ -6561,7 +6490,6 @@
         </p:nvSpPr>
         <p:spPr>
           <a:noFill/>
-          <a:ln/>
           <a:extLst>
             <a:ext uri="{909E8E84-426E-40DD-AFC4-6F175D3DCCD1}">
               <a14:hiddenFill xmlns:a14="http://schemas.microsoft.com/office/drawing/2010/main">
@@ -6689,8 +6617,6 @@
                   <a:schemeClr val="tx1"/>
                 </a:solidFill>
               </a:rPr>
-              <a:pPr/>
-              <a:t>23</a:t>
             </a:fld>
             <a:endParaRPr lang="en-US" sz="1100" b="0">
               <a:solidFill>
@@ -6710,9 +6636,7 @@
             <p:ph type="sldImg"/>
           </p:nvPr>
         </p:nvSpPr>
-        <p:spPr>
-          <a:ln/>
-        </p:spPr>
+        <p:spPr/>
       </p:sp>
       <p:sp>
         <p:nvSpPr>
@@ -6726,7 +6650,6 @@
         </p:nvSpPr>
         <p:spPr>
           <a:noFill/>
-          <a:ln/>
           <a:extLst>
             <a:ext uri="{909E8E84-426E-40DD-AFC4-6F175D3DCCD1}">
               <a14:hiddenFill xmlns:a14="http://schemas.microsoft.com/office/drawing/2010/main">
@@ -6757,11 +6680,6 @@
         </p:txBody>
       </p:sp>
     </p:spTree>
-    <p:extLst>
-      <p:ext uri="{BB962C8B-B14F-4D97-AF65-F5344CB8AC3E}">
-        <p14:creationId xmlns:p14="http://schemas.microsoft.com/office/powerpoint/2010/main" val="2763657558"/>
-      </p:ext>
-    </p:extLst>
   </p:cSld>
   <p:clrMapOvr>
     <a:masterClrMapping/>
@@ -6798,7 +6716,6 @@
         </p:nvSpPr>
         <p:spPr>
           <a:noFill/>
-          <a:ln/>
           <a:extLst>
             <a:ext uri="{909E8E84-426E-40DD-AFC4-6F175D3DCCD1}">
               <a14:hiddenFill xmlns:a14="http://schemas.microsoft.com/office/drawing/2010/main">
@@ -6928,6 +6845,11 @@
               </a:rPr>
               <a:t>Handouts</a:t>
             </a:r>
+            <a:endParaRPr lang="en-US" sz="1100" b="0" smtClean="0">
+              <a:solidFill>
+                <a:schemeClr val="tx1"/>
+              </a:solidFill>
+            </a:endParaRPr>
           </a:p>
         </p:txBody>
       </p:sp>
@@ -6943,7 +6865,6 @@
         </p:nvSpPr>
         <p:spPr>
           <a:noFill/>
-          <a:ln/>
           <a:extLst>
             <a:ext uri="{909E8E84-426E-40DD-AFC4-6F175D3DCCD1}">
               <a14:hiddenFill xmlns:a14="http://schemas.microsoft.com/office/drawing/2010/main">
@@ -7071,8 +6992,6 @@
                   <a:schemeClr val="tx1"/>
                 </a:solidFill>
               </a:rPr>
-              <a:pPr/>
-              <a:t>24</a:t>
             </a:fld>
             <a:endParaRPr lang="en-US" sz="1100" b="0">
               <a:solidFill>
@@ -7092,9 +7011,7 @@
             <p:ph type="sldImg"/>
           </p:nvPr>
         </p:nvSpPr>
-        <p:spPr>
-          <a:ln/>
-        </p:spPr>
+        <p:spPr/>
       </p:sp>
       <p:sp>
         <p:nvSpPr>
@@ -7108,7 +7025,6 @@
         </p:nvSpPr>
         <p:spPr>
           <a:noFill/>
-          <a:ln/>
           <a:extLst>
             <a:ext uri="{909E8E84-426E-40DD-AFC4-6F175D3DCCD1}">
               <a14:hiddenFill xmlns:a14="http://schemas.microsoft.com/office/drawing/2010/main">
@@ -7139,11 +7055,6 @@
         </p:txBody>
       </p:sp>
     </p:spTree>
-    <p:extLst>
-      <p:ext uri="{BB962C8B-B14F-4D97-AF65-F5344CB8AC3E}">
-        <p14:creationId xmlns:p14="http://schemas.microsoft.com/office/powerpoint/2010/main" val="2842191920"/>
-      </p:ext>
-    </p:extLst>
   </p:cSld>
   <p:clrMapOvr>
     <a:masterClrMapping/>
@@ -7180,7 +7091,6 @@
         </p:nvSpPr>
         <p:spPr>
           <a:noFill/>
-          <a:ln/>
           <a:extLst>
             <a:ext uri="{909E8E84-426E-40DD-AFC4-6F175D3DCCD1}">
               <a14:hiddenFill xmlns:a14="http://schemas.microsoft.com/office/drawing/2010/main">
@@ -7310,6 +7220,11 @@
               </a:rPr>
               <a:t>Handouts</a:t>
             </a:r>
+            <a:endParaRPr lang="en-US" sz="1100" b="0" smtClean="0">
+              <a:solidFill>
+                <a:schemeClr val="tx1"/>
+              </a:solidFill>
+            </a:endParaRPr>
           </a:p>
         </p:txBody>
       </p:sp>
@@ -7325,7 +7240,6 @@
         </p:nvSpPr>
         <p:spPr>
           <a:noFill/>
-          <a:ln/>
           <a:extLst>
             <a:ext uri="{909E8E84-426E-40DD-AFC4-6F175D3DCCD1}">
               <a14:hiddenFill xmlns:a14="http://schemas.microsoft.com/office/drawing/2010/main">
@@ -7453,8 +7367,6 @@
                   <a:schemeClr val="tx1"/>
                 </a:solidFill>
               </a:rPr>
-              <a:pPr/>
-              <a:t>25</a:t>
             </a:fld>
             <a:endParaRPr lang="en-US" sz="1100" b="0">
               <a:solidFill>
@@ -7474,9 +7386,7 @@
             <p:ph type="sldImg"/>
           </p:nvPr>
         </p:nvSpPr>
-        <p:spPr>
-          <a:ln/>
-        </p:spPr>
+        <p:spPr/>
       </p:sp>
       <p:sp>
         <p:nvSpPr>
@@ -7490,7 +7400,6 @@
         </p:nvSpPr>
         <p:spPr>
           <a:noFill/>
-          <a:ln/>
           <a:extLst>
             <a:ext uri="{909E8E84-426E-40DD-AFC4-6F175D3DCCD1}">
               <a14:hiddenFill xmlns:a14="http://schemas.microsoft.com/office/drawing/2010/main">
@@ -7521,11 +7430,6 @@
         </p:txBody>
       </p:sp>
     </p:spTree>
-    <p:extLst>
-      <p:ext uri="{BB962C8B-B14F-4D97-AF65-F5344CB8AC3E}">
-        <p14:creationId xmlns:p14="http://schemas.microsoft.com/office/powerpoint/2010/main" val="1086117937"/>
-      </p:ext>
-    </p:extLst>
   </p:cSld>
   <p:clrMapOvr>
     <a:masterClrMapping/>
@@ -7562,7 +7466,6 @@
         </p:nvSpPr>
         <p:spPr>
           <a:noFill/>
-          <a:ln/>
           <a:extLst>
             <a:ext uri="{909E8E84-426E-40DD-AFC4-6F175D3DCCD1}">
               <a14:hiddenFill xmlns:a14="http://schemas.microsoft.com/office/drawing/2010/main">
@@ -7692,6 +7595,11 @@
               </a:rPr>
               <a:t>Handouts</a:t>
             </a:r>
+            <a:endParaRPr lang="en-US" sz="1100" b="0" smtClean="0">
+              <a:solidFill>
+                <a:schemeClr val="tx1"/>
+              </a:solidFill>
+            </a:endParaRPr>
           </a:p>
         </p:txBody>
       </p:sp>
@@ -7707,7 +7615,6 @@
         </p:nvSpPr>
         <p:spPr>
           <a:noFill/>
-          <a:ln/>
           <a:extLst>
             <a:ext uri="{909E8E84-426E-40DD-AFC4-6F175D3DCCD1}">
               <a14:hiddenFill xmlns:a14="http://schemas.microsoft.com/office/drawing/2010/main">
@@ -7835,8 +7742,6 @@
                   <a:schemeClr val="tx1"/>
                 </a:solidFill>
               </a:rPr>
-              <a:pPr/>
-              <a:t>26</a:t>
             </a:fld>
             <a:endParaRPr lang="en-US" sz="1100" b="0">
               <a:solidFill>
@@ -7856,9 +7761,7 @@
             <p:ph type="sldImg"/>
           </p:nvPr>
         </p:nvSpPr>
-        <p:spPr>
-          <a:ln/>
-        </p:spPr>
+        <p:spPr/>
       </p:sp>
       <p:sp>
         <p:nvSpPr>
@@ -7872,7 +7775,6 @@
         </p:nvSpPr>
         <p:spPr>
           <a:noFill/>
-          <a:ln/>
           <a:extLst>
             <a:ext uri="{909E8E84-426E-40DD-AFC4-6F175D3DCCD1}">
               <a14:hiddenFill xmlns:a14="http://schemas.microsoft.com/office/drawing/2010/main">
@@ -7903,11 +7805,6 @@
         </p:txBody>
       </p:sp>
     </p:spTree>
-    <p:extLst>
-      <p:ext uri="{BB962C8B-B14F-4D97-AF65-F5344CB8AC3E}">
-        <p14:creationId xmlns:p14="http://schemas.microsoft.com/office/powerpoint/2010/main" val="1790040856"/>
-      </p:ext>
-    </p:extLst>
   </p:cSld>
   <p:clrMapOvr>
     <a:masterClrMapping/>
@@ -7944,7 +7841,6 @@
         </p:nvSpPr>
         <p:spPr>
           <a:noFill/>
-          <a:ln/>
           <a:extLst>
             <a:ext uri="{909E8E84-426E-40DD-AFC4-6F175D3DCCD1}">
               <a14:hiddenFill xmlns:a14="http://schemas.microsoft.com/office/drawing/2010/main">
@@ -8074,6 +7970,11 @@
               </a:rPr>
               <a:t>Handouts</a:t>
             </a:r>
+            <a:endParaRPr lang="en-US" sz="1100" b="0" smtClean="0">
+              <a:solidFill>
+                <a:schemeClr val="tx1"/>
+              </a:solidFill>
+            </a:endParaRPr>
           </a:p>
         </p:txBody>
       </p:sp>
@@ -8089,7 +7990,6 @@
         </p:nvSpPr>
         <p:spPr>
           <a:noFill/>
-          <a:ln/>
           <a:extLst>
             <a:ext uri="{909E8E84-426E-40DD-AFC4-6F175D3DCCD1}">
               <a14:hiddenFill xmlns:a14="http://schemas.microsoft.com/office/drawing/2010/main">
@@ -8217,8 +8117,6 @@
                   <a:schemeClr val="tx1"/>
                 </a:solidFill>
               </a:rPr>
-              <a:pPr/>
-              <a:t>27</a:t>
             </a:fld>
             <a:endParaRPr lang="en-US" sz="1100" b="0">
               <a:solidFill>
@@ -8238,9 +8136,7 @@
             <p:ph type="sldImg"/>
           </p:nvPr>
         </p:nvSpPr>
-        <p:spPr>
-          <a:ln/>
-        </p:spPr>
+        <p:spPr/>
       </p:sp>
       <p:sp>
         <p:nvSpPr>
@@ -8254,7 +8150,6 @@
         </p:nvSpPr>
         <p:spPr>
           <a:noFill/>
-          <a:ln/>
           <a:extLst>
             <a:ext uri="{909E8E84-426E-40DD-AFC4-6F175D3DCCD1}">
               <a14:hiddenFill xmlns:a14="http://schemas.microsoft.com/office/drawing/2010/main">
@@ -8285,11 +8180,6 @@
         </p:txBody>
       </p:sp>
     </p:spTree>
-    <p:extLst>
-      <p:ext uri="{BB962C8B-B14F-4D97-AF65-F5344CB8AC3E}">
-        <p14:creationId xmlns:p14="http://schemas.microsoft.com/office/powerpoint/2010/main" val="2268469129"/>
-      </p:ext>
-    </p:extLst>
   </p:cSld>
   <p:clrMapOvr>
     <a:masterClrMapping/>
@@ -8326,7 +8216,6 @@
         </p:nvSpPr>
         <p:spPr>
           <a:noFill/>
-          <a:ln/>
           <a:extLst>
             <a:ext uri="{909E8E84-426E-40DD-AFC4-6F175D3DCCD1}">
               <a14:hiddenFill xmlns:a14="http://schemas.microsoft.com/office/drawing/2010/main">
@@ -8456,6 +8345,11 @@
               </a:rPr>
               <a:t>Handouts</a:t>
             </a:r>
+            <a:endParaRPr lang="en-US" sz="1100" b="0" smtClean="0">
+              <a:solidFill>
+                <a:schemeClr val="tx1"/>
+              </a:solidFill>
+            </a:endParaRPr>
           </a:p>
         </p:txBody>
       </p:sp>
@@ -8471,7 +8365,6 @@
         </p:nvSpPr>
         <p:spPr>
           <a:noFill/>
-          <a:ln/>
           <a:extLst>
             <a:ext uri="{909E8E84-426E-40DD-AFC4-6F175D3DCCD1}">
               <a14:hiddenFill xmlns:a14="http://schemas.microsoft.com/office/drawing/2010/main">
@@ -8599,8 +8492,6 @@
                   <a:schemeClr val="tx1"/>
                 </a:solidFill>
               </a:rPr>
-              <a:pPr/>
-              <a:t>28</a:t>
             </a:fld>
             <a:endParaRPr lang="en-US" sz="1100" b="0">
               <a:solidFill>
@@ -8620,9 +8511,7 @@
             <p:ph type="sldImg"/>
           </p:nvPr>
         </p:nvSpPr>
-        <p:spPr>
-          <a:ln/>
-        </p:spPr>
+        <p:spPr/>
       </p:sp>
       <p:sp>
         <p:nvSpPr>
@@ -8636,7 +8525,6 @@
         </p:nvSpPr>
         <p:spPr>
           <a:noFill/>
-          <a:ln/>
           <a:extLst>
             <a:ext uri="{909E8E84-426E-40DD-AFC4-6F175D3DCCD1}">
               <a14:hiddenFill xmlns:a14="http://schemas.microsoft.com/office/drawing/2010/main">
@@ -8667,11 +8555,6 @@
         </p:txBody>
       </p:sp>
     </p:spTree>
-    <p:extLst>
-      <p:ext uri="{BB962C8B-B14F-4D97-AF65-F5344CB8AC3E}">
-        <p14:creationId xmlns:p14="http://schemas.microsoft.com/office/powerpoint/2010/main" val="3928617713"/>
-      </p:ext>
-    </p:extLst>
   </p:cSld>
   <p:clrMapOvr>
     <a:masterClrMapping/>
@@ -8708,7 +8591,6 @@
         </p:nvSpPr>
         <p:spPr>
           <a:noFill/>
-          <a:ln/>
           <a:extLst>
             <a:ext uri="{909E8E84-426E-40DD-AFC4-6F175D3DCCD1}">
               <a14:hiddenFill xmlns:a14="http://schemas.microsoft.com/office/drawing/2010/main">
@@ -8838,6 +8720,11 @@
               </a:rPr>
               <a:t>Handouts</a:t>
             </a:r>
+            <a:endParaRPr lang="en-US" sz="1100" b="0" smtClean="0">
+              <a:solidFill>
+                <a:schemeClr val="tx1"/>
+              </a:solidFill>
+            </a:endParaRPr>
           </a:p>
         </p:txBody>
       </p:sp>
@@ -8853,7 +8740,6 @@
         </p:nvSpPr>
         <p:spPr>
           <a:noFill/>
-          <a:ln/>
           <a:extLst>
             <a:ext uri="{909E8E84-426E-40DD-AFC4-6F175D3DCCD1}">
               <a14:hiddenFill xmlns:a14="http://schemas.microsoft.com/office/drawing/2010/main">
@@ -8981,8 +8867,6 @@
                   <a:schemeClr val="tx1"/>
                 </a:solidFill>
               </a:rPr>
-              <a:pPr/>
-              <a:t>29</a:t>
             </a:fld>
             <a:endParaRPr lang="en-US" sz="1100" b="0">
               <a:solidFill>
@@ -9002,9 +8886,7 @@
             <p:ph type="sldImg"/>
           </p:nvPr>
         </p:nvSpPr>
-        <p:spPr>
-          <a:ln/>
-        </p:spPr>
+        <p:spPr/>
       </p:sp>
       <p:sp>
         <p:nvSpPr>
@@ -9018,7 +8900,6 @@
         </p:nvSpPr>
         <p:spPr>
           <a:noFill/>
-          <a:ln/>
           <a:extLst>
             <a:ext uri="{909E8E84-426E-40DD-AFC4-6F175D3DCCD1}">
               <a14:hiddenFill xmlns:a14="http://schemas.microsoft.com/office/drawing/2010/main">
@@ -9049,11 +8930,6 @@
         </p:txBody>
       </p:sp>
     </p:spTree>
-    <p:extLst>
-      <p:ext uri="{BB962C8B-B14F-4D97-AF65-F5344CB8AC3E}">
-        <p14:creationId xmlns:p14="http://schemas.microsoft.com/office/powerpoint/2010/main" val="1078081440"/>
-      </p:ext>
-    </p:extLst>
   </p:cSld>
   <p:clrMapOvr>
     <a:masterClrMapping/>
@@ -9090,7 +8966,6 @@
         </p:nvSpPr>
         <p:spPr>
           <a:noFill/>
-          <a:ln/>
           <a:extLst>
             <a:ext uri="{909E8E84-426E-40DD-AFC4-6F175D3DCCD1}">
               <a14:hiddenFill xmlns:a14="http://schemas.microsoft.com/office/drawing/2010/main">
@@ -9220,6 +9095,11 @@
               </a:rPr>
               <a:t>Handouts</a:t>
             </a:r>
+            <a:endParaRPr lang="en-US" sz="1100" b="0" smtClean="0">
+              <a:solidFill>
+                <a:schemeClr val="tx1"/>
+              </a:solidFill>
+            </a:endParaRPr>
           </a:p>
         </p:txBody>
       </p:sp>
@@ -9235,7 +9115,6 @@
         </p:nvSpPr>
         <p:spPr>
           <a:noFill/>
-          <a:ln/>
           <a:extLst>
             <a:ext uri="{909E8E84-426E-40DD-AFC4-6F175D3DCCD1}">
               <a14:hiddenFill xmlns:a14="http://schemas.microsoft.com/office/drawing/2010/main">
@@ -9363,8 +9242,6 @@
                   <a:schemeClr val="tx1"/>
                 </a:solidFill>
               </a:rPr>
-              <a:pPr/>
-              <a:t>30</a:t>
             </a:fld>
             <a:endParaRPr lang="en-US" sz="1100" b="0">
               <a:solidFill>
@@ -9384,9 +9261,7 @@
             <p:ph type="sldImg"/>
           </p:nvPr>
         </p:nvSpPr>
-        <p:spPr>
-          <a:ln/>
-        </p:spPr>
+        <p:spPr/>
       </p:sp>
       <p:sp>
         <p:nvSpPr>
@@ -9400,7 +9275,6 @@
         </p:nvSpPr>
         <p:spPr>
           <a:noFill/>
-          <a:ln/>
           <a:extLst>
             <a:ext uri="{909E8E84-426E-40DD-AFC4-6F175D3DCCD1}">
               <a14:hiddenFill xmlns:a14="http://schemas.microsoft.com/office/drawing/2010/main">
@@ -9438,15 +9312,11 @@
               <a:rPr lang="en-US" dirty="0" smtClean="0"/>
               <a:t> from other components of the system. Here isolate means putting restrictions around the underlying component to constrain its capabilities. A glue component provides the functionality to combine different components. Component tailoring refers to the ability to enhance the functionality of a component. Tailoring is done by adding some elements to a component to enrich it with a functionality not provided by the vendor. Tailoring does not involve modifying the source code of the component. An example of tailoring is “scripting,” where an application can be enhanced by executing a script upon the occurrence of some event.</a:t>
             </a:r>
+            <a:endParaRPr lang="en-US" dirty="0" smtClean="0"/>
           </a:p>
         </p:txBody>
       </p:sp>
     </p:spTree>
-    <p:extLst>
-      <p:ext uri="{BB962C8B-B14F-4D97-AF65-F5344CB8AC3E}">
-        <p14:creationId xmlns:p14="http://schemas.microsoft.com/office/powerpoint/2010/main" val="670044789"/>
-      </p:ext>
-    </p:extLst>
   </p:cSld>
   <p:clrMapOvr>
     <a:masterClrMapping/>
@@ -9483,7 +9353,6 @@
         </p:nvSpPr>
         <p:spPr>
           <a:noFill/>
-          <a:ln/>
           <a:extLst>
             <a:ext uri="{909E8E84-426E-40DD-AFC4-6F175D3DCCD1}">
               <a14:hiddenFill xmlns:a14="http://schemas.microsoft.com/office/drawing/2010/main">
@@ -9613,6 +9482,11 @@
               </a:rPr>
               <a:t>Handouts</a:t>
             </a:r>
+            <a:endParaRPr lang="en-US" sz="1100" b="0" smtClean="0">
+              <a:solidFill>
+                <a:schemeClr val="tx1"/>
+              </a:solidFill>
+            </a:endParaRPr>
           </a:p>
         </p:txBody>
       </p:sp>
@@ -9628,7 +9502,6 @@
         </p:nvSpPr>
         <p:spPr>
           <a:noFill/>
-          <a:ln/>
           <a:extLst>
             <a:ext uri="{909E8E84-426E-40DD-AFC4-6F175D3DCCD1}">
               <a14:hiddenFill xmlns:a14="http://schemas.microsoft.com/office/drawing/2010/main">
@@ -9756,8 +9629,6 @@
                   <a:schemeClr val="tx1"/>
                 </a:solidFill>
               </a:rPr>
-              <a:pPr/>
-              <a:t>31</a:t>
             </a:fld>
             <a:endParaRPr lang="en-US" sz="1100" b="0">
               <a:solidFill>
@@ -9777,9 +9648,7 @@
             <p:ph type="sldImg"/>
           </p:nvPr>
         </p:nvSpPr>
-        <p:spPr>
-          <a:ln/>
-        </p:spPr>
+        <p:spPr/>
       </p:sp>
       <p:sp>
         <p:nvSpPr>
@@ -9793,7 +9662,6 @@
         </p:nvSpPr>
         <p:spPr>
           <a:noFill/>
-          <a:ln/>
           <a:extLst>
             <a:ext uri="{909E8E84-426E-40DD-AFC4-6F175D3DCCD1}">
               <a14:hiddenFill xmlns:a14="http://schemas.microsoft.com/office/drawing/2010/main">
@@ -9831,15 +9699,11 @@
               <a:rPr lang="en-US" dirty="0" smtClean="0"/>
               <a:t> from other components of the system. Here isolate means putting restrictions around the underlying component to constrain its capabilities. A glue component provides the functionality to combine different components. Component tailoring refers to the ability to enhance the functionality of a component. Tailoring is done by adding some elements to a component to enrich it with a functionality not provided by the vendor. Tailoring does not involve modifying the source code of the component. An example of tailoring is “scripting,” where an application can be enhanced by executing a script upon the occurrence of some event.</a:t>
             </a:r>
+            <a:endParaRPr lang="en-US" dirty="0" smtClean="0"/>
           </a:p>
         </p:txBody>
       </p:sp>
     </p:spTree>
-    <p:extLst>
-      <p:ext uri="{BB962C8B-B14F-4D97-AF65-F5344CB8AC3E}">
-        <p14:creationId xmlns:p14="http://schemas.microsoft.com/office/powerpoint/2010/main" val="46794094"/>
-      </p:ext>
-    </p:extLst>
   </p:cSld>
   <p:clrMapOvr>
     <a:masterClrMapping/>
@@ -9876,7 +9740,6 @@
         </p:nvSpPr>
         <p:spPr>
           <a:noFill/>
-          <a:ln/>
           <a:extLst>
             <a:ext uri="{909E8E84-426E-40DD-AFC4-6F175D3DCCD1}">
               <a14:hiddenFill xmlns:a14="http://schemas.microsoft.com/office/drawing/2010/main">
@@ -10006,6 +9869,11 @@
               </a:rPr>
               <a:t>Handouts</a:t>
             </a:r>
+            <a:endParaRPr lang="en-US" sz="1100" b="0" smtClean="0">
+              <a:solidFill>
+                <a:schemeClr val="tx1"/>
+              </a:solidFill>
+            </a:endParaRPr>
           </a:p>
         </p:txBody>
       </p:sp>
@@ -10021,7 +9889,6 @@
         </p:nvSpPr>
         <p:spPr>
           <a:noFill/>
-          <a:ln/>
           <a:extLst>
             <a:ext uri="{909E8E84-426E-40DD-AFC4-6F175D3DCCD1}">
               <a14:hiddenFill xmlns:a14="http://schemas.microsoft.com/office/drawing/2010/main">
@@ -10149,8 +10016,6 @@
                   <a:schemeClr val="tx1"/>
                 </a:solidFill>
               </a:rPr>
-              <a:pPr/>
-              <a:t>3</a:t>
             </a:fld>
             <a:endParaRPr lang="en-US" sz="1100" b="0">
               <a:solidFill>
@@ -10170,9 +10035,7 @@
             <p:ph type="sldImg"/>
           </p:nvPr>
         </p:nvSpPr>
-        <p:spPr>
-          <a:ln/>
-        </p:spPr>
+        <p:spPr/>
       </p:sp>
       <p:sp>
         <p:nvSpPr>
@@ -10186,7 +10049,6 @@
         </p:nvSpPr>
         <p:spPr>
           <a:noFill/>
-          <a:ln/>
           <a:extLst>
             <a:ext uri="{909E8E84-426E-40DD-AFC4-6F175D3DCCD1}">
               <a14:hiddenFill xmlns:a14="http://schemas.microsoft.com/office/drawing/2010/main">
@@ -10217,11 +10079,6 @@
         </p:txBody>
       </p:sp>
     </p:spTree>
-    <p:extLst>
-      <p:ext uri="{BB962C8B-B14F-4D97-AF65-F5344CB8AC3E}">
-        <p14:creationId xmlns:p14="http://schemas.microsoft.com/office/powerpoint/2010/main" val="3680911247"/>
-      </p:ext>
-    </p:extLst>
   </p:cSld>
   <p:clrMapOvr>
     <a:masterClrMapping/>
@@ -10258,7 +10115,6 @@
         </p:nvSpPr>
         <p:spPr>
           <a:noFill/>
-          <a:ln/>
           <a:extLst>
             <a:ext uri="{909E8E84-426E-40DD-AFC4-6F175D3DCCD1}">
               <a14:hiddenFill xmlns:a14="http://schemas.microsoft.com/office/drawing/2010/main">
@@ -10388,6 +10244,11 @@
               </a:rPr>
               <a:t>Handouts</a:t>
             </a:r>
+            <a:endParaRPr lang="en-US" sz="1100" b="0" smtClean="0">
+              <a:solidFill>
+                <a:schemeClr val="tx1"/>
+              </a:solidFill>
+            </a:endParaRPr>
           </a:p>
         </p:txBody>
       </p:sp>
@@ -10403,7 +10264,6 @@
         </p:nvSpPr>
         <p:spPr>
           <a:noFill/>
-          <a:ln/>
           <a:extLst>
             <a:ext uri="{909E8E84-426E-40DD-AFC4-6F175D3DCCD1}">
               <a14:hiddenFill xmlns:a14="http://schemas.microsoft.com/office/drawing/2010/main">
@@ -10531,8 +10391,6 @@
                   <a:schemeClr val="tx1"/>
                 </a:solidFill>
               </a:rPr>
-              <a:pPr/>
-              <a:t>32</a:t>
             </a:fld>
             <a:endParaRPr lang="en-US" sz="1100" b="0">
               <a:solidFill>
@@ -10552,9 +10410,7 @@
             <p:ph type="sldImg"/>
           </p:nvPr>
         </p:nvSpPr>
-        <p:spPr>
-          <a:ln/>
-        </p:spPr>
+        <p:spPr/>
       </p:sp>
       <p:sp>
         <p:nvSpPr>
@@ -10568,7 +10424,6 @@
         </p:nvSpPr>
         <p:spPr>
           <a:noFill/>
-          <a:ln/>
           <a:extLst>
             <a:ext uri="{909E8E84-426E-40DD-AFC4-6F175D3DCCD1}">
               <a14:hiddenFill xmlns:a14="http://schemas.microsoft.com/office/drawing/2010/main">
@@ -10599,11 +10454,6 @@
         </p:txBody>
       </p:sp>
     </p:spTree>
-    <p:extLst>
-      <p:ext uri="{BB962C8B-B14F-4D97-AF65-F5344CB8AC3E}">
-        <p14:creationId xmlns:p14="http://schemas.microsoft.com/office/powerpoint/2010/main" val="1320344390"/>
-      </p:ext>
-    </p:extLst>
   </p:cSld>
   <p:clrMapOvr>
     <a:masterClrMapping/>
@@ -10640,7 +10490,6 @@
         </p:nvSpPr>
         <p:spPr>
           <a:noFill/>
-          <a:ln/>
           <a:extLst>
             <a:ext uri="{909E8E84-426E-40DD-AFC4-6F175D3DCCD1}">
               <a14:hiddenFill xmlns:a14="http://schemas.microsoft.com/office/drawing/2010/main">
@@ -10770,6 +10619,11 @@
               </a:rPr>
               <a:t>Handouts</a:t>
             </a:r>
+            <a:endParaRPr lang="en-US" sz="1100" b="0" smtClean="0">
+              <a:solidFill>
+                <a:schemeClr val="tx1"/>
+              </a:solidFill>
+            </a:endParaRPr>
           </a:p>
         </p:txBody>
       </p:sp>
@@ -10785,7 +10639,6 @@
         </p:nvSpPr>
         <p:spPr>
           <a:noFill/>
-          <a:ln/>
           <a:extLst>
             <a:ext uri="{909E8E84-426E-40DD-AFC4-6F175D3DCCD1}">
               <a14:hiddenFill xmlns:a14="http://schemas.microsoft.com/office/drawing/2010/main">
@@ -10913,8 +10766,6 @@
                   <a:schemeClr val="tx1"/>
                 </a:solidFill>
               </a:rPr>
-              <a:pPr/>
-              <a:t>33</a:t>
             </a:fld>
             <a:endParaRPr lang="en-US" sz="1100" b="0">
               <a:solidFill>
@@ -10934,9 +10785,7 @@
             <p:ph type="sldImg"/>
           </p:nvPr>
         </p:nvSpPr>
-        <p:spPr>
-          <a:ln/>
-        </p:spPr>
+        <p:spPr/>
       </p:sp>
       <p:sp>
         <p:nvSpPr>
@@ -10950,7 +10799,6 @@
         </p:nvSpPr>
         <p:spPr>
           <a:noFill/>
-          <a:ln/>
           <a:extLst>
             <a:ext uri="{909E8E84-426E-40DD-AFC4-6F175D3DCCD1}">
               <a14:hiddenFill xmlns:a14="http://schemas.microsoft.com/office/drawing/2010/main">
@@ -10981,11 +10829,6 @@
         </p:txBody>
       </p:sp>
     </p:spTree>
-    <p:extLst>
-      <p:ext uri="{BB962C8B-B14F-4D97-AF65-F5344CB8AC3E}">
-        <p14:creationId xmlns:p14="http://schemas.microsoft.com/office/powerpoint/2010/main" val="3829704178"/>
-      </p:ext>
-    </p:extLst>
   </p:cSld>
   <p:clrMapOvr>
     <a:masterClrMapping/>
@@ -11022,7 +10865,6 @@
         </p:nvSpPr>
         <p:spPr>
           <a:noFill/>
-          <a:ln/>
           <a:extLst>
             <a:ext uri="{909E8E84-426E-40DD-AFC4-6F175D3DCCD1}">
               <a14:hiddenFill xmlns:a14="http://schemas.microsoft.com/office/drawing/2010/main">
@@ -11152,6 +10994,11 @@
               </a:rPr>
               <a:t>Handouts</a:t>
             </a:r>
+            <a:endParaRPr lang="en-US" sz="1100" b="0" smtClean="0">
+              <a:solidFill>
+                <a:schemeClr val="tx1"/>
+              </a:solidFill>
+            </a:endParaRPr>
           </a:p>
         </p:txBody>
       </p:sp>
@@ -11167,7 +11014,6 @@
         </p:nvSpPr>
         <p:spPr>
           <a:noFill/>
-          <a:ln/>
           <a:extLst>
             <a:ext uri="{909E8E84-426E-40DD-AFC4-6F175D3DCCD1}">
               <a14:hiddenFill xmlns:a14="http://schemas.microsoft.com/office/drawing/2010/main">
@@ -11295,8 +11141,6 @@
                   <a:schemeClr val="tx1"/>
                 </a:solidFill>
               </a:rPr>
-              <a:pPr/>
-              <a:t>34</a:t>
             </a:fld>
             <a:endParaRPr lang="en-US" sz="1100" b="0">
               <a:solidFill>
@@ -11316,9 +11160,7 @@
             <p:ph type="sldImg"/>
           </p:nvPr>
         </p:nvSpPr>
-        <p:spPr>
-          <a:ln/>
-        </p:spPr>
+        <p:spPr/>
       </p:sp>
       <p:sp>
         <p:nvSpPr>
@@ -11332,7 +11174,6 @@
         </p:nvSpPr>
         <p:spPr>
           <a:noFill/>
-          <a:ln/>
           <a:extLst>
             <a:ext uri="{909E8E84-426E-40DD-AFC4-6F175D3DCCD1}">
               <a14:hiddenFill xmlns:a14="http://schemas.microsoft.com/office/drawing/2010/main">
@@ -11363,11 +11204,6 @@
         </p:txBody>
       </p:sp>
     </p:spTree>
-    <p:extLst>
-      <p:ext uri="{BB962C8B-B14F-4D97-AF65-F5344CB8AC3E}">
-        <p14:creationId xmlns:p14="http://schemas.microsoft.com/office/powerpoint/2010/main" val="2189290641"/>
-      </p:ext>
-    </p:extLst>
   </p:cSld>
   <p:clrMapOvr>
     <a:masterClrMapping/>
@@ -11423,12 +11259,14 @@
               <a:rPr lang="en-US" b="1" dirty="0" smtClean="0"/>
               <a:t>Procedure Call Interface (Local Control Transfer)</a:t>
             </a:r>
+            <a:endParaRPr lang="en-US" b="1" dirty="0" smtClean="0"/>
           </a:p>
           <a:p>
             <a:r>
               <a:rPr lang="en-US" dirty="0" smtClean="0"/>
               <a:t>This is the most common and traditional form of interfacing. It involves one function explicitly invoking another, passing control and data directly across a boundary (often within the same process or application).</a:t>
             </a:r>
+            <a:endParaRPr lang="en-US" dirty="0" smtClean="0"/>
           </a:p>
           <a:p>
             <a:endParaRPr lang="en-US" dirty="0"/>
@@ -11452,18 +11290,12 @@
           <a:p>
             <a:fld id="{0A726568-9AD2-4C38-92B6-D453E16076B3}" type="slidenum">
               <a:rPr lang="en-US" smtClean="0"/>
-              <a:t>5</a:t>
             </a:fld>
             <a:endParaRPr lang="en-US"/>
           </a:p>
         </p:txBody>
       </p:sp>
     </p:spTree>
-    <p:extLst>
-      <p:ext uri="{BB962C8B-B14F-4D97-AF65-F5344CB8AC3E}">
-        <p14:creationId xmlns:p14="http://schemas.microsoft.com/office/powerpoint/2010/main" val="3300050378"/>
-      </p:ext>
-    </p:extLst>
   </p:cSld>
   <p:clrMapOvr>
     <a:masterClrMapping/>
@@ -11519,12 +11351,14 @@
               <a:rPr lang="en-US" b="1" dirty="0" smtClean="0"/>
               <a:t>Shared Memory Interface (Direct Data Access)</a:t>
             </a:r>
+            <a:endParaRPr lang="en-US" b="1" dirty="0" smtClean="0"/>
           </a:p>
           <a:p>
             <a:r>
               <a:rPr lang="en-US" dirty="0" smtClean="0"/>
               <a:t>This is a high-performance method where two modules (often separate processes) bypass typical communication protocols to read and write data to the same designated block of computer memory. This is common in operating systems, gaming, and high-speed data processing applications.</a:t>
             </a:r>
+            <a:endParaRPr lang="en-US" dirty="0" smtClean="0"/>
           </a:p>
           <a:p>
             <a:endParaRPr lang="en-US" dirty="0"/>
@@ -11548,18 +11382,12 @@
           <a:p>
             <a:fld id="{0A726568-9AD2-4C38-92B6-D453E16076B3}" type="slidenum">
               <a:rPr lang="en-US" smtClean="0"/>
-              <a:t>6</a:t>
             </a:fld>
             <a:endParaRPr lang="en-US"/>
           </a:p>
         </p:txBody>
       </p:sp>
     </p:spTree>
-    <p:extLst>
-      <p:ext uri="{BB962C8B-B14F-4D97-AF65-F5344CB8AC3E}">
-        <p14:creationId xmlns:p14="http://schemas.microsoft.com/office/powerpoint/2010/main" val="2079129085"/>
-      </p:ext>
-    </p:extLst>
   </p:cSld>
   <p:clrMapOvr>
     <a:masterClrMapping/>
@@ -11615,6 +11443,7 @@
               <a:rPr lang="en-US" b="1" dirty="0" smtClean="0"/>
               <a:t>3. Message Passing Interface (Asynchronous Communication)</a:t>
             </a:r>
+            <a:endParaRPr lang="en-US" b="1" dirty="0" smtClean="0"/>
           </a:p>
           <a:p>
             <a:r>
@@ -11650,18 +11479,12 @@
           <a:p>
             <a:fld id="{0A726568-9AD2-4C38-92B6-D453E16076B3}" type="slidenum">
               <a:rPr lang="en-US" smtClean="0"/>
-              <a:t>7</a:t>
             </a:fld>
             <a:endParaRPr lang="en-US"/>
           </a:p>
         </p:txBody>
       </p:sp>
     </p:spTree>
-    <p:extLst>
-      <p:ext uri="{BB962C8B-B14F-4D97-AF65-F5344CB8AC3E}">
-        <p14:creationId xmlns:p14="http://schemas.microsoft.com/office/powerpoint/2010/main" val="715541001"/>
-      </p:ext>
-    </p:extLst>
   </p:cSld>
   <p:clrMapOvr>
     <a:masterClrMapping/>
@@ -11698,7 +11521,6 @@
         </p:nvSpPr>
         <p:spPr>
           <a:noFill/>
-          <a:ln/>
           <a:extLst>
             <a:ext uri="{909E8E84-426E-40DD-AFC4-6F175D3DCCD1}">
               <a14:hiddenFill xmlns:a14="http://schemas.microsoft.com/office/drawing/2010/main">
@@ -11828,6 +11650,11 @@
               </a:rPr>
               <a:t>Handouts</a:t>
             </a:r>
+            <a:endParaRPr lang="en-US" sz="1100" b="0" smtClean="0">
+              <a:solidFill>
+                <a:schemeClr val="tx1"/>
+              </a:solidFill>
+            </a:endParaRPr>
           </a:p>
         </p:txBody>
       </p:sp>
@@ -11843,7 +11670,6 @@
         </p:nvSpPr>
         <p:spPr>
           <a:noFill/>
-          <a:ln/>
           <a:extLst>
             <a:ext uri="{909E8E84-426E-40DD-AFC4-6F175D3DCCD1}">
               <a14:hiddenFill xmlns:a14="http://schemas.microsoft.com/office/drawing/2010/main">
@@ -11971,8 +11797,6 @@
                   <a:schemeClr val="tx1"/>
                 </a:solidFill>
               </a:rPr>
-              <a:pPr/>
-              <a:t>9</a:t>
             </a:fld>
             <a:endParaRPr lang="en-US" sz="1100" b="0">
               <a:solidFill>
@@ -11992,9 +11816,7 @@
             <p:ph type="sldImg"/>
           </p:nvPr>
         </p:nvSpPr>
-        <p:spPr>
-          <a:ln/>
-        </p:spPr>
+        <p:spPr/>
       </p:sp>
       <p:sp>
         <p:nvSpPr>
@@ -12008,7 +11830,6 @@
         </p:nvSpPr>
         <p:spPr>
           <a:noFill/>
-          <a:ln/>
           <a:extLst>
             <a:ext uri="{909E8E84-426E-40DD-AFC4-6F175D3DCCD1}">
               <a14:hiddenFill xmlns:a14="http://schemas.microsoft.com/office/drawing/2010/main">
@@ -12039,11 +11860,6 @@
         </p:txBody>
       </p:sp>
     </p:spTree>
-    <p:extLst>
-      <p:ext uri="{BB962C8B-B14F-4D97-AF65-F5344CB8AC3E}">
-        <p14:creationId xmlns:p14="http://schemas.microsoft.com/office/powerpoint/2010/main" val="2967016729"/>
-      </p:ext>
-    </p:extLst>
   </p:cSld>
   <p:clrMapOvr>
     <a:masterClrMapping/>
@@ -12080,7 +11896,6 @@
         </p:nvSpPr>
         <p:spPr>
           <a:noFill/>
-          <a:ln/>
           <a:extLst>
             <a:ext uri="{909E8E84-426E-40DD-AFC4-6F175D3DCCD1}">
               <a14:hiddenFill xmlns:a14="http://schemas.microsoft.com/office/drawing/2010/main">
@@ -12210,6 +12025,11 @@
               </a:rPr>
               <a:t>Handouts</a:t>
             </a:r>
+            <a:endParaRPr lang="en-US" sz="1100" b="0" smtClean="0">
+              <a:solidFill>
+                <a:schemeClr val="tx1"/>
+              </a:solidFill>
+            </a:endParaRPr>
           </a:p>
         </p:txBody>
       </p:sp>
@@ -12225,7 +12045,6 @@
         </p:nvSpPr>
         <p:spPr>
           <a:noFill/>
-          <a:ln/>
           <a:extLst>
             <a:ext uri="{909E8E84-426E-40DD-AFC4-6F175D3DCCD1}">
               <a14:hiddenFill xmlns:a14="http://schemas.microsoft.com/office/drawing/2010/main">
@@ -12353,8 +12172,6 @@
                   <a:schemeClr val="tx1"/>
                 </a:solidFill>
               </a:rPr>
-              <a:pPr/>
-              <a:t>10</a:t>
             </a:fld>
             <a:endParaRPr lang="en-US" sz="1100" b="0">
               <a:solidFill>
@@ -12374,9 +12191,7 @@
             <p:ph type="sldImg"/>
           </p:nvPr>
         </p:nvSpPr>
-        <p:spPr>
-          <a:ln/>
-        </p:spPr>
+        <p:spPr/>
       </p:sp>
       <p:sp>
         <p:nvSpPr>
@@ -12390,7 +12205,6 @@
         </p:nvSpPr>
         <p:spPr>
           <a:noFill/>
-          <a:ln/>
           <a:extLst>
             <a:ext uri="{909E8E84-426E-40DD-AFC4-6F175D3DCCD1}">
               <a14:hiddenFill xmlns:a14="http://schemas.microsoft.com/office/drawing/2010/main">
@@ -12420,6 +12234,7 @@
               <a:rPr lang="en-US" dirty="0" smtClean="0"/>
               <a:t> Integration testing need not wait until all the modules of a system are</a:t>
             </a:r>
+            <a:endParaRPr lang="en-US" dirty="0" smtClean="0"/>
           </a:p>
           <a:p>
             <a:pPr eaLnBrk="1" hangingPunct="1"/>
@@ -12427,6 +12242,7 @@
               <a:rPr lang="en-US" dirty="0" smtClean="0"/>
               <a:t>coded and unit tested. Instead, it can begin as soon as the relevant modules are</a:t>
             </a:r>
+            <a:endParaRPr lang="en-US" dirty="0" smtClean="0"/>
           </a:p>
           <a:p>
             <a:pPr eaLnBrk="1" hangingPunct="1"/>
@@ -12434,12 +12250,14 @@
               <a:rPr lang="en-US" dirty="0" smtClean="0"/>
               <a:t>available. </a:t>
             </a:r>
+            <a:endParaRPr lang="en-US" dirty="0" smtClean="0"/>
           </a:p>
           <a:p>
             <a:r>
               <a:rPr lang="en-US" dirty="0" smtClean="0"/>
               <a:t>This form typically requires sign-offs and verification that the following tasks are complete:</a:t>
             </a:r>
+            <a:endParaRPr lang="en-US" dirty="0" smtClean="0"/>
           </a:p>
           <a:p>
             <a:r>
@@ -12450,6 +12268,7 @@
               <a:rPr lang="en-US" dirty="0" smtClean="0"/>
               <a:t> All individual functions within the module have been covered by unit tests, and they all pass.</a:t>
             </a:r>
+            <a:endParaRPr lang="en-US" dirty="0" smtClean="0"/>
           </a:p>
           <a:p>
             <a:r>
@@ -12460,6 +12279,7 @@
               <a:rPr lang="en-US" dirty="0" smtClean="0"/>
               <a:t> The code has been formally reviewed by a peer, and all issues have been resolved.</a:t>
             </a:r>
+            <a:endParaRPr lang="en-US" dirty="0" smtClean="0"/>
           </a:p>
           <a:p>
             <a:r>
@@ -12470,6 +12290,7 @@
               <a:rPr lang="en-US" dirty="0" smtClean="0"/>
               <a:t> The module's interface (API) and any special configuration steps are clearly documented.</a:t>
             </a:r>
+            <a:endParaRPr lang="en-US" dirty="0" smtClean="0"/>
           </a:p>
           <a:p>
             <a:r>
@@ -12480,6 +12301,7 @@
               <a:rPr lang="en-US" dirty="0" smtClean="0"/>
               <a:t> The code is stable and meets the project's definition of "ready."</a:t>
             </a:r>
+            <a:endParaRPr lang="en-US" dirty="0" smtClean="0"/>
           </a:p>
           <a:p>
             <a:pPr eaLnBrk="1" hangingPunct="1"/>
@@ -12488,11 +12310,6 @@
         </p:txBody>
       </p:sp>
     </p:spTree>
-    <p:extLst>
-      <p:ext uri="{BB962C8B-B14F-4D97-AF65-F5344CB8AC3E}">
-        <p14:creationId xmlns:p14="http://schemas.microsoft.com/office/powerpoint/2010/main" val="1337835504"/>
-      </p:ext>
-    </p:extLst>
   </p:cSld>
   <p:clrMapOvr>
     <a:masterClrMapping/>
@@ -12529,7 +12346,6 @@
         </p:nvSpPr>
         <p:spPr>
           <a:noFill/>
-          <a:ln/>
           <a:extLst>
             <a:ext uri="{909E8E84-426E-40DD-AFC4-6F175D3DCCD1}">
               <a14:hiddenFill xmlns:a14="http://schemas.microsoft.com/office/drawing/2010/main">
@@ -12659,6 +12475,11 @@
               </a:rPr>
               <a:t>Handouts</a:t>
             </a:r>
+            <a:endParaRPr lang="en-US" sz="1100" b="0" smtClean="0">
+              <a:solidFill>
+                <a:schemeClr val="tx1"/>
+              </a:solidFill>
+            </a:endParaRPr>
           </a:p>
         </p:txBody>
       </p:sp>
@@ -12674,7 +12495,6 @@
         </p:nvSpPr>
         <p:spPr>
           <a:noFill/>
-          <a:ln/>
           <a:extLst>
             <a:ext uri="{909E8E84-426E-40DD-AFC4-6F175D3DCCD1}">
               <a14:hiddenFill xmlns:a14="http://schemas.microsoft.com/office/drawing/2010/main">
@@ -12802,8 +12622,6 @@
                   <a:schemeClr val="tx1"/>
                 </a:solidFill>
               </a:rPr>
-              <a:pPr/>
-              <a:t>11</a:t>
             </a:fld>
             <a:endParaRPr lang="en-US" sz="1100" b="0">
               <a:solidFill>
@@ -12823,9 +12641,7 @@
             <p:ph type="sldImg"/>
           </p:nvPr>
         </p:nvSpPr>
-        <p:spPr>
-          <a:ln/>
-        </p:spPr>
+        <p:spPr/>
       </p:sp>
       <p:sp>
         <p:nvSpPr>
@@ -12839,7 +12655,6 @@
         </p:nvSpPr>
         <p:spPr>
           <a:noFill/>
-          <a:ln/>
           <a:extLst>
             <a:ext uri="{909E8E84-426E-40DD-AFC4-6F175D3DCCD1}">
               <a14:hiddenFill xmlns:a14="http://schemas.microsoft.com/office/drawing/2010/main">
@@ -12885,6 +12700,7 @@
               <a:rPr lang="en-US" dirty="0" smtClean="0"/>
               <a:t> Subassembly is the "Drivetrain"—the pedals and chain linked together. You verify that the chain moves when you push the pedals before you attach it to the frame and wheels (the final build).</a:t>
             </a:r>
+            <a:endParaRPr lang="en-US" dirty="0" smtClean="0"/>
           </a:p>
           <a:p>
             <a:pPr eaLnBrk="1" hangingPunct="1"/>
@@ -12896,6 +12712,7 @@
               <a:rPr lang="en-US" dirty="0" smtClean="0"/>
               <a:t>In the context of incremental system integration, exercising version control is the process of managing, tracking, and securing the different versions of both the individual modules and the resulting subassemblies. It ensures that the integration team is always working with authorized code and can "undo" an integration step if it introduces a critical failure.</a:t>
             </a:r>
+            <a:endParaRPr lang="en-US" dirty="0" smtClean="0"/>
           </a:p>
           <a:p>
             <a:pPr eaLnBrk="1" hangingPunct="1"/>
@@ -12904,11 +12721,6 @@
         </p:txBody>
       </p:sp>
     </p:spTree>
-    <p:extLst>
-      <p:ext uri="{BB962C8B-B14F-4D97-AF65-F5344CB8AC3E}">
-        <p14:creationId xmlns:p14="http://schemas.microsoft.com/office/powerpoint/2010/main" val="4052940431"/>
-      </p:ext>
-    </p:extLst>
   </p:cSld>
   <p:clrMapOvr>
     <a:masterClrMapping/>
@@ -13047,7 +12859,6 @@
           <a:p>
             <a:fld id="{32635E77-B8A1-4882-9E33-3505DBC8DFAD}" type="datetimeFigureOut">
               <a:rPr lang="en-US" smtClean="0"/>
-              <a:t>3/10/2026</a:t>
             </a:fld>
             <a:endParaRPr lang="en-US"/>
           </a:p>
@@ -13089,18 +12900,12 @@
           <a:p>
             <a:fld id="{05A0B8EB-BCED-491D-8583-2F193039CE7A}" type="slidenum">
               <a:rPr lang="en-US" smtClean="0"/>
-              <a:t>‹#›</a:t>
             </a:fld>
             <a:endParaRPr lang="en-US"/>
           </a:p>
         </p:txBody>
       </p:sp>
     </p:spTree>
-    <p:extLst>
-      <p:ext uri="{BB962C8B-B14F-4D97-AF65-F5344CB8AC3E}">
-        <p14:creationId xmlns:p14="http://schemas.microsoft.com/office/powerpoint/2010/main" val="2805261191"/>
-      </p:ext>
-    </p:extLst>
   </p:cSld>
   <p:clrMapOvr>
     <a:masterClrMapping/>
@@ -13168,6 +12973,7 @@
               <a:rPr lang="en-US" smtClean="0"/>
               <a:t>Click to edit Master text styles</a:t>
             </a:r>
+            <a:endParaRPr lang="en-US" smtClean="0"/>
           </a:p>
           <a:p>
             <a:pPr lvl="1"/>
@@ -13175,6 +12981,7 @@
               <a:rPr lang="en-US" smtClean="0"/>
               <a:t>Second level</a:t>
             </a:r>
+            <a:endParaRPr lang="en-US" smtClean="0"/>
           </a:p>
           <a:p>
             <a:pPr lvl="2"/>
@@ -13182,6 +12989,7 @@
               <a:rPr lang="en-US" smtClean="0"/>
               <a:t>Third level</a:t>
             </a:r>
+            <a:endParaRPr lang="en-US" smtClean="0"/>
           </a:p>
           <a:p>
             <a:pPr lvl="3"/>
@@ -13189,6 +12997,7 @@
               <a:rPr lang="en-US" smtClean="0"/>
               <a:t>Fourth level</a:t>
             </a:r>
+            <a:endParaRPr lang="en-US" smtClean="0"/>
           </a:p>
           <a:p>
             <a:pPr lvl="4"/>
@@ -13217,7 +13026,6 @@
           <a:p>
             <a:fld id="{32635E77-B8A1-4882-9E33-3505DBC8DFAD}" type="datetimeFigureOut">
               <a:rPr lang="en-US" smtClean="0"/>
-              <a:t>3/10/2026</a:t>
             </a:fld>
             <a:endParaRPr lang="en-US"/>
           </a:p>
@@ -13259,18 +13067,12 @@
           <a:p>
             <a:fld id="{05A0B8EB-BCED-491D-8583-2F193039CE7A}" type="slidenum">
               <a:rPr lang="en-US" smtClean="0"/>
-              <a:t>‹#›</a:t>
             </a:fld>
             <a:endParaRPr lang="en-US"/>
           </a:p>
         </p:txBody>
       </p:sp>
     </p:spTree>
-    <p:extLst>
-      <p:ext uri="{BB962C8B-B14F-4D97-AF65-F5344CB8AC3E}">
-        <p14:creationId xmlns:p14="http://schemas.microsoft.com/office/powerpoint/2010/main" val="2799627962"/>
-      </p:ext>
-    </p:extLst>
   </p:cSld>
   <p:clrMapOvr>
     <a:masterClrMapping/>
@@ -13348,6 +13150,7 @@
               <a:rPr lang="en-US" smtClean="0"/>
               <a:t>Click to edit Master text styles</a:t>
             </a:r>
+            <a:endParaRPr lang="en-US" smtClean="0"/>
           </a:p>
           <a:p>
             <a:pPr lvl="1"/>
@@ -13355,6 +13158,7 @@
               <a:rPr lang="en-US" smtClean="0"/>
               <a:t>Second level</a:t>
             </a:r>
+            <a:endParaRPr lang="en-US" smtClean="0"/>
           </a:p>
           <a:p>
             <a:pPr lvl="2"/>
@@ -13362,6 +13166,7 @@
               <a:rPr lang="en-US" smtClean="0"/>
               <a:t>Third level</a:t>
             </a:r>
+            <a:endParaRPr lang="en-US" smtClean="0"/>
           </a:p>
           <a:p>
             <a:pPr lvl="3"/>
@@ -13369,6 +13174,7 @@
               <a:rPr lang="en-US" smtClean="0"/>
               <a:t>Fourth level</a:t>
             </a:r>
+            <a:endParaRPr lang="en-US" smtClean="0"/>
           </a:p>
           <a:p>
             <a:pPr lvl="4"/>
@@ -13397,7 +13203,6 @@
           <a:p>
             <a:fld id="{32635E77-B8A1-4882-9E33-3505DBC8DFAD}" type="datetimeFigureOut">
               <a:rPr lang="en-US" smtClean="0"/>
-              <a:t>3/10/2026</a:t>
             </a:fld>
             <a:endParaRPr lang="en-US"/>
           </a:p>
@@ -13439,18 +13244,12 @@
           <a:p>
             <a:fld id="{05A0B8EB-BCED-491D-8583-2F193039CE7A}" type="slidenum">
               <a:rPr lang="en-US" smtClean="0"/>
-              <a:t>‹#›</a:t>
             </a:fld>
             <a:endParaRPr lang="en-US"/>
           </a:p>
         </p:txBody>
       </p:sp>
     </p:spTree>
-    <p:extLst>
-      <p:ext uri="{BB962C8B-B14F-4D97-AF65-F5344CB8AC3E}">
-        <p14:creationId xmlns:p14="http://schemas.microsoft.com/office/powerpoint/2010/main" val="1704980421"/>
-      </p:ext>
-    </p:extLst>
   </p:cSld>
   <p:clrMapOvr>
     <a:masterClrMapping/>
@@ -13518,6 +13317,7 @@
               <a:rPr lang="en-US" smtClean="0"/>
               <a:t>Click to edit Master text styles</a:t>
             </a:r>
+            <a:endParaRPr lang="en-US" smtClean="0"/>
           </a:p>
           <a:p>
             <a:pPr lvl="1"/>
@@ -13525,6 +13325,7 @@
               <a:rPr lang="en-US" smtClean="0"/>
               <a:t>Second level</a:t>
             </a:r>
+            <a:endParaRPr lang="en-US" smtClean="0"/>
           </a:p>
           <a:p>
             <a:pPr lvl="2"/>
@@ -13532,6 +13333,7 @@
               <a:rPr lang="en-US" smtClean="0"/>
               <a:t>Third level</a:t>
             </a:r>
+            <a:endParaRPr lang="en-US" smtClean="0"/>
           </a:p>
           <a:p>
             <a:pPr lvl="3"/>
@@ -13539,6 +13341,7 @@
               <a:rPr lang="en-US" smtClean="0"/>
               <a:t>Fourth level</a:t>
             </a:r>
+            <a:endParaRPr lang="en-US" smtClean="0"/>
           </a:p>
           <a:p>
             <a:pPr lvl="4"/>
@@ -13567,7 +13370,6 @@
           <a:p>
             <a:fld id="{32635E77-B8A1-4882-9E33-3505DBC8DFAD}" type="datetimeFigureOut">
               <a:rPr lang="en-US" smtClean="0"/>
-              <a:t>3/10/2026</a:t>
             </a:fld>
             <a:endParaRPr lang="en-US"/>
           </a:p>
@@ -13609,18 +13411,12 @@
           <a:p>
             <a:fld id="{05A0B8EB-BCED-491D-8583-2F193039CE7A}" type="slidenum">
               <a:rPr lang="en-US" smtClean="0"/>
-              <a:t>‹#›</a:t>
             </a:fld>
             <a:endParaRPr lang="en-US"/>
           </a:p>
         </p:txBody>
       </p:sp>
     </p:spTree>
-    <p:extLst>
-      <p:ext uri="{BB962C8B-B14F-4D97-AF65-F5344CB8AC3E}">
-        <p14:creationId xmlns:p14="http://schemas.microsoft.com/office/powerpoint/2010/main" val="2012103816"/>
-      </p:ext>
-    </p:extLst>
   </p:cSld>
   <p:clrMapOvr>
     <a:masterClrMapping/>
@@ -13793,6 +13589,7 @@
               <a:rPr lang="en-US" smtClean="0"/>
               <a:t>Click to edit Master text styles</a:t>
             </a:r>
+            <a:endParaRPr lang="en-US" smtClean="0"/>
           </a:p>
         </p:txBody>
       </p:sp>
@@ -13813,7 +13610,6 @@
           <a:p>
             <a:fld id="{32635E77-B8A1-4882-9E33-3505DBC8DFAD}" type="datetimeFigureOut">
               <a:rPr lang="en-US" smtClean="0"/>
-              <a:t>3/10/2026</a:t>
             </a:fld>
             <a:endParaRPr lang="en-US"/>
           </a:p>
@@ -13855,18 +13651,12 @@
           <a:p>
             <a:fld id="{05A0B8EB-BCED-491D-8583-2F193039CE7A}" type="slidenum">
               <a:rPr lang="en-US" smtClean="0"/>
-              <a:t>‹#›</a:t>
             </a:fld>
             <a:endParaRPr lang="en-US"/>
           </a:p>
         </p:txBody>
       </p:sp>
     </p:spTree>
-    <p:extLst>
-      <p:ext uri="{BB962C8B-B14F-4D97-AF65-F5344CB8AC3E}">
-        <p14:creationId xmlns:p14="http://schemas.microsoft.com/office/powerpoint/2010/main" val="1354123711"/>
-      </p:ext>
-    </p:extLst>
   </p:cSld>
   <p:clrMapOvr>
     <a:masterClrMapping/>
@@ -13939,6 +13729,7 @@
               <a:rPr lang="en-US" smtClean="0"/>
               <a:t>Click to edit Master text styles</a:t>
             </a:r>
+            <a:endParaRPr lang="en-US" smtClean="0"/>
           </a:p>
           <a:p>
             <a:pPr lvl="1"/>
@@ -13946,6 +13737,7 @@
               <a:rPr lang="en-US" smtClean="0"/>
               <a:t>Second level</a:t>
             </a:r>
+            <a:endParaRPr lang="en-US" smtClean="0"/>
           </a:p>
           <a:p>
             <a:pPr lvl="2"/>
@@ -13953,6 +13745,7 @@
               <a:rPr lang="en-US" smtClean="0"/>
               <a:t>Third level</a:t>
             </a:r>
+            <a:endParaRPr lang="en-US" smtClean="0"/>
           </a:p>
           <a:p>
             <a:pPr lvl="3"/>
@@ -13960,6 +13753,7 @@
               <a:rPr lang="en-US" smtClean="0"/>
               <a:t>Fourth level</a:t>
             </a:r>
+            <a:endParaRPr lang="en-US" smtClean="0"/>
           </a:p>
           <a:p>
             <a:pPr lvl="4"/>
@@ -13996,6 +13790,7 @@
               <a:rPr lang="en-US" smtClean="0"/>
               <a:t>Click to edit Master text styles</a:t>
             </a:r>
+            <a:endParaRPr lang="en-US" smtClean="0"/>
           </a:p>
           <a:p>
             <a:pPr lvl="1"/>
@@ -14003,6 +13798,7 @@
               <a:rPr lang="en-US" smtClean="0"/>
               <a:t>Second level</a:t>
             </a:r>
+            <a:endParaRPr lang="en-US" smtClean="0"/>
           </a:p>
           <a:p>
             <a:pPr lvl="2"/>
@@ -14010,6 +13806,7 @@
               <a:rPr lang="en-US" smtClean="0"/>
               <a:t>Third level</a:t>
             </a:r>
+            <a:endParaRPr lang="en-US" smtClean="0"/>
           </a:p>
           <a:p>
             <a:pPr lvl="3"/>
@@ -14017,6 +13814,7 @@
               <a:rPr lang="en-US" smtClean="0"/>
               <a:t>Fourth level</a:t>
             </a:r>
+            <a:endParaRPr lang="en-US" smtClean="0"/>
           </a:p>
           <a:p>
             <a:pPr lvl="4"/>
@@ -14045,7 +13843,6 @@
           <a:p>
             <a:fld id="{32635E77-B8A1-4882-9E33-3505DBC8DFAD}" type="datetimeFigureOut">
               <a:rPr lang="en-US" smtClean="0"/>
-              <a:t>3/10/2026</a:t>
             </a:fld>
             <a:endParaRPr lang="en-US"/>
           </a:p>
@@ -14087,18 +13884,12 @@
           <a:p>
             <a:fld id="{05A0B8EB-BCED-491D-8583-2F193039CE7A}" type="slidenum">
               <a:rPr lang="en-US" smtClean="0"/>
-              <a:t>‹#›</a:t>
             </a:fld>
             <a:endParaRPr lang="en-US"/>
           </a:p>
         </p:txBody>
       </p:sp>
     </p:spTree>
-    <p:extLst>
-      <p:ext uri="{BB962C8B-B14F-4D97-AF65-F5344CB8AC3E}">
-        <p14:creationId xmlns:p14="http://schemas.microsoft.com/office/powerpoint/2010/main" val="77590874"/>
-      </p:ext>
-    </p:extLst>
   </p:cSld>
   <p:clrMapOvr>
     <a:masterClrMapping/>
@@ -14213,6 +14004,7 @@
               <a:rPr lang="en-US" smtClean="0"/>
               <a:t>Click to edit Master text styles</a:t>
             </a:r>
+            <a:endParaRPr lang="en-US" smtClean="0"/>
           </a:p>
         </p:txBody>
       </p:sp>
@@ -14241,6 +14033,7 @@
               <a:rPr lang="en-US" smtClean="0"/>
               <a:t>Click to edit Master text styles</a:t>
             </a:r>
+            <a:endParaRPr lang="en-US" smtClean="0"/>
           </a:p>
           <a:p>
             <a:pPr lvl="1"/>
@@ -14248,6 +14041,7 @@
               <a:rPr lang="en-US" smtClean="0"/>
               <a:t>Second level</a:t>
             </a:r>
+            <a:endParaRPr lang="en-US" smtClean="0"/>
           </a:p>
           <a:p>
             <a:pPr lvl="2"/>
@@ -14255,6 +14049,7 @@
               <a:rPr lang="en-US" smtClean="0"/>
               <a:t>Third level</a:t>
             </a:r>
+            <a:endParaRPr lang="en-US" smtClean="0"/>
           </a:p>
           <a:p>
             <a:pPr lvl="3"/>
@@ -14262,6 +14057,7 @@
               <a:rPr lang="en-US" smtClean="0"/>
               <a:t>Fourth level</a:t>
             </a:r>
+            <a:endParaRPr lang="en-US" smtClean="0"/>
           </a:p>
           <a:p>
             <a:pPr lvl="4"/>
@@ -14335,6 +14131,7 @@
               <a:rPr lang="en-US" smtClean="0"/>
               <a:t>Click to edit Master text styles</a:t>
             </a:r>
+            <a:endParaRPr lang="en-US" smtClean="0"/>
           </a:p>
         </p:txBody>
       </p:sp>
@@ -14363,6 +14160,7 @@
               <a:rPr lang="en-US" smtClean="0"/>
               <a:t>Click to edit Master text styles</a:t>
             </a:r>
+            <a:endParaRPr lang="en-US" smtClean="0"/>
           </a:p>
           <a:p>
             <a:pPr lvl="1"/>
@@ -14370,6 +14168,7 @@
               <a:rPr lang="en-US" smtClean="0"/>
               <a:t>Second level</a:t>
             </a:r>
+            <a:endParaRPr lang="en-US" smtClean="0"/>
           </a:p>
           <a:p>
             <a:pPr lvl="2"/>
@@ -14377,6 +14176,7 @@
               <a:rPr lang="en-US" smtClean="0"/>
               <a:t>Third level</a:t>
             </a:r>
+            <a:endParaRPr lang="en-US" smtClean="0"/>
           </a:p>
           <a:p>
             <a:pPr lvl="3"/>
@@ -14384,6 +14184,7 @@
               <a:rPr lang="en-US" smtClean="0"/>
               <a:t>Fourth level</a:t>
             </a:r>
+            <a:endParaRPr lang="en-US" smtClean="0"/>
           </a:p>
           <a:p>
             <a:pPr lvl="4"/>
@@ -14412,7 +14213,6 @@
           <a:p>
             <a:fld id="{32635E77-B8A1-4882-9E33-3505DBC8DFAD}" type="datetimeFigureOut">
               <a:rPr lang="en-US" smtClean="0"/>
-              <a:t>3/10/2026</a:t>
             </a:fld>
             <a:endParaRPr lang="en-US"/>
           </a:p>
@@ -14454,18 +14254,12 @@
           <a:p>
             <a:fld id="{05A0B8EB-BCED-491D-8583-2F193039CE7A}" type="slidenum">
               <a:rPr lang="en-US" smtClean="0"/>
-              <a:t>‹#›</a:t>
             </a:fld>
             <a:endParaRPr lang="en-US"/>
           </a:p>
         </p:txBody>
       </p:sp>
     </p:spTree>
-    <p:extLst>
-      <p:ext uri="{BB962C8B-B14F-4D97-AF65-F5344CB8AC3E}">
-        <p14:creationId xmlns:p14="http://schemas.microsoft.com/office/powerpoint/2010/main" val="2894758975"/>
-      </p:ext>
-    </p:extLst>
   </p:cSld>
   <p:clrMapOvr>
     <a:masterClrMapping/>
@@ -14530,7 +14324,6 @@
           <a:p>
             <a:fld id="{32635E77-B8A1-4882-9E33-3505DBC8DFAD}" type="datetimeFigureOut">
               <a:rPr lang="en-US" smtClean="0"/>
-              <a:t>3/10/2026</a:t>
             </a:fld>
             <a:endParaRPr lang="en-US"/>
           </a:p>
@@ -14572,18 +14365,12 @@
           <a:p>
             <a:fld id="{05A0B8EB-BCED-491D-8583-2F193039CE7A}" type="slidenum">
               <a:rPr lang="en-US" smtClean="0"/>
-              <a:t>‹#›</a:t>
             </a:fld>
             <a:endParaRPr lang="en-US"/>
           </a:p>
         </p:txBody>
       </p:sp>
     </p:spTree>
-    <p:extLst>
-      <p:ext uri="{BB962C8B-B14F-4D97-AF65-F5344CB8AC3E}">
-        <p14:creationId xmlns:p14="http://schemas.microsoft.com/office/powerpoint/2010/main" val="3565894394"/>
-      </p:ext>
-    </p:extLst>
   </p:cSld>
   <p:clrMapOvr>
     <a:masterClrMapping/>
@@ -14625,7 +14412,6 @@
           <a:p>
             <a:fld id="{32635E77-B8A1-4882-9E33-3505DBC8DFAD}" type="datetimeFigureOut">
               <a:rPr lang="en-US" smtClean="0"/>
-              <a:t>3/10/2026</a:t>
             </a:fld>
             <a:endParaRPr lang="en-US"/>
           </a:p>
@@ -14667,18 +14453,12 @@
           <a:p>
             <a:fld id="{05A0B8EB-BCED-491D-8583-2F193039CE7A}" type="slidenum">
               <a:rPr lang="en-US" smtClean="0"/>
-              <a:t>‹#›</a:t>
             </a:fld>
             <a:endParaRPr lang="en-US"/>
           </a:p>
         </p:txBody>
       </p:sp>
     </p:spTree>
-    <p:extLst>
-      <p:ext uri="{BB962C8B-B14F-4D97-AF65-F5344CB8AC3E}">
-        <p14:creationId xmlns:p14="http://schemas.microsoft.com/office/powerpoint/2010/main" val="2537561887"/>
-      </p:ext>
-    </p:extLst>
   </p:cSld>
   <p:clrMapOvr>
     <a:masterClrMapping/>
@@ -14788,6 +14568,7 @@
               <a:rPr lang="en-US" smtClean="0"/>
               <a:t>Click to edit Master text styles</a:t>
             </a:r>
+            <a:endParaRPr lang="en-US" smtClean="0"/>
           </a:p>
           <a:p>
             <a:pPr lvl="1"/>
@@ -14795,6 +14576,7 @@
               <a:rPr lang="en-US" smtClean="0"/>
               <a:t>Second level</a:t>
             </a:r>
+            <a:endParaRPr lang="en-US" smtClean="0"/>
           </a:p>
           <a:p>
             <a:pPr lvl="2"/>
@@ -14802,6 +14584,7 @@
               <a:rPr lang="en-US" smtClean="0"/>
               <a:t>Third level</a:t>
             </a:r>
+            <a:endParaRPr lang="en-US" smtClean="0"/>
           </a:p>
           <a:p>
             <a:pPr lvl="3"/>
@@ -14809,6 +14592,7 @@
               <a:rPr lang="en-US" smtClean="0"/>
               <a:t>Fourth level</a:t>
             </a:r>
+            <a:endParaRPr lang="en-US" smtClean="0"/>
           </a:p>
           <a:p>
             <a:pPr lvl="4"/>
@@ -14882,6 +14666,7 @@
               <a:rPr lang="en-US" smtClean="0"/>
               <a:t>Click to edit Master text styles</a:t>
             </a:r>
+            <a:endParaRPr lang="en-US" smtClean="0"/>
           </a:p>
         </p:txBody>
       </p:sp>
@@ -14902,7 +14687,6 @@
           <a:p>
             <a:fld id="{32635E77-B8A1-4882-9E33-3505DBC8DFAD}" type="datetimeFigureOut">
               <a:rPr lang="en-US" smtClean="0"/>
-              <a:t>3/10/2026</a:t>
             </a:fld>
             <a:endParaRPr lang="en-US"/>
           </a:p>
@@ -14944,18 +14728,12 @@
           <a:p>
             <a:fld id="{05A0B8EB-BCED-491D-8583-2F193039CE7A}" type="slidenum">
               <a:rPr lang="en-US" smtClean="0"/>
-              <a:t>‹#›</a:t>
             </a:fld>
             <a:endParaRPr lang="en-US"/>
           </a:p>
         </p:txBody>
       </p:sp>
     </p:spTree>
-    <p:extLst>
-      <p:ext uri="{BB962C8B-B14F-4D97-AF65-F5344CB8AC3E}">
-        <p14:creationId xmlns:p14="http://schemas.microsoft.com/office/powerpoint/2010/main" val="2008750871"/>
-      </p:ext>
-    </p:extLst>
   </p:cSld>
   <p:clrMapOvr>
     <a:masterClrMapping/>
@@ -15135,6 +14913,7 @@
               <a:rPr lang="en-US" smtClean="0"/>
               <a:t>Click to edit Master text styles</a:t>
             </a:r>
+            <a:endParaRPr lang="en-US" smtClean="0"/>
           </a:p>
         </p:txBody>
       </p:sp>
@@ -15155,7 +14934,6 @@
           <a:p>
             <a:fld id="{32635E77-B8A1-4882-9E33-3505DBC8DFAD}" type="datetimeFigureOut">
               <a:rPr lang="en-US" smtClean="0"/>
-              <a:t>3/10/2026</a:t>
             </a:fld>
             <a:endParaRPr lang="en-US"/>
           </a:p>
@@ -15197,18 +14975,12 @@
           <a:p>
             <a:fld id="{05A0B8EB-BCED-491D-8583-2F193039CE7A}" type="slidenum">
               <a:rPr lang="en-US" smtClean="0"/>
-              <a:t>‹#›</a:t>
             </a:fld>
             <a:endParaRPr lang="en-US"/>
           </a:p>
         </p:txBody>
       </p:sp>
     </p:spTree>
-    <p:extLst>
-      <p:ext uri="{BB962C8B-B14F-4D97-AF65-F5344CB8AC3E}">
-        <p14:creationId xmlns:p14="http://schemas.microsoft.com/office/powerpoint/2010/main" val="1848109880"/>
-      </p:ext>
-    </p:extLst>
   </p:cSld>
   <p:clrMapOvr>
     <a:masterClrMapping/>
@@ -15301,6 +15073,7 @@
               <a:rPr lang="en-US" smtClean="0"/>
               <a:t>Click to edit Master text styles</a:t>
             </a:r>
+            <a:endParaRPr lang="en-US" smtClean="0"/>
           </a:p>
           <a:p>
             <a:pPr lvl="1"/>
@@ -15308,6 +15081,7 @@
               <a:rPr lang="en-US" smtClean="0"/>
               <a:t>Second level</a:t>
             </a:r>
+            <a:endParaRPr lang="en-US" smtClean="0"/>
           </a:p>
           <a:p>
             <a:pPr lvl="2"/>
@@ -15315,6 +15089,7 @@
               <a:rPr lang="en-US" smtClean="0"/>
               <a:t>Third level</a:t>
             </a:r>
+            <a:endParaRPr lang="en-US" smtClean="0"/>
           </a:p>
           <a:p>
             <a:pPr lvl="3"/>
@@ -15322,6 +15097,7 @@
               <a:rPr lang="en-US" smtClean="0"/>
               <a:t>Fourth level</a:t>
             </a:r>
+            <a:endParaRPr lang="en-US" smtClean="0"/>
           </a:p>
           <a:p>
             <a:pPr lvl="4"/>
@@ -15368,7 +15144,6 @@
           <a:p>
             <a:fld id="{32635E77-B8A1-4882-9E33-3505DBC8DFAD}" type="datetimeFigureOut">
               <a:rPr lang="en-US" smtClean="0"/>
-              <a:t>3/10/2026</a:t>
             </a:fld>
             <a:endParaRPr lang="en-US"/>
           </a:p>
@@ -15446,18 +15221,12 @@
           <a:p>
             <a:fld id="{05A0B8EB-BCED-491D-8583-2F193039CE7A}" type="slidenum">
               <a:rPr lang="en-US" smtClean="0"/>
-              <a:t>‹#›</a:t>
             </a:fld>
             <a:endParaRPr lang="en-US"/>
           </a:p>
         </p:txBody>
       </p:sp>
     </p:spTree>
-    <p:extLst>
-      <p:ext uri="{BB962C8B-B14F-4D97-AF65-F5344CB8AC3E}">
-        <p14:creationId xmlns:p14="http://schemas.microsoft.com/office/powerpoint/2010/main" val="3943195312"/>
-      </p:ext>
-    </p:extLst>
   </p:cSld>
   <p:clrMap bg1="lt1" tx1="dk1" bg2="lt2" tx2="dk2" accent1="accent1" accent2="accent2" accent3="accent3" accent4="accent4" accent5="accent5" accent6="accent6" hlink="hlink" folHlink="folHlink"/>
   <p:sldLayoutIdLst>
@@ -15785,7 +15554,6 @@
         </p:nvSpPr>
         <p:spPr>
           <a:noFill/>
-          <a:ln/>
           <a:extLst>
             <a:ext uri="{909E8E84-426E-40DD-AFC4-6F175D3DCCD1}">
               <a14:hiddenFill xmlns:a14="http://schemas.microsoft.com/office/drawing/2010/main">
@@ -15913,8 +15681,6 @@
                   <a:srgbClr val="000000"/>
                 </a:solidFill>
               </a:rPr>
-              <a:pPr/>
-              <a:t>1</a:t>
             </a:fld>
             <a:endParaRPr lang="en-US" sz="1000">
               <a:solidFill>
@@ -15969,12 +15735,6 @@
               </a:rPr>
               <a:t>Theory and Practice</a:t>
             </a:r>
-            <a:r>
-              <a:rPr lang="en-US" sz="2400" dirty="0">
-                <a:latin typeface="Times New Roman" panose="02020603050405020304" pitchFamily="18" charset="0"/>
-              </a:rPr>
-              <a:t/>
-            </a:r>
             <a:br>
               <a:rPr lang="en-US" sz="2400" dirty="0">
                 <a:latin typeface="Times New Roman" panose="02020603050405020304" pitchFamily="18" charset="0"/>
@@ -16000,6 +15760,12 @@
               </a:rPr>
               <a:t>System Integration Testing</a:t>
             </a:r>
+            <a:endParaRPr lang="en-US" dirty="0" smtClean="0">
+              <a:solidFill>
+                <a:srgbClr val="663300"/>
+              </a:solidFill>
+              <a:latin typeface="Times New Roman" panose="02020603050405020304" pitchFamily="18" charset="0"/>
+            </a:endParaRPr>
           </a:p>
         </p:txBody>
       </p:sp>
@@ -16019,23 +15785,23 @@
           <a:graphicData uri="http://schemas.openxmlformats.org/presentationml/2006/ole">
             <mc:AlternateContent xmlns:mc="http://schemas.openxmlformats.org/markup-compatibility/2006">
               <mc:Choice xmlns:v="urn:schemas-microsoft-com:vml" Requires="v">
-                <p:oleObj spid="_x0000_s1072" name="Equation" r:id="rId4" imgW="114120" imgH="215640" progId="Equation.3">
+                <p:oleObj spid="_x0000_s1072" name="Equation" r:id="rId1" imgW="114300" imgH="215900" progId="Equation.3">
                   <p:embed/>
                 </p:oleObj>
               </mc:Choice>
               <mc:Fallback>
-                <p:oleObj name="Equation" r:id="rId4" imgW="114120" imgH="215640" progId="Equation.3">
+                <p:oleObj name="Equation" r:id="rId1" imgW="114300" imgH="215900" progId="Equation.3">
                   <p:embed/>
                   <p:pic>
                     <p:nvPicPr>
-                      <p:cNvPr id="0" name=""/>
+                      <p:cNvPr id="0" name="Picture 1071"/>
                       <p:cNvPicPr>
                         <a:picLocks noChangeAspect="1" noChangeArrowheads="1"/>
                       </p:cNvPicPr>
                       <p:nvPr/>
                     </p:nvPicPr>
                     <p:blipFill>
-                      <a:blip r:embed="rId5">
+                      <a:blip r:embed="rId2">
                         <a:extLst>
                           <a:ext uri="{28A0092B-C50C-407E-A947-70E740481C1C}">
                             <a14:useLocalDpi xmlns:a14="http://schemas.microsoft.com/office/drawing/2010/main" val="0"/>
@@ -16097,20 +15863,15 @@
         </a:graphic>
       </p:graphicFrame>
     </p:spTree>
-    <p:extLst>
-      <p:ext uri="{BB962C8B-B14F-4D97-AF65-F5344CB8AC3E}">
-        <p14:creationId xmlns:p14="http://schemas.microsoft.com/office/powerpoint/2010/main" val="4275475231"/>
-      </p:ext>
-    </p:extLst>
   </p:cSld>
   <p:clrMapOvr>
     <a:masterClrMapping/>
   </p:clrMapOvr>
-  <mc:AlternateContent xmlns:mc="http://schemas.openxmlformats.org/markup-compatibility/2006" xmlns:p14="http://schemas.microsoft.com/office/powerpoint/2010/main">
-    <mc:Choice Requires="p14">
+  <mc:AlternateContent xmlns:mc="http://schemas.openxmlformats.org/markup-compatibility/2006">
+    <mc:Choice xmlns:p14="http://schemas.microsoft.com/office/powerpoint/2010/main" Requires="p14">
       <p:transition spd="slow" p14:dur="2000"/>
     </mc:Choice>
-    <mc:Fallback xmlns="">
+    <mc:Fallback>
       <p:transition spd="slow"/>
     </mc:Fallback>
   </mc:AlternateContent>
@@ -16153,7 +15914,6 @@
         </p:nvSpPr>
         <p:spPr>
           <a:noFill/>
-          <a:ln/>
           <a:extLst>
             <a:ext uri="{909E8E84-426E-40DD-AFC4-6F175D3DCCD1}">
               <a14:hiddenFill xmlns:a14="http://schemas.microsoft.com/office/drawing/2010/main">
@@ -16281,8 +16041,6 @@
                   <a:srgbClr val="000000"/>
                 </a:solidFill>
               </a:rPr>
-              <a:pPr/>
-              <a:t>10</a:t>
             </a:fld>
             <a:endParaRPr lang="en-US" sz="1000">
               <a:solidFill>
@@ -16313,6 +16071,9 @@
               </a:rPr>
               <a:t>System Integration Techniques</a:t>
             </a:r>
+            <a:endParaRPr lang="en-US" dirty="0" smtClean="0">
+              <a:latin typeface="Times New Roman" panose="02020603050405020304" pitchFamily="18" charset="0"/>
+            </a:endParaRPr>
           </a:p>
         </p:txBody>
       </p:sp>
@@ -16343,6 +16104,9 @@
               </a:rPr>
               <a:t>Common approaches to perform system integration testing</a:t>
             </a:r>
+            <a:endParaRPr lang="en-US" dirty="0" smtClean="0">
+              <a:latin typeface="Times New Roman" panose="02020603050405020304" pitchFamily="18" charset="0"/>
+            </a:endParaRPr>
           </a:p>
           <a:p>
             <a:r>
@@ -16351,6 +16115,9 @@
               </a:rPr>
               <a:t>Incremental</a:t>
             </a:r>
+            <a:endParaRPr lang="en-US" dirty="0" smtClean="0">
+              <a:latin typeface="Times New Roman" panose="02020603050405020304" pitchFamily="18" charset="0"/>
+            </a:endParaRPr>
           </a:p>
           <a:p>
             <a:r>
@@ -16359,6 +16126,9 @@
               </a:rPr>
               <a:t>Top-down</a:t>
             </a:r>
+            <a:endParaRPr lang="en-US" dirty="0" smtClean="0">
+              <a:latin typeface="Times New Roman" panose="02020603050405020304" pitchFamily="18" charset="0"/>
+            </a:endParaRPr>
           </a:p>
           <a:p>
             <a:r>
@@ -16367,6 +16137,9 @@
               </a:rPr>
               <a:t>Bottom-up</a:t>
             </a:r>
+            <a:endParaRPr lang="en-US" dirty="0" smtClean="0">
+              <a:latin typeface="Times New Roman" panose="02020603050405020304" pitchFamily="18" charset="0"/>
+            </a:endParaRPr>
           </a:p>
           <a:p>
             <a:r>
@@ -16375,6 +16148,9 @@
               </a:rPr>
               <a:t>Sandwich</a:t>
             </a:r>
+            <a:endParaRPr lang="en-US" dirty="0" smtClean="0">
+              <a:latin typeface="Times New Roman" panose="02020603050405020304" pitchFamily="18" charset="0"/>
+            </a:endParaRPr>
           </a:p>
           <a:p>
             <a:r>
@@ -16383,6 +16159,9 @@
               </a:rPr>
               <a:t>Big-bang</a:t>
             </a:r>
+            <a:endParaRPr lang="en-US" dirty="0" smtClean="0">
+              <a:latin typeface="Times New Roman" panose="02020603050405020304" pitchFamily="18" charset="0"/>
+            </a:endParaRPr>
           </a:p>
           <a:p>
             <a:pPr>
@@ -16404,6 +16183,9 @@
               </a:rPr>
               <a:t>Pre-requisite </a:t>
             </a:r>
+            <a:endParaRPr lang="en-US" b="1" dirty="0" smtClean="0">
+              <a:latin typeface="Times New Roman" panose="02020603050405020304" pitchFamily="18" charset="0"/>
+            </a:endParaRPr>
           </a:p>
           <a:p>
             <a:pPr>
@@ -16416,6 +16198,9 @@
               </a:rPr>
               <a:t>A module must be available to be integrated</a:t>
             </a:r>
+            <a:endParaRPr lang="en-US" dirty="0" smtClean="0">
+              <a:latin typeface="Times New Roman" panose="02020603050405020304" pitchFamily="18" charset="0"/>
+            </a:endParaRPr>
           </a:p>
           <a:p>
             <a:pPr lvl="1">
@@ -16452,24 +16237,22 @@
               </a:rPr>
               <a:t> is ready</a:t>
             </a:r>
+            <a:endParaRPr lang="en-US" dirty="0" smtClean="0">
+              <a:latin typeface="Times New Roman" panose="02020603050405020304" pitchFamily="18" charset="0"/>
+            </a:endParaRPr>
           </a:p>
         </p:txBody>
       </p:sp>
     </p:spTree>
-    <p:extLst>
-      <p:ext uri="{BB962C8B-B14F-4D97-AF65-F5344CB8AC3E}">
-        <p14:creationId xmlns:p14="http://schemas.microsoft.com/office/powerpoint/2010/main" val="4244528602"/>
-      </p:ext>
-    </p:extLst>
   </p:cSld>
   <p:clrMapOvr>
     <a:masterClrMapping/>
   </p:clrMapOvr>
-  <mc:AlternateContent xmlns:mc="http://schemas.openxmlformats.org/markup-compatibility/2006" xmlns:p14="http://schemas.microsoft.com/office/powerpoint/2010/main">
-    <mc:Choice Requires="p14">
+  <mc:AlternateContent xmlns:mc="http://schemas.openxmlformats.org/markup-compatibility/2006">
+    <mc:Choice xmlns:p14="http://schemas.microsoft.com/office/powerpoint/2010/main" Requires="p14">
       <p:transition spd="slow" p14:dur="2000"/>
     </mc:Choice>
-    <mc:Fallback xmlns="">
+    <mc:Fallback>
       <p:transition spd="slow"/>
     </mc:Fallback>
   </mc:AlternateContent>
@@ -16512,7 +16295,6 @@
         </p:nvSpPr>
         <p:spPr>
           <a:noFill/>
-          <a:ln/>
           <a:extLst>
             <a:ext uri="{909E8E84-426E-40DD-AFC4-6F175D3DCCD1}">
               <a14:hiddenFill xmlns:a14="http://schemas.microsoft.com/office/drawing/2010/main">
@@ -16640,8 +16422,6 @@
                   <a:srgbClr val="000000"/>
                 </a:solidFill>
               </a:rPr>
-              <a:pPr/>
-              <a:t>11</a:t>
             </a:fld>
             <a:endParaRPr lang="en-US" sz="1000">
               <a:solidFill>
@@ -16672,6 +16452,9 @@
               </a:rPr>
               <a:t>Incremental</a:t>
             </a:r>
+            <a:endParaRPr lang="en-US" dirty="0" smtClean="0">
+              <a:latin typeface="Times New Roman" panose="02020603050405020304" pitchFamily="18" charset="0"/>
+            </a:endParaRPr>
           </a:p>
         </p:txBody>
       </p:sp>
@@ -16710,6 +16493,9 @@
               </a:rPr>
               <a:t>is a compiled software binary</a:t>
             </a:r>
+            <a:endParaRPr lang="en-US" dirty="0" smtClean="0">
+              <a:latin typeface="Times New Roman" panose="02020603050405020304" pitchFamily="18" charset="0"/>
+            </a:endParaRPr>
           </a:p>
           <a:p>
             <a:r>
@@ -16730,6 +16516,9 @@
               </a:rPr>
               <a:t>software image for internal testing within an organization</a:t>
             </a:r>
+            <a:endParaRPr lang="en-US" dirty="0" smtClean="0">
+              <a:latin typeface="Times New Roman" panose="02020603050405020304" pitchFamily="18" charset="0"/>
+            </a:endParaRPr>
           </a:p>
           <a:p>
             <a:r>
@@ -16744,6 +16533,9 @@
               </a:rPr>
               <a:t>is a process by which individual modules are integrated to form am interim software image.</a:t>
             </a:r>
+            <a:endParaRPr lang="en-US" dirty="0" smtClean="0">
+              <a:latin typeface="Times New Roman" panose="02020603050405020304" pitchFamily="18" charset="0"/>
+            </a:endParaRPr>
           </a:p>
           <a:p>
             <a:r>
@@ -16752,6 +16544,9 @@
               </a:rPr>
               <a:t>The final build is a candidate for system testing</a:t>
             </a:r>
+            <a:endParaRPr lang="en-US" dirty="0" smtClean="0">
+              <a:latin typeface="Times New Roman" panose="02020603050405020304" pitchFamily="18" charset="0"/>
+            </a:endParaRPr>
           </a:p>
           <a:p>
             <a:r>
@@ -16760,6 +16555,9 @@
               </a:rPr>
               <a:t>Constructing a software image involves the following activities</a:t>
             </a:r>
+            <a:endParaRPr lang="en-US" dirty="0" smtClean="0">
+              <a:latin typeface="Times New Roman" panose="02020603050405020304" pitchFamily="18" charset="0"/>
+            </a:endParaRPr>
           </a:p>
           <a:p>
             <a:pPr lvl="1"/>
@@ -16769,6 +16567,9 @@
               </a:rPr>
               <a:t>Gathering the latest unit tested, authorized versions of modules</a:t>
             </a:r>
+            <a:endParaRPr lang="en-US" dirty="0" smtClean="0">
+              <a:latin typeface="Times New Roman" panose="02020603050405020304" pitchFamily="18" charset="0"/>
+            </a:endParaRPr>
           </a:p>
           <a:p>
             <a:pPr lvl="1"/>
@@ -16778,6 +16579,9 @@
               </a:rPr>
               <a:t>Compiling the source code of those modules</a:t>
             </a:r>
+            <a:endParaRPr lang="en-US" dirty="0" smtClean="0">
+              <a:latin typeface="Times New Roman" panose="02020603050405020304" pitchFamily="18" charset="0"/>
+            </a:endParaRPr>
           </a:p>
           <a:p>
             <a:pPr lvl="1"/>
@@ -16787,6 +16591,9 @@
               </a:rPr>
               <a:t>Checking in the compiled code to the repository</a:t>
             </a:r>
+            <a:endParaRPr lang="en-US" dirty="0" smtClean="0">
+              <a:latin typeface="Times New Roman" panose="02020603050405020304" pitchFamily="18" charset="0"/>
+            </a:endParaRPr>
           </a:p>
           <a:p>
             <a:pPr lvl="1"/>
@@ -16796,6 +16603,9 @@
               </a:rPr>
               <a:t>Linking the compiled modules into subassemblies</a:t>
             </a:r>
+            <a:endParaRPr lang="en-US" b="1" dirty="0" smtClean="0">
+              <a:latin typeface="Times New Roman" panose="02020603050405020304" pitchFamily="18" charset="0"/>
+            </a:endParaRPr>
           </a:p>
           <a:p>
             <a:pPr lvl="1"/>
@@ -16805,6 +16615,9 @@
               </a:rPr>
               <a:t>Verifying that the subassemblies are correct</a:t>
             </a:r>
+            <a:endParaRPr lang="en-US" b="1" dirty="0" smtClean="0">
+              <a:latin typeface="Times New Roman" panose="02020603050405020304" pitchFamily="18" charset="0"/>
+            </a:endParaRPr>
           </a:p>
           <a:p>
             <a:pPr lvl="1"/>
@@ -16814,24 +16627,22 @@
               </a:rPr>
               <a:t>Exercising version control</a:t>
             </a:r>
+            <a:endParaRPr lang="en-US" b="1" dirty="0" smtClean="0">
+              <a:latin typeface="Times New Roman" panose="02020603050405020304" pitchFamily="18" charset="0"/>
+            </a:endParaRPr>
           </a:p>
         </p:txBody>
       </p:sp>
     </p:spTree>
-    <p:extLst>
-      <p:ext uri="{BB962C8B-B14F-4D97-AF65-F5344CB8AC3E}">
-        <p14:creationId xmlns:p14="http://schemas.microsoft.com/office/powerpoint/2010/main" val="3843508193"/>
-      </p:ext>
-    </p:extLst>
   </p:cSld>
   <p:clrMapOvr>
     <a:masterClrMapping/>
   </p:clrMapOvr>
-  <mc:AlternateContent xmlns:mc="http://schemas.openxmlformats.org/markup-compatibility/2006" xmlns:p14="http://schemas.microsoft.com/office/powerpoint/2010/main">
-    <mc:Choice Requires="p14">
+  <mc:AlternateContent xmlns:mc="http://schemas.openxmlformats.org/markup-compatibility/2006">
+    <mc:Choice xmlns:p14="http://schemas.microsoft.com/office/powerpoint/2010/main" Requires="p14">
       <p:transition spd="slow" p14:dur="2000"/>
     </mc:Choice>
-    <mc:Fallback xmlns="">
+    <mc:Fallback>
       <p:transition spd="slow"/>
     </mc:Fallback>
   </mc:AlternateContent>
@@ -16874,7 +16685,6 @@
         </p:nvSpPr>
         <p:spPr>
           <a:noFill/>
-          <a:ln/>
           <a:extLst>
             <a:ext uri="{909E8E84-426E-40DD-AFC4-6F175D3DCCD1}">
               <a14:hiddenFill xmlns:a14="http://schemas.microsoft.com/office/drawing/2010/main">
@@ -17002,8 +16812,6 @@
                   <a:srgbClr val="000000"/>
                 </a:solidFill>
               </a:rPr>
-              <a:pPr/>
-              <a:t>12</a:t>
             </a:fld>
             <a:endParaRPr lang="en-US" sz="1000">
               <a:solidFill>
@@ -17034,6 +16842,9 @@
               </a:rPr>
               <a:t>Incremental</a:t>
             </a:r>
+            <a:endParaRPr lang="en-US" dirty="0" smtClean="0">
+              <a:latin typeface="Times New Roman" panose="02020603050405020304" pitchFamily="18" charset="0"/>
+            </a:endParaRPr>
           </a:p>
         </p:txBody>
       </p:sp>
@@ -17060,6 +16871,9 @@
               </a:rPr>
               <a:t>Integration testing is conducted in an incremental manner as a series of test cycles</a:t>
             </a:r>
+            <a:endParaRPr lang="en-US" dirty="0" smtClean="0">
+              <a:latin typeface="Times New Roman" panose="02020603050405020304" pitchFamily="18" charset="0"/>
+            </a:endParaRPr>
           </a:p>
           <a:p>
             <a:r>
@@ -17068,6 +16882,9 @@
               </a:rPr>
               <a:t>In each test cycle, a few more modules are integrated with an existing and tested build to generated larger builds</a:t>
             </a:r>
+            <a:endParaRPr lang="en-US" dirty="0" smtClean="0">
+              <a:latin typeface="Times New Roman" panose="02020603050405020304" pitchFamily="18" charset="0"/>
+            </a:endParaRPr>
           </a:p>
           <a:p>
             <a:r>
@@ -17076,6 +16893,9 @@
               </a:rPr>
               <a:t>The complete system is built, cycle by cycle until the whole system is operational for system-level testing.</a:t>
             </a:r>
+            <a:endParaRPr lang="en-US" dirty="0" smtClean="0">
+              <a:latin typeface="Times New Roman" panose="02020603050405020304" pitchFamily="18" charset="0"/>
+            </a:endParaRPr>
           </a:p>
           <a:p>
             <a:r>
@@ -17084,6 +16904,9 @@
               </a:rPr>
               <a:t> The number of SIT cycles and the total integration time are determined by the following parameters:</a:t>
             </a:r>
+            <a:endParaRPr lang="en-US" dirty="0" smtClean="0">
+              <a:latin typeface="Times New Roman" panose="02020603050405020304" pitchFamily="18" charset="0"/>
+            </a:endParaRPr>
           </a:p>
           <a:p>
             <a:pPr lvl="1"/>
@@ -17093,6 +16916,9 @@
               </a:rPr>
               <a:t>Number of modules in the system</a:t>
             </a:r>
+            <a:endParaRPr lang="en-US" dirty="0" smtClean="0">
+              <a:latin typeface="Times New Roman" panose="02020603050405020304" pitchFamily="18" charset="0"/>
+            </a:endParaRPr>
           </a:p>
           <a:p>
             <a:pPr lvl="1"/>
@@ -17102,6 +16928,9 @@
               </a:rPr>
               <a:t>Relative complexity of the module </a:t>
             </a:r>
+            <a:endParaRPr lang="en-US" dirty="0" smtClean="0">
+              <a:latin typeface="Times New Roman" panose="02020603050405020304" pitchFamily="18" charset="0"/>
+            </a:endParaRPr>
           </a:p>
           <a:p>
             <a:pPr lvl="1"/>
@@ -17111,6 +16940,9 @@
               </a:rPr>
               <a:t>Relative complexity of the interfaces between the modules</a:t>
             </a:r>
+            <a:endParaRPr lang="en-US" dirty="0" smtClean="0">
+              <a:latin typeface="Times New Roman" panose="02020603050405020304" pitchFamily="18" charset="0"/>
+            </a:endParaRPr>
           </a:p>
           <a:p>
             <a:pPr lvl="1"/>
@@ -17120,6 +16952,9 @@
               </a:rPr>
               <a:t>Number of modules needed to be clustered together in each test cycle</a:t>
             </a:r>
+            <a:endParaRPr lang="en-US" dirty="0" smtClean="0">
+              <a:latin typeface="Times New Roman" panose="02020603050405020304" pitchFamily="18" charset="0"/>
+            </a:endParaRPr>
           </a:p>
           <a:p>
             <a:pPr lvl="1"/>
@@ -17129,6 +16964,9 @@
               </a:rPr>
               <a:t>Whether the modules to be integrated have been adequately tested before</a:t>
             </a:r>
+            <a:endParaRPr lang="en-US" dirty="0" smtClean="0">
+              <a:latin typeface="Times New Roman" panose="02020603050405020304" pitchFamily="18" charset="0"/>
+            </a:endParaRPr>
           </a:p>
           <a:p>
             <a:pPr lvl="1"/>
@@ -17138,24 +16976,22 @@
               </a:rPr>
               <a:t>Turnaround time for each test-debug-fix cycle</a:t>
             </a:r>
+            <a:endParaRPr lang="en-US" dirty="0" smtClean="0">
+              <a:latin typeface="Times New Roman" panose="02020603050405020304" pitchFamily="18" charset="0"/>
+            </a:endParaRPr>
           </a:p>
         </p:txBody>
       </p:sp>
     </p:spTree>
-    <p:extLst>
-      <p:ext uri="{BB962C8B-B14F-4D97-AF65-F5344CB8AC3E}">
-        <p14:creationId xmlns:p14="http://schemas.microsoft.com/office/powerpoint/2010/main" val="1882020680"/>
-      </p:ext>
-    </p:extLst>
   </p:cSld>
   <p:clrMapOvr>
     <a:masterClrMapping/>
   </p:clrMapOvr>
-  <mc:AlternateContent xmlns:mc="http://schemas.openxmlformats.org/markup-compatibility/2006" xmlns:p14="http://schemas.microsoft.com/office/powerpoint/2010/main">
-    <mc:Choice Requires="p14">
+  <mc:AlternateContent xmlns:mc="http://schemas.openxmlformats.org/markup-compatibility/2006">
+    <mc:Choice xmlns:p14="http://schemas.microsoft.com/office/powerpoint/2010/main" Requires="p14">
       <p:transition spd="slow" p14:dur="2000"/>
     </mc:Choice>
-    <mc:Fallback xmlns="">
+    <mc:Fallback>
       <p:transition spd="slow"/>
     </mc:Fallback>
   </mc:AlternateContent>
@@ -17198,7 +17034,6 @@
         </p:nvSpPr>
         <p:spPr>
           <a:noFill/>
-          <a:ln/>
           <a:extLst>
             <a:ext uri="{909E8E84-426E-40DD-AFC4-6F175D3DCCD1}">
               <a14:hiddenFill xmlns:a14="http://schemas.microsoft.com/office/drawing/2010/main">
@@ -17326,8 +17161,6 @@
                   <a:srgbClr val="000000"/>
                 </a:solidFill>
               </a:rPr>
-              <a:pPr/>
-              <a:t>13</a:t>
             </a:fld>
             <a:endParaRPr lang="en-US" sz="1000">
               <a:solidFill>
@@ -17358,6 +17191,9 @@
               </a:rPr>
               <a:t>Incremental</a:t>
             </a:r>
+            <a:endParaRPr lang="en-US" smtClean="0">
+              <a:latin typeface="Times New Roman" panose="02020603050405020304" pitchFamily="18" charset="0"/>
+            </a:endParaRPr>
           </a:p>
         </p:txBody>
       </p:sp>
@@ -17406,139 +17242,170 @@
               </a:rPr>
               <a:t>containing the following information accompanies a build.</a:t>
             </a:r>
-          </a:p>
-          <a:p>
-            <a:pPr lvl="1"/>
-            <a:r>
-              <a:rPr lang="en-US" dirty="0" smtClean="0">
-                <a:latin typeface="Times New Roman" panose="02020603050405020304" pitchFamily="18" charset="0"/>
-              </a:rPr>
-              <a:t>What has changed since the last build?</a:t>
-            </a:r>
-          </a:p>
-          <a:p>
-            <a:pPr lvl="1"/>
-            <a:r>
-              <a:rPr lang="en-US" dirty="0" smtClean="0">
-                <a:latin typeface="Times New Roman" panose="02020603050405020304" pitchFamily="18" charset="0"/>
-              </a:rPr>
-              <a:t>What outstanding defects have been fixed?</a:t>
-            </a:r>
-          </a:p>
-          <a:p>
-            <a:pPr lvl="1"/>
-            <a:r>
-              <a:rPr lang="en-US" dirty="0" smtClean="0">
-                <a:latin typeface="Times New Roman" panose="02020603050405020304" pitchFamily="18" charset="0"/>
-              </a:rPr>
-              <a:t>What are the outstanding defects in the build?</a:t>
-            </a:r>
-          </a:p>
-          <a:p>
-            <a:pPr lvl="1"/>
-            <a:r>
-              <a:rPr lang="en-US" dirty="0" smtClean="0">
-                <a:latin typeface="Times New Roman" panose="02020603050405020304" pitchFamily="18" charset="0"/>
-              </a:rPr>
-              <a:t>What new modules, or features, have been added?</a:t>
-            </a:r>
-          </a:p>
-          <a:p>
-            <a:pPr lvl="1"/>
-            <a:r>
-              <a:rPr lang="en-US" dirty="0" smtClean="0">
-                <a:latin typeface="Times New Roman" panose="02020603050405020304" pitchFamily="18" charset="0"/>
-              </a:rPr>
-              <a:t>What existing modules, or features, have been enhanced, modified, or deleted?</a:t>
-            </a:r>
-          </a:p>
-          <a:p>
-            <a:pPr lvl="1"/>
-            <a:r>
-              <a:rPr lang="en-US" dirty="0" smtClean="0">
-                <a:latin typeface="Times New Roman" panose="02020603050405020304" pitchFamily="18" charset="0"/>
-              </a:rPr>
-              <a:t>Are there any areas where unknown changes may have occurred?</a:t>
-            </a:r>
-          </a:p>
-          <a:p>
-            <a:r>
-              <a:rPr lang="en-US" dirty="0" smtClean="0">
-                <a:latin typeface="Times New Roman" panose="02020603050405020304" pitchFamily="18" charset="0"/>
-              </a:rPr>
-              <a:t> A test strategy is created for each new build and the following issues are addressed while planning a test strategy</a:t>
-            </a:r>
-          </a:p>
-          <a:p>
-            <a:pPr lvl="1"/>
-            <a:r>
-              <a:rPr lang="en-US" dirty="0" smtClean="0">
-                <a:latin typeface="Times New Roman" panose="02020603050405020304" pitchFamily="18" charset="0"/>
-              </a:rPr>
-              <a:t>What test cases need to be selected from the SIT test plan?</a:t>
-            </a:r>
-          </a:p>
-          <a:p>
-            <a:pPr lvl="1"/>
-            <a:r>
-              <a:rPr lang="en-US" dirty="0" smtClean="0">
-                <a:latin typeface="Times New Roman" panose="02020603050405020304" pitchFamily="18" charset="0"/>
-              </a:rPr>
-              <a:t>What previously failed test cases should now be re-executed in order to test the fixes in the new build? </a:t>
-            </a:r>
-          </a:p>
-          <a:p>
-            <a:pPr lvl="1"/>
-            <a:r>
-              <a:rPr lang="en-US" dirty="0" smtClean="0">
-                <a:latin typeface="Times New Roman" panose="02020603050405020304" pitchFamily="18" charset="0"/>
-              </a:rPr>
-              <a:t>How to determine the scope of a partial regression tests?</a:t>
-            </a:r>
-          </a:p>
-          <a:p>
-            <a:pPr lvl="1"/>
-            <a:r>
-              <a:rPr lang="en-US" dirty="0" smtClean="0">
-                <a:latin typeface="Times New Roman" panose="02020603050405020304" pitchFamily="18" charset="0"/>
-              </a:rPr>
-              <a:t>What are the estimated time, resource </a:t>
-            </a:r>
-            <a:r>
-              <a:rPr lang="en-US" dirty="0" err="1" smtClean="0">
-                <a:latin typeface="Times New Roman" panose="02020603050405020304" pitchFamily="18" charset="0"/>
-              </a:rPr>
-              <a:t>deman</a:t>
-            </a:r>
-            <a:r>
-              <a:rPr lang="en-US" dirty="0" smtClean="0">
-                <a:latin typeface="Times New Roman" panose="02020603050405020304" pitchFamily="18" charset="0"/>
-              </a:rPr>
-              <a:t>, and cost to test this build?</a:t>
-            </a:r>
-          </a:p>
-          <a:p>
             <a:endParaRPr lang="en-US" dirty="0" smtClean="0">
               <a:latin typeface="Times New Roman" panose="02020603050405020304" pitchFamily="18" charset="0"/>
             </a:endParaRPr>
           </a:p>
+          <a:p>
+            <a:pPr lvl="1"/>
+            <a:r>
+              <a:rPr lang="en-US" dirty="0" smtClean="0">
+                <a:latin typeface="Times New Roman" panose="02020603050405020304" pitchFamily="18" charset="0"/>
+              </a:rPr>
+              <a:t>What has changed since the last build?</a:t>
+            </a:r>
+            <a:endParaRPr lang="en-US" dirty="0" smtClean="0">
+              <a:latin typeface="Times New Roman" panose="02020603050405020304" pitchFamily="18" charset="0"/>
+            </a:endParaRPr>
+          </a:p>
+          <a:p>
+            <a:pPr lvl="1"/>
+            <a:r>
+              <a:rPr lang="en-US" dirty="0" smtClean="0">
+                <a:latin typeface="Times New Roman" panose="02020603050405020304" pitchFamily="18" charset="0"/>
+              </a:rPr>
+              <a:t>What outstanding defects have been fixed?</a:t>
+            </a:r>
+            <a:endParaRPr lang="en-US" dirty="0" smtClean="0">
+              <a:latin typeface="Times New Roman" panose="02020603050405020304" pitchFamily="18" charset="0"/>
+            </a:endParaRPr>
+          </a:p>
+          <a:p>
+            <a:pPr lvl="1"/>
+            <a:r>
+              <a:rPr lang="en-US" dirty="0" smtClean="0">
+                <a:latin typeface="Times New Roman" panose="02020603050405020304" pitchFamily="18" charset="0"/>
+              </a:rPr>
+              <a:t>What are the outstanding defects in the build?</a:t>
+            </a:r>
+            <a:endParaRPr lang="en-US" dirty="0" smtClean="0">
+              <a:latin typeface="Times New Roman" panose="02020603050405020304" pitchFamily="18" charset="0"/>
+            </a:endParaRPr>
+          </a:p>
+          <a:p>
+            <a:pPr lvl="1"/>
+            <a:r>
+              <a:rPr lang="en-US" dirty="0" smtClean="0">
+                <a:latin typeface="Times New Roman" panose="02020603050405020304" pitchFamily="18" charset="0"/>
+              </a:rPr>
+              <a:t>What new modules, or features, have been added?</a:t>
+            </a:r>
+            <a:endParaRPr lang="en-US" dirty="0" smtClean="0">
+              <a:latin typeface="Times New Roman" panose="02020603050405020304" pitchFamily="18" charset="0"/>
+            </a:endParaRPr>
+          </a:p>
+          <a:p>
+            <a:pPr lvl="1"/>
+            <a:r>
+              <a:rPr lang="en-US" dirty="0" smtClean="0">
+                <a:latin typeface="Times New Roman" panose="02020603050405020304" pitchFamily="18" charset="0"/>
+              </a:rPr>
+              <a:t>What existing modules, or features, have been enhanced, modified, or deleted?</a:t>
+            </a:r>
+            <a:endParaRPr lang="en-US" dirty="0" smtClean="0">
+              <a:latin typeface="Times New Roman" panose="02020603050405020304" pitchFamily="18" charset="0"/>
+            </a:endParaRPr>
+          </a:p>
+          <a:p>
+            <a:pPr lvl="1"/>
+            <a:r>
+              <a:rPr lang="en-US" dirty="0" smtClean="0">
+                <a:latin typeface="Times New Roman" panose="02020603050405020304" pitchFamily="18" charset="0"/>
+              </a:rPr>
+              <a:t>Are there any areas where unknown changes may have occurred?</a:t>
+            </a:r>
+            <a:endParaRPr lang="en-US" dirty="0" smtClean="0">
+              <a:latin typeface="Times New Roman" panose="02020603050405020304" pitchFamily="18" charset="0"/>
+            </a:endParaRPr>
+          </a:p>
+          <a:p>
+            <a:r>
+              <a:rPr lang="en-US" dirty="0" smtClean="0">
+                <a:latin typeface="Times New Roman" panose="02020603050405020304" pitchFamily="18" charset="0"/>
+              </a:rPr>
+              <a:t> A test strategy is created for each new build and the following issues are addressed while planning a test strategy</a:t>
+            </a:r>
+            <a:endParaRPr lang="en-US" dirty="0" smtClean="0">
+              <a:latin typeface="Times New Roman" panose="02020603050405020304" pitchFamily="18" charset="0"/>
+            </a:endParaRPr>
+          </a:p>
+          <a:p>
+            <a:pPr lvl="1"/>
+            <a:r>
+              <a:rPr lang="en-US" dirty="0" smtClean="0">
+                <a:latin typeface="Times New Roman" panose="02020603050405020304" pitchFamily="18" charset="0"/>
+              </a:rPr>
+              <a:t>What test cases need to be selected from the SIT test plan?</a:t>
+            </a:r>
+            <a:endParaRPr lang="en-US" dirty="0" smtClean="0">
+              <a:latin typeface="Times New Roman" panose="02020603050405020304" pitchFamily="18" charset="0"/>
+            </a:endParaRPr>
+          </a:p>
+          <a:p>
+            <a:pPr lvl="1"/>
+            <a:r>
+              <a:rPr lang="en-US" dirty="0" smtClean="0">
+                <a:latin typeface="Times New Roman" panose="02020603050405020304" pitchFamily="18" charset="0"/>
+              </a:rPr>
+              <a:t>What previously failed test cases should now be re-executed in order to test the fixes in the new build? </a:t>
+            </a:r>
+            <a:endParaRPr lang="en-US" dirty="0" smtClean="0">
+              <a:latin typeface="Times New Roman" panose="02020603050405020304" pitchFamily="18" charset="0"/>
+            </a:endParaRPr>
+          </a:p>
+          <a:p>
+            <a:pPr lvl="1"/>
+            <a:r>
+              <a:rPr lang="en-US" dirty="0" smtClean="0">
+                <a:latin typeface="Times New Roman" panose="02020603050405020304" pitchFamily="18" charset="0"/>
+              </a:rPr>
+              <a:t>How to determine the scope of a partial regression tests?</a:t>
+            </a:r>
+            <a:endParaRPr lang="en-US" dirty="0" smtClean="0">
+              <a:latin typeface="Times New Roman" panose="02020603050405020304" pitchFamily="18" charset="0"/>
+            </a:endParaRPr>
+          </a:p>
+          <a:p>
+            <a:pPr lvl="1"/>
+            <a:r>
+              <a:rPr lang="en-US" dirty="0" smtClean="0">
+                <a:latin typeface="Times New Roman" panose="02020603050405020304" pitchFamily="18" charset="0"/>
+              </a:rPr>
+              <a:t>What are the estimated time, resource </a:t>
+            </a:r>
+            <a:r>
+              <a:rPr lang="en-US" dirty="0" err="1" smtClean="0">
+                <a:latin typeface="Times New Roman" panose="02020603050405020304" pitchFamily="18" charset="0"/>
+              </a:rPr>
+              <a:t>deman</a:t>
+            </a:r>
+            <a:r>
+              <a:rPr lang="en-US" dirty="0" smtClean="0">
+                <a:latin typeface="Times New Roman" panose="02020603050405020304" pitchFamily="18" charset="0"/>
+              </a:rPr>
+              <a:t>, and cost to test this build?</a:t>
+            </a:r>
+            <a:endParaRPr lang="en-US" dirty="0" smtClean="0">
+              <a:latin typeface="Times New Roman" panose="02020603050405020304" pitchFamily="18" charset="0"/>
+            </a:endParaRPr>
+          </a:p>
+          <a:p>
+            <a:endParaRPr lang="en-US" dirty="0" smtClean="0">
+              <a:latin typeface="Times New Roman" panose="02020603050405020304" pitchFamily="18" charset="0"/>
+            </a:endParaRPr>
+          </a:p>
         </p:txBody>
       </p:sp>
     </p:spTree>
-    <p:extLst>
-      <p:ext uri="{BB962C8B-B14F-4D97-AF65-F5344CB8AC3E}">
-        <p14:creationId xmlns:p14="http://schemas.microsoft.com/office/powerpoint/2010/main" val="2879535685"/>
-      </p:ext>
-    </p:extLst>
   </p:cSld>
   <p:clrMapOvr>
     <a:masterClrMapping/>
   </p:clrMapOvr>
-  <mc:AlternateContent xmlns:mc="http://schemas.openxmlformats.org/markup-compatibility/2006" xmlns:p14="http://schemas.microsoft.com/office/powerpoint/2010/main">
-    <mc:Choice Requires="p14">
+  <mc:AlternateContent xmlns:mc="http://schemas.openxmlformats.org/markup-compatibility/2006">
+    <mc:Choice xmlns:p14="http://schemas.microsoft.com/office/powerpoint/2010/main" Requires="p14">
       <p:transition spd="slow" p14:dur="2000"/>
     </mc:Choice>
-    <mc:Fallback xmlns="">
+    <mc:Fallback>
       <p:transition spd="slow"/>
     </mc:Fallback>
   </mc:AlternateContent>
@@ -17581,7 +17448,6 @@
         </p:nvSpPr>
         <p:spPr>
           <a:noFill/>
-          <a:ln/>
           <a:extLst>
             <a:ext uri="{909E8E84-426E-40DD-AFC4-6F175D3DCCD1}">
               <a14:hiddenFill xmlns:a14="http://schemas.microsoft.com/office/drawing/2010/main">
@@ -17709,8 +17575,6 @@
                   <a:srgbClr val="000000"/>
                 </a:solidFill>
               </a:rPr>
-              <a:pPr/>
-              <a:t>14</a:t>
             </a:fld>
             <a:endParaRPr lang="en-US" sz="1000">
               <a:solidFill>
@@ -17741,6 +17605,9 @@
               </a:rPr>
               <a:t>Incremental</a:t>
             </a:r>
+            <a:endParaRPr lang="en-US" smtClean="0">
+              <a:latin typeface="Times New Roman" panose="02020603050405020304" pitchFamily="18" charset="0"/>
+            </a:endParaRPr>
           </a:p>
         </p:txBody>
       </p:sp>
@@ -17771,6 +17638,9 @@
               </a:rPr>
               <a:t>Creating a daily build is very popular among many organization</a:t>
             </a:r>
+            <a:endParaRPr lang="en-US" dirty="0" smtClean="0">
+              <a:latin typeface="Times New Roman" panose="02020603050405020304" pitchFamily="18" charset="0"/>
+            </a:endParaRPr>
           </a:p>
           <a:p>
             <a:pPr>
@@ -17788,6 +17658,9 @@
               </a:rPr>
               <a:t>It facilitates to a faster delivery of the system</a:t>
             </a:r>
+            <a:endParaRPr lang="en-US" dirty="0" smtClean="0">
+              <a:latin typeface="Times New Roman" panose="02020603050405020304" pitchFamily="18" charset="0"/>
+            </a:endParaRPr>
           </a:p>
           <a:p>
             <a:r>
@@ -17796,6 +17669,9 @@
               </a:rPr>
               <a:t>It puts emphasis on small incremental testing</a:t>
             </a:r>
+            <a:endParaRPr lang="en-US" dirty="0" smtClean="0">
+              <a:latin typeface="Times New Roman" panose="02020603050405020304" pitchFamily="18" charset="0"/>
+            </a:endParaRPr>
           </a:p>
           <a:p>
             <a:r>
@@ -17804,6 +17680,9 @@
               </a:rPr>
               <a:t>It steadily increases number of test cases</a:t>
             </a:r>
+            <a:endParaRPr lang="en-US" dirty="0" smtClean="0">
+              <a:latin typeface="Times New Roman" panose="02020603050405020304" pitchFamily="18" charset="0"/>
+            </a:endParaRPr>
           </a:p>
           <a:p>
             <a:r>
@@ -17812,6 +17691,9 @@
               </a:rPr>
               <a:t>The system is tested using automated, re-usable test cases</a:t>
             </a:r>
+            <a:endParaRPr lang="en-US" dirty="0" smtClean="0">
+              <a:latin typeface="Times New Roman" panose="02020603050405020304" pitchFamily="18" charset="0"/>
+            </a:endParaRPr>
           </a:p>
           <a:p>
             <a:r>
@@ -17820,6 +17702,9 @@
               </a:rPr>
               <a:t>An effort is made to fix the defects that were found within 24 hours</a:t>
             </a:r>
+            <a:endParaRPr lang="en-US" dirty="0" smtClean="0">
+              <a:latin typeface="Times New Roman" panose="02020603050405020304" pitchFamily="18" charset="0"/>
+            </a:endParaRPr>
           </a:p>
           <a:p>
             <a:r>
@@ -17828,6 +17713,9 @@
               </a:rPr>
               <a:t> Prior version of the build are retained for references and rollback</a:t>
             </a:r>
+            <a:endParaRPr lang="en-US" dirty="0" smtClean="0">
+              <a:latin typeface="Times New Roman" panose="02020603050405020304" pitchFamily="18" charset="0"/>
+            </a:endParaRPr>
           </a:p>
           <a:p>
             <a:r>
@@ -17836,24 +17724,22 @@
               </a:rPr>
               <a:t>A typical practice is to retain the past 7-10 builds</a:t>
             </a:r>
+            <a:endParaRPr lang="en-US" dirty="0" smtClean="0">
+              <a:latin typeface="Times New Roman" panose="02020603050405020304" pitchFamily="18" charset="0"/>
+            </a:endParaRPr>
           </a:p>
         </p:txBody>
       </p:sp>
     </p:spTree>
-    <p:extLst>
-      <p:ext uri="{BB962C8B-B14F-4D97-AF65-F5344CB8AC3E}">
-        <p14:creationId xmlns:p14="http://schemas.microsoft.com/office/powerpoint/2010/main" val="1149612002"/>
-      </p:ext>
-    </p:extLst>
   </p:cSld>
   <p:clrMapOvr>
     <a:masterClrMapping/>
   </p:clrMapOvr>
-  <mc:AlternateContent xmlns:mc="http://schemas.openxmlformats.org/markup-compatibility/2006" xmlns:p14="http://schemas.microsoft.com/office/powerpoint/2010/main">
-    <mc:Choice Requires="p14">
+  <mc:AlternateContent xmlns:mc="http://schemas.openxmlformats.org/markup-compatibility/2006">
+    <mc:Choice xmlns:p14="http://schemas.microsoft.com/office/powerpoint/2010/main" Requires="p14">
       <p:transition spd="slow" p14:dur="2000"/>
     </mc:Choice>
-    <mc:Fallback xmlns="">
+    <mc:Fallback>
       <p:transition spd="slow"/>
     </mc:Fallback>
   </mc:AlternateContent>
@@ -17896,7 +17782,6 @@
         </p:nvSpPr>
         <p:spPr>
           <a:noFill/>
-          <a:ln/>
           <a:extLst>
             <a:ext uri="{909E8E84-426E-40DD-AFC4-6F175D3DCCD1}">
               <a14:hiddenFill xmlns:a14="http://schemas.microsoft.com/office/drawing/2010/main">
@@ -18024,8 +17909,6 @@
                   <a:srgbClr val="000000"/>
                 </a:solidFill>
               </a:rPr>
-              <a:pPr/>
-              <a:t>15</a:t>
             </a:fld>
             <a:endParaRPr lang="en-US" sz="1000">
               <a:solidFill>
@@ -18056,6 +17939,9 @@
               </a:rPr>
               <a:t>Top-down</a:t>
             </a:r>
+            <a:endParaRPr lang="en-US" dirty="0" smtClean="0">
+              <a:latin typeface="Times New Roman" panose="02020603050405020304" pitchFamily="18" charset="0"/>
+            </a:endParaRPr>
           </a:p>
         </p:txBody>
       </p:sp>
@@ -18070,7 +17956,7 @@
           </p:nvPr>
         </p:nvPicPr>
         <p:blipFill>
-          <a:blip r:embed="rId3">
+          <a:blip r:embed="rId1">
             <a:extLst>
               <a:ext uri="{28A0092B-C50C-407E-A947-70E740481C1C}">
                 <a14:useLocalDpi xmlns:a14="http://schemas.microsoft.com/office/drawing/2010/main" val="0"/>
@@ -18115,6 +18001,9 @@
               </a:rPr>
               <a:t>Module A has been decomposed into modules B, C, and D</a:t>
             </a:r>
+            <a:endParaRPr lang="en-US" sz="2000" dirty="0">
+              <a:latin typeface="Times New Roman" panose="02020603050405020304" pitchFamily="18" charset="0"/>
+            </a:endParaRPr>
           </a:p>
           <a:p>
             <a:r>
@@ -18123,6 +18012,9 @@
               </a:rPr>
               <a:t> Modules B, D, E, F, and G are terminal modules</a:t>
             </a:r>
+            <a:endParaRPr lang="en-US" sz="2000" dirty="0">
+              <a:latin typeface="Times New Roman" panose="02020603050405020304" pitchFamily="18" charset="0"/>
+            </a:endParaRPr>
           </a:p>
           <a:p>
             <a:r>
@@ -18131,6 +18023,9 @@
               </a:rPr>
               <a:t> First integrate modules A and B using stubs C` and D` (represented by grey boxes)</a:t>
             </a:r>
+            <a:endParaRPr lang="en-US" sz="2000" dirty="0">
+              <a:latin typeface="Times New Roman" panose="02020603050405020304" pitchFamily="18" charset="0"/>
+            </a:endParaRPr>
           </a:p>
           <a:p>
             <a:r>
@@ -18139,6 +18034,9 @@
               </a:rPr>
               <a:t>Next stub D` has been replaced with its actual instance D</a:t>
             </a:r>
+            <a:endParaRPr lang="en-US" sz="2000" dirty="0">
+              <a:latin typeface="Times New Roman" panose="02020603050405020304" pitchFamily="18" charset="0"/>
+            </a:endParaRPr>
           </a:p>
           <a:p>
             <a:r>
@@ -18147,6 +18045,9 @@
               </a:rPr>
               <a:t> Two kinds of tests are performed:</a:t>
             </a:r>
+            <a:endParaRPr lang="en-US" sz="2000" dirty="0">
+              <a:latin typeface="Times New Roman" panose="02020603050405020304" pitchFamily="18" charset="0"/>
+            </a:endParaRPr>
           </a:p>
           <a:p>
             <a:pPr lvl="1"/>
@@ -18156,6 +18057,9 @@
               </a:rPr>
               <a:t>Test the interface between A and D</a:t>
             </a:r>
+            <a:endParaRPr lang="en-US" sz="1800" dirty="0">
+              <a:latin typeface="Times New Roman" panose="02020603050405020304" pitchFamily="18" charset="0"/>
+            </a:endParaRPr>
           </a:p>
           <a:p>
             <a:pPr lvl="1"/>
@@ -18165,6 +18069,9 @@
               </a:rPr>
               <a:t>Regression tests to look for interface defects between A and B in the presence of module D</a:t>
             </a:r>
+            <a:endParaRPr lang="en-US" sz="1800" dirty="0">
+              <a:latin typeface="Times New Roman" panose="02020603050405020304" pitchFamily="18" charset="0"/>
+            </a:endParaRPr>
           </a:p>
         </p:txBody>
       </p:sp>
@@ -18179,7 +18086,7 @@
           </p:nvPr>
         </p:nvPicPr>
         <p:blipFill>
-          <a:blip r:embed="rId4">
+          <a:blip r:embed="rId2">
             <a:extLst>
               <a:ext uri="{28A0092B-C50C-407E-A947-70E740481C1C}">
                 <a14:useLocalDpi xmlns:a14="http://schemas.microsoft.com/office/drawing/2010/main" val="0"/>
@@ -18207,7 +18114,7 @@
           <p:nvPr/>
         </p:nvPicPr>
         <p:blipFill>
-          <a:blip r:embed="rId5">
+          <a:blip r:embed="rId3">
             <a:extLst>
               <a:ext uri="{28A0092B-C50C-407E-A947-70E740481C1C}">
                 <a14:useLocalDpi xmlns:a14="http://schemas.microsoft.com/office/drawing/2010/main" val="0"/>
@@ -18745,20 +18652,15 @@
         </p:txBody>
       </p:sp>
     </p:spTree>
-    <p:extLst>
-      <p:ext uri="{BB962C8B-B14F-4D97-AF65-F5344CB8AC3E}">
-        <p14:creationId xmlns:p14="http://schemas.microsoft.com/office/powerpoint/2010/main" val="594431399"/>
-      </p:ext>
-    </p:extLst>
   </p:cSld>
   <p:clrMapOvr>
     <a:masterClrMapping/>
   </p:clrMapOvr>
-  <mc:AlternateContent xmlns:mc="http://schemas.openxmlformats.org/markup-compatibility/2006" xmlns:p14="http://schemas.microsoft.com/office/powerpoint/2010/main">
-    <mc:Choice Requires="p14">
+  <mc:AlternateContent xmlns:mc="http://schemas.openxmlformats.org/markup-compatibility/2006">
+    <mc:Choice xmlns:p14="http://schemas.microsoft.com/office/powerpoint/2010/main" Requires="p14">
       <p:transition spd="slow" p14:dur="2000"/>
     </mc:Choice>
-    <mc:Fallback xmlns="">
+    <mc:Fallback>
       <p:transition spd="slow"/>
     </mc:Fallback>
   </mc:AlternateContent>
@@ -18801,7 +18703,6 @@
         </p:nvSpPr>
         <p:spPr>
           <a:noFill/>
-          <a:ln/>
           <a:extLst>
             <a:ext uri="{909E8E84-426E-40DD-AFC4-6F175D3DCCD1}">
               <a14:hiddenFill xmlns:a14="http://schemas.microsoft.com/office/drawing/2010/main">
@@ -18929,8 +18830,6 @@
                   <a:srgbClr val="000000"/>
                 </a:solidFill>
               </a:rPr>
-              <a:pPr/>
-              <a:t>16</a:t>
             </a:fld>
             <a:endParaRPr lang="en-US" sz="1000">
               <a:solidFill>
@@ -18966,6 +18865,9 @@
               </a:rPr>
               <a:t>Top-down</a:t>
             </a:r>
+            <a:endParaRPr lang="en-US" dirty="0" smtClean="0">
+              <a:latin typeface="Times New Roman" panose="02020603050405020304" pitchFamily="18" charset="0"/>
+            </a:endParaRPr>
           </a:p>
         </p:txBody>
       </p:sp>
@@ -18995,6 +18897,9 @@
               </a:rPr>
               <a:t>Stub C` has been replaced with the actual module C, and new stubs E`, F`, and G`</a:t>
             </a:r>
+            <a:endParaRPr lang="en-US" sz="2000" dirty="0">
+              <a:latin typeface="Times New Roman" panose="02020603050405020304" pitchFamily="18" charset="0"/>
+            </a:endParaRPr>
           </a:p>
           <a:p>
             <a:r>
@@ -19003,6 +18908,9 @@
               </a:rPr>
               <a:t>Perform tests as follows: </a:t>
             </a:r>
+            <a:endParaRPr lang="en-US" sz="2000" dirty="0">
+              <a:latin typeface="Times New Roman" panose="02020603050405020304" pitchFamily="18" charset="0"/>
+            </a:endParaRPr>
           </a:p>
           <a:p>
             <a:pPr lvl="1"/>
@@ -19012,6 +18920,9 @@
               </a:rPr>
               <a:t>first, test the interface between A and C; </a:t>
             </a:r>
+            <a:endParaRPr lang="en-US" sz="1800" dirty="0">
+              <a:latin typeface="Times New Roman" panose="02020603050405020304" pitchFamily="18" charset="0"/>
+            </a:endParaRPr>
           </a:p>
           <a:p>
             <a:pPr lvl="1"/>
@@ -19021,6 +18932,9 @@
               </a:rPr>
               <a:t>second, test the combined modules A, B, and D in the presence of C</a:t>
             </a:r>
+            <a:endParaRPr lang="en-US" sz="1800" dirty="0">
+              <a:latin typeface="Times New Roman" panose="02020603050405020304" pitchFamily="18" charset="0"/>
+            </a:endParaRPr>
           </a:p>
           <a:p>
             <a:r>
@@ -19029,6 +18943,9 @@
               </a:rPr>
               <a:t>The rest of the process depicted in the right hand side figures.</a:t>
             </a:r>
+            <a:endParaRPr lang="en-US" sz="2000" dirty="0">
+              <a:latin typeface="Times New Roman" panose="02020603050405020304" pitchFamily="18" charset="0"/>
+            </a:endParaRPr>
           </a:p>
           <a:p>
             <a:endParaRPr lang="en-US" sz="2000" dirty="0">
@@ -19048,7 +18965,7 @@
           </p:nvPr>
         </p:nvPicPr>
         <p:blipFill>
-          <a:blip r:embed="rId3">
+          <a:blip r:embed="rId1">
             <a:extLst>
               <a:ext uri="{28A0092B-C50C-407E-A947-70E740481C1C}">
                 <a14:useLocalDpi xmlns:a14="http://schemas.microsoft.com/office/drawing/2010/main" val="0"/>
@@ -19078,7 +18995,7 @@
           </p:nvPr>
         </p:nvPicPr>
         <p:blipFill>
-          <a:blip r:embed="rId4">
+          <a:blip r:embed="rId2">
             <a:extLst>
               <a:ext uri="{28A0092B-C50C-407E-A947-70E740481C1C}">
                 <a14:useLocalDpi xmlns:a14="http://schemas.microsoft.com/office/drawing/2010/main" val="0"/>
@@ -19108,7 +19025,7 @@
           </p:nvPr>
         </p:nvPicPr>
         <p:blipFill>
-          <a:blip r:embed="rId5">
+          <a:blip r:embed="rId3">
             <a:extLst>
               <a:ext uri="{28A0092B-C50C-407E-A947-70E740481C1C}">
                 <a14:useLocalDpi xmlns:a14="http://schemas.microsoft.com/office/drawing/2010/main" val="0"/>
@@ -19620,20 +19537,15 @@
         </p:txBody>
       </p:sp>
     </p:spTree>
-    <p:extLst>
-      <p:ext uri="{BB962C8B-B14F-4D97-AF65-F5344CB8AC3E}">
-        <p14:creationId xmlns:p14="http://schemas.microsoft.com/office/powerpoint/2010/main" val="1369808154"/>
-      </p:ext>
-    </p:extLst>
   </p:cSld>
   <p:clrMapOvr>
     <a:masterClrMapping/>
   </p:clrMapOvr>
-  <mc:AlternateContent xmlns:mc="http://schemas.openxmlformats.org/markup-compatibility/2006" xmlns:p14="http://schemas.microsoft.com/office/powerpoint/2010/main">
-    <mc:Choice Requires="p14">
+  <mc:AlternateContent xmlns:mc="http://schemas.openxmlformats.org/markup-compatibility/2006">
+    <mc:Choice xmlns:p14="http://schemas.microsoft.com/office/powerpoint/2010/main" Requires="p14">
       <p:transition spd="slow" p14:dur="2000"/>
     </mc:Choice>
-    <mc:Fallback xmlns="">
+    <mc:Fallback>
       <p:transition spd="slow"/>
     </mc:Fallback>
   </mc:AlternateContent>
@@ -19676,7 +19588,6 @@
         </p:nvSpPr>
         <p:spPr>
           <a:noFill/>
-          <a:ln/>
           <a:extLst>
             <a:ext uri="{909E8E84-426E-40DD-AFC4-6F175D3DCCD1}">
               <a14:hiddenFill xmlns:a14="http://schemas.microsoft.com/office/drawing/2010/main">
@@ -19804,8 +19715,6 @@
                   <a:srgbClr val="000000"/>
                 </a:solidFill>
               </a:rPr>
-              <a:pPr/>
-              <a:t>17</a:t>
             </a:fld>
             <a:endParaRPr lang="en-US" sz="1000">
               <a:solidFill>
@@ -19836,6 +19745,9 @@
               </a:rPr>
               <a:t>Top-down</a:t>
             </a:r>
+            <a:endParaRPr lang="en-US" smtClean="0">
+              <a:latin typeface="Times New Roman" panose="02020603050405020304" pitchFamily="18" charset="0"/>
+            </a:endParaRPr>
           </a:p>
         </p:txBody>
       </p:sp>
@@ -19866,6 +19778,9 @@
               </a:rPr>
               <a:t>Advantages</a:t>
             </a:r>
+            <a:endParaRPr lang="en-US" b="1" dirty="0" smtClean="0">
+              <a:latin typeface="Times New Roman" panose="02020603050405020304" pitchFamily="18" charset="0"/>
+            </a:endParaRPr>
           </a:p>
           <a:p>
             <a:r>
@@ -19874,6 +19789,9 @@
               </a:rPr>
               <a:t>The SIT engineers continually observe system-level functions as the integration process continue</a:t>
             </a:r>
+            <a:endParaRPr lang="en-US" dirty="0" smtClean="0">
+              <a:latin typeface="Times New Roman" panose="02020603050405020304" pitchFamily="18" charset="0"/>
+            </a:endParaRPr>
           </a:p>
           <a:p>
             <a:r>
@@ -19882,6 +19800,9 @@
               </a:rPr>
               <a:t>Isolation of interface errors becomes easier because of the incremental nature of the top-down integration</a:t>
             </a:r>
+            <a:endParaRPr lang="en-US" dirty="0" smtClean="0">
+              <a:latin typeface="Times New Roman" panose="02020603050405020304" pitchFamily="18" charset="0"/>
+            </a:endParaRPr>
           </a:p>
           <a:p>
             <a:r>
@@ -19890,6 +19811,9 @@
               </a:rPr>
               <a:t>Test cases designed to test the integration of a module M are reused during the regression tests performed after integrating other modules</a:t>
             </a:r>
+            <a:endParaRPr lang="en-US" dirty="0" smtClean="0">
+              <a:latin typeface="Times New Roman" panose="02020603050405020304" pitchFamily="18" charset="0"/>
+            </a:endParaRPr>
           </a:p>
           <a:p>
             <a:endParaRPr lang="en-US" dirty="0" smtClean="0">
@@ -19907,6 +19831,9 @@
               </a:rPr>
               <a:t>Disadvantages</a:t>
             </a:r>
+            <a:endParaRPr lang="en-US" b="1" dirty="0" smtClean="0">
+              <a:latin typeface="Times New Roman" panose="02020603050405020304" pitchFamily="18" charset="0"/>
+            </a:endParaRPr>
           </a:p>
           <a:p>
             <a:r>
@@ -19915,6 +19842,9 @@
               </a:rPr>
               <a:t>It may not be possible to observe meaningful system functions because of an absence of lower level modules and the presence of stubs.</a:t>
             </a:r>
+            <a:endParaRPr lang="en-US" dirty="0" smtClean="0">
+              <a:latin typeface="Times New Roman" panose="02020603050405020304" pitchFamily="18" charset="0"/>
+            </a:endParaRPr>
           </a:p>
           <a:p>
             <a:r>
@@ -19923,24 +19853,22 @@
               </a:rPr>
               <a:t> Test case selection and stub design become increasingly difficult when stubs lie far away from the top-level module.</a:t>
             </a:r>
+            <a:endParaRPr lang="en-US" dirty="0" smtClean="0">
+              <a:latin typeface="Times New Roman" panose="02020603050405020304" pitchFamily="18" charset="0"/>
+            </a:endParaRPr>
           </a:p>
         </p:txBody>
       </p:sp>
     </p:spTree>
-    <p:extLst>
-      <p:ext uri="{BB962C8B-B14F-4D97-AF65-F5344CB8AC3E}">
-        <p14:creationId xmlns:p14="http://schemas.microsoft.com/office/powerpoint/2010/main" val="1155705690"/>
-      </p:ext>
-    </p:extLst>
   </p:cSld>
   <p:clrMapOvr>
     <a:masterClrMapping/>
   </p:clrMapOvr>
-  <mc:AlternateContent xmlns:mc="http://schemas.openxmlformats.org/markup-compatibility/2006" xmlns:p14="http://schemas.microsoft.com/office/powerpoint/2010/main">
-    <mc:Choice Requires="p14">
+  <mc:AlternateContent xmlns:mc="http://schemas.openxmlformats.org/markup-compatibility/2006">
+    <mc:Choice xmlns:p14="http://schemas.microsoft.com/office/powerpoint/2010/main" Requires="p14">
       <p:transition spd="slow" p14:dur="2000"/>
     </mc:Choice>
-    <mc:Fallback xmlns="">
+    <mc:Fallback>
       <p:transition spd="slow"/>
     </mc:Fallback>
   </mc:AlternateContent>
@@ -19983,7 +19911,6 @@
         </p:nvSpPr>
         <p:spPr>
           <a:noFill/>
-          <a:ln/>
           <a:extLst>
             <a:ext uri="{909E8E84-426E-40DD-AFC4-6F175D3DCCD1}">
               <a14:hiddenFill xmlns:a14="http://schemas.microsoft.com/office/drawing/2010/main">
@@ -20111,8 +20038,6 @@
                   <a:srgbClr val="000000"/>
                 </a:solidFill>
               </a:rPr>
-              <a:pPr/>
-              <a:t>18</a:t>
             </a:fld>
             <a:endParaRPr lang="en-US" sz="1000">
               <a:solidFill>
@@ -20150,6 +20075,9 @@
               </a:rPr>
               <a:t>Bottom-up</a:t>
             </a:r>
+            <a:endParaRPr lang="en-US" dirty="0" smtClean="0">
+              <a:latin typeface="Times New Roman" panose="02020603050405020304" pitchFamily="18" charset="0"/>
+            </a:endParaRPr>
           </a:p>
         </p:txBody>
       </p:sp>
@@ -20179,6 +20107,9 @@
               </a:rPr>
               <a:t>We design a test driver to integrate lowest-level modules E, F, and G</a:t>
             </a:r>
+            <a:endParaRPr lang="en-US" sz="2000" dirty="0">
+              <a:latin typeface="Times New Roman" panose="02020603050405020304" pitchFamily="18" charset="0"/>
+            </a:endParaRPr>
           </a:p>
           <a:p>
             <a:r>
@@ -20187,6 +20118,9 @@
               </a:rPr>
               <a:t>Return values generated by one module is likely to be used in another module</a:t>
             </a:r>
+            <a:endParaRPr lang="en-US" sz="2000" dirty="0">
+              <a:latin typeface="Times New Roman" panose="02020603050405020304" pitchFamily="18" charset="0"/>
+            </a:endParaRPr>
           </a:p>
           <a:p>
             <a:r>
@@ -20195,6 +20129,9 @@
               </a:rPr>
               <a:t>The test driver mimics module C to integrate E, F, and G in a limited way.</a:t>
             </a:r>
+            <a:endParaRPr lang="en-US" sz="2000" dirty="0">
+              <a:latin typeface="Times New Roman" panose="02020603050405020304" pitchFamily="18" charset="0"/>
+            </a:endParaRPr>
           </a:p>
           <a:p>
             <a:r>
@@ -20203,6 +20140,9 @@
               </a:rPr>
               <a:t>The test driver is replaced with actual module , i.e., C.</a:t>
             </a:r>
+            <a:endParaRPr lang="en-US" sz="2000" dirty="0">
+              <a:latin typeface="Times New Roman" panose="02020603050405020304" pitchFamily="18" charset="0"/>
+            </a:endParaRPr>
           </a:p>
           <a:p>
             <a:r>
@@ -20211,6 +20151,9 @@
               </a:rPr>
               <a:t>A new test driver is used</a:t>
             </a:r>
+            <a:endParaRPr lang="en-US" sz="2000" dirty="0">
+              <a:latin typeface="Times New Roman" panose="02020603050405020304" pitchFamily="18" charset="0"/>
+            </a:endParaRPr>
           </a:p>
           <a:p>
             <a:r>
@@ -20219,6 +20162,9 @@
               </a:rPr>
               <a:t> At this moment, more modules such as B and D are integrated</a:t>
             </a:r>
+            <a:endParaRPr lang="en-US" sz="2000" dirty="0">
+              <a:latin typeface="Times New Roman" panose="02020603050405020304" pitchFamily="18" charset="0"/>
+            </a:endParaRPr>
           </a:p>
           <a:p>
             <a:r>
@@ -20227,6 +20173,9 @@
               </a:rPr>
               <a:t> The new test driver mimics the behavior of module A</a:t>
             </a:r>
+            <a:endParaRPr lang="en-US" sz="2000" dirty="0">
+              <a:latin typeface="Times New Roman" panose="02020603050405020304" pitchFamily="18" charset="0"/>
+            </a:endParaRPr>
           </a:p>
           <a:p>
             <a:r>
@@ -20235,6 +20184,9 @@
               </a:rPr>
               <a:t> Finally, the test driver is replaced with module A and further test are performed</a:t>
             </a:r>
+            <a:endParaRPr lang="en-US" sz="2000" dirty="0">
+              <a:latin typeface="Times New Roman" panose="02020603050405020304" pitchFamily="18" charset="0"/>
+            </a:endParaRPr>
           </a:p>
           <a:p>
             <a:endParaRPr lang="en-US" sz="2000" dirty="0">
@@ -20254,7 +20206,7 @@
           </p:nvPr>
         </p:nvPicPr>
         <p:blipFill>
-          <a:blip r:embed="rId3">
+          <a:blip r:embed="rId1">
             <a:extLst>
               <a:ext uri="{28A0092B-C50C-407E-A947-70E740481C1C}">
                 <a14:useLocalDpi xmlns:a14="http://schemas.microsoft.com/office/drawing/2010/main" val="0"/>
@@ -20284,7 +20236,7 @@
           </p:nvPr>
         </p:nvPicPr>
         <p:blipFill>
-          <a:blip r:embed="rId4">
+          <a:blip r:embed="rId2">
             <a:extLst>
               <a:ext uri="{28A0092B-C50C-407E-A947-70E740481C1C}">
                 <a14:useLocalDpi xmlns:a14="http://schemas.microsoft.com/office/drawing/2010/main" val="0"/>
@@ -20623,24 +20575,24 @@
               </a:rPr>
               <a:t>Figure 7.9: Bottom-up integration of module B, C, and D with F, F, and G</a:t>
             </a:r>
+            <a:endParaRPr lang="en-US" b="0">
+              <a:solidFill>
+                <a:srgbClr val="000000"/>
+              </a:solidFill>
+            </a:endParaRPr>
           </a:p>
         </p:txBody>
       </p:sp>
     </p:spTree>
-    <p:extLst>
-      <p:ext uri="{BB962C8B-B14F-4D97-AF65-F5344CB8AC3E}">
-        <p14:creationId xmlns:p14="http://schemas.microsoft.com/office/powerpoint/2010/main" val="3521574438"/>
-      </p:ext>
-    </p:extLst>
   </p:cSld>
   <p:clrMapOvr>
     <a:masterClrMapping/>
   </p:clrMapOvr>
-  <mc:AlternateContent xmlns:mc="http://schemas.openxmlformats.org/markup-compatibility/2006" xmlns:p14="http://schemas.microsoft.com/office/powerpoint/2010/main">
-    <mc:Choice Requires="p14">
+  <mc:AlternateContent xmlns:mc="http://schemas.openxmlformats.org/markup-compatibility/2006">
+    <mc:Choice xmlns:p14="http://schemas.microsoft.com/office/powerpoint/2010/main" Requires="p14">
       <p:transition spd="slow" p14:dur="2000"/>
     </mc:Choice>
-    <mc:Fallback xmlns="">
+    <mc:Fallback>
       <p:transition spd="slow"/>
     </mc:Fallback>
   </mc:AlternateContent>
@@ -20683,7 +20635,6 @@
         </p:nvSpPr>
         <p:spPr>
           <a:noFill/>
-          <a:ln/>
           <a:extLst>
             <a:ext uri="{909E8E84-426E-40DD-AFC4-6F175D3DCCD1}">
               <a14:hiddenFill xmlns:a14="http://schemas.microsoft.com/office/drawing/2010/main">
@@ -20811,8 +20762,6 @@
                   <a:srgbClr val="000000"/>
                 </a:solidFill>
               </a:rPr>
-              <a:pPr/>
-              <a:t>19</a:t>
             </a:fld>
             <a:endParaRPr lang="en-US" sz="1000">
               <a:solidFill>
@@ -20854,6 +20803,9 @@
               </a:rPr>
               <a:t>Advantages</a:t>
             </a:r>
+            <a:endParaRPr lang="en-US" b="1" dirty="0" smtClean="0">
+              <a:latin typeface="Times New Roman" panose="02020603050405020304" pitchFamily="18" charset="0"/>
+            </a:endParaRPr>
           </a:p>
           <a:p>
             <a:r>
@@ -20862,6 +20814,9 @@
               </a:rPr>
               <a:t>One designs the behavior of a test driver by simplifying the behavior of the actual module</a:t>
             </a:r>
+            <a:endParaRPr lang="en-US" dirty="0" smtClean="0">
+              <a:latin typeface="Times New Roman" panose="02020603050405020304" pitchFamily="18" charset="0"/>
+            </a:endParaRPr>
           </a:p>
           <a:p>
             <a:r>
@@ -20870,6 +20825,9 @@
               </a:rPr>
               <a:t>If the low-level modules and their combined functions are often invoked by other modules, then it is more useful to test them first so that meaningful effective integration of other modules can be done</a:t>
             </a:r>
+            <a:endParaRPr lang="en-US" dirty="0" smtClean="0">
+              <a:latin typeface="Times New Roman" panose="02020603050405020304" pitchFamily="18" charset="0"/>
+            </a:endParaRPr>
           </a:p>
           <a:p>
             <a:endParaRPr lang="en-US" b="1" dirty="0" smtClean="0">
@@ -20887,6 +20845,9 @@
               </a:rPr>
               <a:t>Disadvantages</a:t>
             </a:r>
+            <a:endParaRPr lang="en-US" b="1" dirty="0" smtClean="0">
+              <a:latin typeface="Times New Roman" panose="02020603050405020304" pitchFamily="18" charset="0"/>
+            </a:endParaRPr>
           </a:p>
           <a:p>
             <a:r>
@@ -20895,6 +20856,9 @@
               </a:rPr>
               <a:t>Discovery of major faults are detected towards the end of the integration process, because major design decision are embodied in the top-level modules</a:t>
             </a:r>
+            <a:endParaRPr lang="en-US" dirty="0" smtClean="0">
+              <a:latin typeface="Times New Roman" panose="02020603050405020304" pitchFamily="18" charset="0"/>
+            </a:endParaRPr>
           </a:p>
           <a:p>
             <a:r>
@@ -20903,24 +20867,22 @@
               </a:rPr>
               <a:t>Test engineers can not observe system-level functions from a partly integrated system. In fact, they can not observe system-level functions until the top-level test driver is in place</a:t>
             </a:r>
+            <a:endParaRPr lang="en-US" dirty="0" smtClean="0">
+              <a:latin typeface="Times New Roman" panose="02020603050405020304" pitchFamily="18" charset="0"/>
+            </a:endParaRPr>
           </a:p>
         </p:txBody>
       </p:sp>
     </p:spTree>
-    <p:extLst>
-      <p:ext uri="{BB962C8B-B14F-4D97-AF65-F5344CB8AC3E}">
-        <p14:creationId xmlns:p14="http://schemas.microsoft.com/office/powerpoint/2010/main" val="1365855895"/>
-      </p:ext>
-    </p:extLst>
   </p:cSld>
   <p:clrMapOvr>
     <a:masterClrMapping/>
   </p:clrMapOvr>
-  <mc:AlternateContent xmlns:mc="http://schemas.openxmlformats.org/markup-compatibility/2006" xmlns:p14="http://schemas.microsoft.com/office/powerpoint/2010/main">
-    <mc:Choice Requires="p14">
+  <mc:AlternateContent xmlns:mc="http://schemas.openxmlformats.org/markup-compatibility/2006">
+    <mc:Choice xmlns:p14="http://schemas.microsoft.com/office/powerpoint/2010/main" Requires="p14">
       <p:transition spd="slow" p14:dur="2000"/>
     </mc:Choice>
-    <mc:Fallback xmlns="">
+    <mc:Fallback>
       <p:transition spd="slow"/>
     </mc:Fallback>
   </mc:AlternateContent>
@@ -20963,7 +20925,6 @@
         </p:nvSpPr>
         <p:spPr>
           <a:noFill/>
-          <a:ln/>
           <a:extLst>
             <a:ext uri="{909E8E84-426E-40DD-AFC4-6F175D3DCCD1}">
               <a14:hiddenFill xmlns:a14="http://schemas.microsoft.com/office/drawing/2010/main">
@@ -21091,8 +21052,6 @@
                   <a:srgbClr val="000000"/>
                 </a:solidFill>
               </a:rPr>
-              <a:pPr/>
-              <a:t>2</a:t>
             </a:fld>
             <a:endParaRPr lang="en-US" sz="1000">
               <a:solidFill>
@@ -21123,6 +21082,9 @@
               </a:rPr>
               <a:t>The Concept of Integration Testing</a:t>
             </a:r>
+            <a:endParaRPr lang="en-US" dirty="0" smtClean="0">
+              <a:latin typeface="Times New Roman" panose="02020603050405020304" pitchFamily="18" charset="0"/>
+            </a:endParaRPr>
           </a:p>
         </p:txBody>
       </p:sp>
@@ -21154,20 +21116,6 @@
               </a:rPr>
               <a:t>A software module is a self-contained element of a system</a:t>
             </a:r>
-          </a:p>
-          <a:p>
-            <a:r>
-              <a:rPr lang="en-US" dirty="0" smtClean="0">
-                <a:latin typeface="Times New Roman" panose="02020603050405020304" pitchFamily="18" charset="0"/>
-              </a:rPr>
-              <a:t>Modules are individually tested commonly known as </a:t>
-            </a:r>
-            <a:r>
-              <a:rPr lang="en-US" i="1" dirty="0" smtClean="0">
-                <a:latin typeface="Times New Roman" panose="02020603050405020304" pitchFamily="18" charset="0"/>
-              </a:rPr>
-              <a:t>unit testing</a:t>
-            </a:r>
             <a:endParaRPr lang="en-US" dirty="0" smtClean="0">
               <a:latin typeface="Times New Roman" panose="02020603050405020304" pitchFamily="18" charset="0"/>
             </a:endParaRPr>
@@ -21177,21 +21125,13 @@
               <a:rPr lang="en-US" dirty="0" smtClean="0">
                 <a:latin typeface="Times New Roman" panose="02020603050405020304" pitchFamily="18" charset="0"/>
               </a:rPr>
-              <a:t>Next major task is to put the modules, i.e., pieces together to construct the complete system</a:t>
-            </a:r>
-          </a:p>
-          <a:p>
-            <a:r>
-              <a:rPr lang="en-US" dirty="0" smtClean="0">
-                <a:latin typeface="Times New Roman" panose="02020603050405020304" pitchFamily="18" charset="0"/>
-              </a:rPr>
-              <a:t>Construction of a working system from the pieces is not a straightforward task because of numerous </a:t>
+              <a:t>Modules are individually tested commonly known as </a:t>
             </a:r>
             <a:r>
               <a:rPr lang="en-US" i="1" dirty="0" smtClean="0">
                 <a:latin typeface="Times New Roman" panose="02020603050405020304" pitchFamily="18" charset="0"/>
               </a:rPr>
-              <a:t>interface errors</a:t>
+              <a:t>unit testing</a:t>
             </a:r>
             <a:endParaRPr lang="en-US" dirty="0" smtClean="0">
               <a:latin typeface="Times New Roman" panose="02020603050405020304" pitchFamily="18" charset="0"/>
@@ -21202,6 +21142,34 @@
               <a:rPr lang="en-US" dirty="0" smtClean="0">
                 <a:latin typeface="Times New Roman" panose="02020603050405020304" pitchFamily="18" charset="0"/>
               </a:rPr>
+              <a:t>Next major task is to put the modules, i.e., pieces together to construct the complete system</a:t>
+            </a:r>
+            <a:endParaRPr lang="en-US" dirty="0" smtClean="0">
+              <a:latin typeface="Times New Roman" panose="02020603050405020304" pitchFamily="18" charset="0"/>
+            </a:endParaRPr>
+          </a:p>
+          <a:p>
+            <a:r>
+              <a:rPr lang="en-US" dirty="0" smtClean="0">
+                <a:latin typeface="Times New Roman" panose="02020603050405020304" pitchFamily="18" charset="0"/>
+              </a:rPr>
+              <a:t>Construction of a working system from the pieces is not a straightforward task because of numerous </a:t>
+            </a:r>
+            <a:r>
+              <a:rPr lang="en-US" i="1" dirty="0" smtClean="0">
+                <a:latin typeface="Times New Roman" panose="02020603050405020304" pitchFamily="18" charset="0"/>
+              </a:rPr>
+              <a:t>interface errors</a:t>
+            </a:r>
+            <a:endParaRPr lang="en-US" dirty="0" smtClean="0">
+              <a:latin typeface="Times New Roman" panose="02020603050405020304" pitchFamily="18" charset="0"/>
+            </a:endParaRPr>
+          </a:p>
+          <a:p>
+            <a:r>
+              <a:rPr lang="en-US" dirty="0" smtClean="0">
+                <a:latin typeface="Times New Roman" panose="02020603050405020304" pitchFamily="18" charset="0"/>
+              </a:rPr>
               <a:t>The objective of </a:t>
             </a:r>
             <a:r>
@@ -21228,6 +21196,9 @@
               </a:rPr>
               <a:t> (SIT) is to build a “working” version of the system</a:t>
             </a:r>
+            <a:endParaRPr lang="en-US" dirty="0" smtClean="0">
+              <a:latin typeface="Times New Roman" panose="02020603050405020304" pitchFamily="18" charset="0"/>
+            </a:endParaRPr>
           </a:p>
           <a:p>
             <a:pPr lvl="1"/>
@@ -21243,6 +21214,9 @@
               </a:rPr>
               <a:t>modules together in an incremental manner</a:t>
             </a:r>
+            <a:endParaRPr lang="en-US" dirty="0" smtClean="0">
+              <a:latin typeface="Times New Roman" panose="02020603050405020304" pitchFamily="18" charset="0"/>
+            </a:endParaRPr>
           </a:p>
           <a:p>
             <a:pPr lvl="1"/>
@@ -21252,6 +21226,9 @@
               </a:rPr>
               <a:t>Ensuring that the additional modules work as expected without disturbing the functionalities of the modules already put together</a:t>
             </a:r>
+            <a:endParaRPr lang="en-US" dirty="0" smtClean="0">
+              <a:latin typeface="Times New Roman" panose="02020603050405020304" pitchFamily="18" charset="0"/>
+            </a:endParaRPr>
           </a:p>
           <a:p>
             <a:r>
@@ -21266,6 +21243,9 @@
               </a:rPr>
               <a:t>is said to be complete when</a:t>
             </a:r>
+            <a:endParaRPr lang="en-US" dirty="0" smtClean="0">
+              <a:latin typeface="Times New Roman" panose="02020603050405020304" pitchFamily="18" charset="0"/>
+            </a:endParaRPr>
           </a:p>
           <a:p>
             <a:pPr lvl="1"/>
@@ -21275,6 +21255,9 @@
               </a:rPr>
               <a:t>The system is fully integrated together</a:t>
             </a:r>
+            <a:endParaRPr lang="en-US" dirty="0" smtClean="0">
+              <a:latin typeface="Times New Roman" panose="02020603050405020304" pitchFamily="18" charset="0"/>
+            </a:endParaRPr>
           </a:p>
           <a:p>
             <a:pPr lvl="1"/>
@@ -21284,6 +21267,9 @@
               </a:rPr>
               <a:t>All the test cases have been executed</a:t>
             </a:r>
+            <a:endParaRPr lang="en-US" dirty="0" smtClean="0">
+              <a:latin typeface="Times New Roman" panose="02020603050405020304" pitchFamily="18" charset="0"/>
+            </a:endParaRPr>
           </a:p>
           <a:p>
             <a:pPr lvl="1"/>
@@ -21293,24 +21279,22 @@
               </a:rPr>
               <a:t>All the severe and moderated defects found have been fixed</a:t>
             </a:r>
+            <a:endParaRPr lang="en-US" dirty="0" smtClean="0">
+              <a:latin typeface="Times New Roman" panose="02020603050405020304" pitchFamily="18" charset="0"/>
+            </a:endParaRPr>
           </a:p>
         </p:txBody>
       </p:sp>
     </p:spTree>
-    <p:extLst>
-      <p:ext uri="{BB962C8B-B14F-4D97-AF65-F5344CB8AC3E}">
-        <p14:creationId xmlns:p14="http://schemas.microsoft.com/office/powerpoint/2010/main" val="2820008239"/>
-      </p:ext>
-    </p:extLst>
   </p:cSld>
   <p:clrMapOvr>
     <a:masterClrMapping/>
   </p:clrMapOvr>
-  <mc:AlternateContent xmlns:mc="http://schemas.openxmlformats.org/markup-compatibility/2006" xmlns:p14="http://schemas.microsoft.com/office/powerpoint/2010/main">
-    <mc:Choice Requires="p14">
+  <mc:AlternateContent xmlns:mc="http://schemas.openxmlformats.org/markup-compatibility/2006">
+    <mc:Choice xmlns:p14="http://schemas.microsoft.com/office/powerpoint/2010/main" Requires="p14">
       <p:transition spd="slow" p14:dur="2000"/>
     </mc:Choice>
-    <mc:Fallback xmlns="">
+    <mc:Fallback>
       <p:transition spd="slow"/>
     </mc:Fallback>
   </mc:AlternateContent>
@@ -21353,7 +21337,6 @@
         </p:nvSpPr>
         <p:spPr>
           <a:noFill/>
-          <a:ln/>
           <a:extLst>
             <a:ext uri="{909E8E84-426E-40DD-AFC4-6F175D3DCCD1}">
               <a14:hiddenFill xmlns:a14="http://schemas.microsoft.com/office/drawing/2010/main">
@@ -21481,8 +21464,6 @@
                   <a:srgbClr val="000000"/>
                 </a:solidFill>
               </a:rPr>
-              <a:pPr/>
-              <a:t>20</a:t>
             </a:fld>
             <a:endParaRPr lang="en-US" sz="1000">
               <a:solidFill>
@@ -21513,6 +21494,9 @@
               </a:rPr>
               <a:t>Big-bang and Sandwich</a:t>
             </a:r>
+            <a:endParaRPr lang="en-US" smtClean="0">
+              <a:latin typeface="Times New Roman" panose="02020603050405020304" pitchFamily="18" charset="0"/>
+            </a:endParaRPr>
           </a:p>
         </p:txBody>
       </p:sp>
@@ -21543,6 +21527,9 @@
               </a:rPr>
               <a:t>Big-bang Approach</a:t>
             </a:r>
+            <a:endParaRPr lang="en-US" b="1" dirty="0" smtClean="0">
+              <a:latin typeface="Times New Roman" panose="02020603050405020304" pitchFamily="18" charset="0"/>
+            </a:endParaRPr>
           </a:p>
           <a:p>
             <a:r>
@@ -21551,6 +21538,9 @@
               </a:rPr>
               <a:t>First all the modules are individually tested</a:t>
             </a:r>
+            <a:endParaRPr lang="en-US" dirty="0" smtClean="0">
+              <a:latin typeface="Times New Roman" panose="02020603050405020304" pitchFamily="18" charset="0"/>
+            </a:endParaRPr>
           </a:p>
           <a:p>
             <a:r>
@@ -21574,6 +21564,9 @@
               </a:rPr>
               <a:t>Sandwich Approach</a:t>
             </a:r>
+            <a:endParaRPr lang="en-US" b="1" dirty="0" smtClean="0">
+              <a:latin typeface="Times New Roman" panose="02020603050405020304" pitchFamily="18" charset="0"/>
+            </a:endParaRPr>
           </a:p>
           <a:p>
             <a:r>
@@ -21582,6 +21575,9 @@
               </a:rPr>
               <a:t>In this approach a system is integrated using a mix of top-down, bottom-up, and big-bang approaches</a:t>
             </a:r>
+            <a:endParaRPr lang="en-US" dirty="0" smtClean="0">
+              <a:latin typeface="Times New Roman" panose="02020603050405020304" pitchFamily="18" charset="0"/>
+            </a:endParaRPr>
           </a:p>
           <a:p>
             <a:r>
@@ -21590,6 +21586,9 @@
               </a:rPr>
               <a:t>A hierarchical system is viewed as consisting of three layers</a:t>
             </a:r>
+            <a:endParaRPr lang="en-US" dirty="0" smtClean="0">
+              <a:latin typeface="Times New Roman" panose="02020603050405020304" pitchFamily="18" charset="0"/>
+            </a:endParaRPr>
           </a:p>
           <a:p>
             <a:r>
@@ -21598,6 +21597,9 @@
               </a:rPr>
               <a:t>The bottom-up approach is applied to integrate the modules in the bottom-layer</a:t>
             </a:r>
+            <a:endParaRPr lang="en-US" dirty="0" smtClean="0">
+              <a:latin typeface="Times New Roman" panose="02020603050405020304" pitchFamily="18" charset="0"/>
+            </a:endParaRPr>
           </a:p>
           <a:p>
             <a:r>
@@ -21606,6 +21608,9 @@
               </a:rPr>
               <a:t>The top layer modules are integrated by using top-down approach</a:t>
             </a:r>
+            <a:endParaRPr lang="en-US" dirty="0" smtClean="0">
+              <a:latin typeface="Times New Roman" panose="02020603050405020304" pitchFamily="18" charset="0"/>
+            </a:endParaRPr>
           </a:p>
           <a:p>
             <a:r>
@@ -21614,24 +21619,22 @@
               </a:rPr>
               <a:t>The middle layer is integrated by using the big-bang approach after the top and the bottom layers have been integrated</a:t>
             </a:r>
+            <a:endParaRPr lang="en-US" dirty="0" smtClean="0">
+              <a:latin typeface="Times New Roman" panose="02020603050405020304" pitchFamily="18" charset="0"/>
+            </a:endParaRPr>
           </a:p>
         </p:txBody>
       </p:sp>
     </p:spTree>
-    <p:extLst>
-      <p:ext uri="{BB962C8B-B14F-4D97-AF65-F5344CB8AC3E}">
-        <p14:creationId xmlns:p14="http://schemas.microsoft.com/office/powerpoint/2010/main" val="3719196784"/>
-      </p:ext>
-    </p:extLst>
   </p:cSld>
   <p:clrMapOvr>
     <a:masterClrMapping/>
   </p:clrMapOvr>
-  <mc:AlternateContent xmlns:mc="http://schemas.openxmlformats.org/markup-compatibility/2006" xmlns:p14="http://schemas.microsoft.com/office/powerpoint/2010/main">
-    <mc:Choice Requires="p14">
+  <mc:AlternateContent xmlns:mc="http://schemas.openxmlformats.org/markup-compatibility/2006">
+    <mc:Choice xmlns:p14="http://schemas.microsoft.com/office/powerpoint/2010/main" Requires="p14">
       <p:transition spd="slow" p14:dur="2000"/>
     </mc:Choice>
-    <mc:Fallback xmlns="">
+    <mc:Fallback>
       <p:transition spd="slow"/>
     </mc:Fallback>
   </mc:AlternateContent>
@@ -21674,7 +21677,6 @@
         </p:nvSpPr>
         <p:spPr>
           <a:noFill/>
-          <a:ln/>
           <a:extLst>
             <a:ext uri="{909E8E84-426E-40DD-AFC4-6F175D3DCCD1}">
               <a14:hiddenFill xmlns:a14="http://schemas.microsoft.com/office/drawing/2010/main">
@@ -21802,8 +21804,6 @@
                   <a:srgbClr val="000000"/>
                 </a:solidFill>
               </a:rPr>
-              <a:pPr/>
-              <a:t>21</a:t>
             </a:fld>
             <a:endParaRPr lang="en-US" sz="1000">
               <a:solidFill>
@@ -21839,6 +21839,9 @@
               </a:rPr>
               <a:t>Test Plans for System Integration</a:t>
             </a:r>
+            <a:endParaRPr lang="en-US" dirty="0" smtClean="0">
+              <a:latin typeface="Times New Roman" panose="02020603050405020304" pitchFamily="18" charset="0"/>
+            </a:endParaRPr>
           </a:p>
         </p:txBody>
       </p:sp>
@@ -21851,7 +21854,7 @@
           <p:nvPr/>
         </p:nvPicPr>
         <p:blipFill>
-          <a:blip r:embed="rId3"/>
+          <a:blip r:embed="rId1"/>
           <a:stretch>
             <a:fillRect/>
           </a:stretch>
@@ -21867,20 +21870,15 @@
         </p:spPr>
       </p:pic>
     </p:spTree>
-    <p:extLst>
-      <p:ext uri="{BB962C8B-B14F-4D97-AF65-F5344CB8AC3E}">
-        <p14:creationId xmlns:p14="http://schemas.microsoft.com/office/powerpoint/2010/main" val="207358918"/>
-      </p:ext>
-    </p:extLst>
   </p:cSld>
   <p:clrMapOvr>
     <a:masterClrMapping/>
   </p:clrMapOvr>
-  <mc:AlternateContent xmlns:mc="http://schemas.openxmlformats.org/markup-compatibility/2006" xmlns:p14="http://schemas.microsoft.com/office/powerpoint/2010/main">
-    <mc:Choice Requires="p14">
+  <mc:AlternateContent xmlns:mc="http://schemas.openxmlformats.org/markup-compatibility/2006">
+    <mc:Choice xmlns:p14="http://schemas.microsoft.com/office/powerpoint/2010/main" Requires="p14">
       <p:transition spd="slow" p14:dur="2000"/>
     </mc:Choice>
-    <mc:Fallback xmlns="">
+    <mc:Fallback>
       <p:transition spd="slow"/>
     </mc:Fallback>
   </mc:AlternateContent>
@@ -21927,7 +21925,6 @@
             <a:ext cx="2743200" cy="365125"/>
           </a:xfrm>
           <a:noFill/>
-          <a:ln/>
           <a:extLst>
             <a:ext uri="{909E8E84-426E-40DD-AFC4-6F175D3DCCD1}">
               <a14:hiddenFill xmlns:a14="http://schemas.microsoft.com/office/drawing/2010/main">
@@ -22055,8 +22052,6 @@
                   <a:srgbClr val="000000"/>
                 </a:solidFill>
               </a:rPr>
-              <a:pPr/>
-              <a:t>22</a:t>
             </a:fld>
             <a:endParaRPr lang="en-US" sz="1000">
               <a:solidFill>
@@ -22087,6 +22082,9 @@
               </a:rPr>
               <a:t>Framework for SIT</a:t>
             </a:r>
+            <a:endParaRPr lang="en-US" dirty="0" smtClean="0">
+              <a:latin typeface="Times New Roman" panose="02020603050405020304" pitchFamily="18" charset="0"/>
+            </a:endParaRPr>
           </a:p>
         </p:txBody>
       </p:sp>
@@ -22125,6 +22123,7 @@
               <a:rPr lang="en-US" dirty="0" smtClean="0"/>
               <a:t>.</a:t>
             </a:r>
+            <a:endParaRPr lang="en-US" dirty="0" smtClean="0"/>
           </a:p>
           <a:p>
             <a:pPr marL="457200" lvl="1" indent="0">
@@ -22146,6 +22145,7 @@
               <a:rPr lang="en-US" dirty="0" smtClean="0"/>
               <a:t> </a:t>
             </a:r>
+            <a:endParaRPr lang="en-US" dirty="0" smtClean="0"/>
           </a:p>
           <a:p>
             <a:pPr marL="514350" indent="-514350">
@@ -22156,6 +22156,7 @@
               <a:rPr lang="en-US" dirty="0" smtClean="0"/>
               <a:t>Structure of integration levels</a:t>
             </a:r>
+            <a:endParaRPr lang="en-US" dirty="0" smtClean="0"/>
           </a:p>
           <a:p>
             <a:pPr marL="971550" lvl="1" indent="-514350">
@@ -22166,6 +22167,7 @@
               <a:rPr lang="en-US" dirty="0" smtClean="0"/>
               <a:t>Integration test phases</a:t>
             </a:r>
+            <a:endParaRPr lang="en-US" dirty="0" smtClean="0"/>
           </a:p>
           <a:p>
             <a:pPr marL="1428750" lvl="2" indent="-514350">
@@ -22188,6 +22190,7 @@
               <a:rPr lang="en-US" dirty="0" smtClean="0"/>
               <a:t>phases (reliability).</a:t>
             </a:r>
+            <a:endParaRPr lang="en-US" dirty="0" smtClean="0"/>
           </a:p>
           <a:p>
             <a:pPr marL="971550" lvl="1" indent="-514350">
@@ -22198,6 +22201,7 @@
               <a:rPr lang="en-US" dirty="0" smtClean="0"/>
               <a:t>Modules or subsystems to be integrated in each phase</a:t>
             </a:r>
+            <a:endParaRPr lang="en-US" dirty="0" smtClean="0"/>
           </a:p>
           <a:p>
             <a:pPr marL="971550" lvl="1" indent="-514350">
@@ -22208,6 +22212,7 @@
               <a:rPr lang="en-US" dirty="0" smtClean="0"/>
               <a:t>Building process and schedule in each phase</a:t>
             </a:r>
+            <a:endParaRPr lang="en-US" dirty="0" smtClean="0"/>
           </a:p>
           <a:p>
             <a:pPr marL="1428750" lvl="2" indent="-514350">
@@ -22233,6 +22238,7 @@
               <a:rPr lang="en-US" dirty="0" smtClean="0"/>
               <a:t>Environment to be setup and resources required in each phase</a:t>
             </a:r>
+            <a:endParaRPr lang="en-US" dirty="0" smtClean="0"/>
           </a:p>
           <a:p>
             <a:pPr marL="457200" lvl="1" indent="0">
@@ -22244,24 +22250,22 @@
               </a:rPr>
               <a:t>	</a:t>
             </a:r>
+            <a:endParaRPr lang="en-US" dirty="0" smtClean="0">
+              <a:latin typeface="Times New Roman" panose="02020603050405020304" pitchFamily="18" charset="0"/>
+            </a:endParaRPr>
           </a:p>
         </p:txBody>
       </p:sp>
     </p:spTree>
-    <p:extLst>
-      <p:ext uri="{BB962C8B-B14F-4D97-AF65-F5344CB8AC3E}">
-        <p14:creationId xmlns:p14="http://schemas.microsoft.com/office/powerpoint/2010/main" val="1012795370"/>
-      </p:ext>
-    </p:extLst>
   </p:cSld>
   <p:clrMapOvr>
     <a:masterClrMapping/>
   </p:clrMapOvr>
-  <mc:AlternateContent xmlns:mc="http://schemas.openxmlformats.org/markup-compatibility/2006" xmlns:p14="http://schemas.microsoft.com/office/powerpoint/2010/main">
-    <mc:Choice Requires="p14">
+  <mc:AlternateContent xmlns:mc="http://schemas.openxmlformats.org/markup-compatibility/2006">
+    <mc:Choice xmlns:p14="http://schemas.microsoft.com/office/powerpoint/2010/main" Requires="p14">
       <p:transition spd="slow" p14:dur="2000"/>
     </mc:Choice>
-    <mc:Fallback xmlns="">
+    <mc:Fallback>
       <p:transition spd="slow"/>
     </mc:Fallback>
   </mc:AlternateContent>
@@ -22304,7 +22308,6 @@
         </p:nvSpPr>
         <p:spPr>
           <a:noFill/>
-          <a:ln/>
           <a:extLst>
             <a:ext uri="{909E8E84-426E-40DD-AFC4-6F175D3DCCD1}">
               <a14:hiddenFill xmlns:a14="http://schemas.microsoft.com/office/drawing/2010/main">
@@ -22432,8 +22435,6 @@
                   <a:srgbClr val="000000"/>
                 </a:solidFill>
               </a:rPr>
-              <a:pPr/>
-              <a:t>23</a:t>
             </a:fld>
             <a:endParaRPr lang="en-US" sz="1000">
               <a:solidFill>
@@ -22464,6 +22465,9 @@
               </a:rPr>
               <a:t>Framework for SIT</a:t>
             </a:r>
+            <a:endParaRPr lang="en-US" dirty="0" smtClean="0">
+              <a:latin typeface="Times New Roman" panose="02020603050405020304" pitchFamily="18" charset="0"/>
+            </a:endParaRPr>
           </a:p>
         </p:txBody>
       </p:sp>
@@ -22493,6 +22497,9 @@
               </a:rPr>
               <a:t>3. Criteria for each integration test phase n</a:t>
             </a:r>
+            <a:endParaRPr lang="en-US" b="1" dirty="0" smtClean="0">
+              <a:latin typeface="Times New Roman" panose="02020603050405020304" pitchFamily="18" charset="0"/>
+            </a:endParaRPr>
           </a:p>
           <a:p>
             <a:pPr marL="0" indent="0">
@@ -22510,6 +22517,9 @@
               </a:rPr>
               <a:t>Criteria</a:t>
             </a:r>
+            <a:endParaRPr lang="en-US" b="1" dirty="0" smtClean="0">
+              <a:latin typeface="Times New Roman" panose="02020603050405020304" pitchFamily="18" charset="0"/>
+            </a:endParaRPr>
           </a:p>
           <a:p>
             <a:pPr marL="0" indent="0">
@@ -22527,6 +22537,9 @@
               </a:rPr>
               <a:t>Start date + Table 7.4</a:t>
             </a:r>
+            <a:endParaRPr lang="en-US" b="1" dirty="0" smtClean="0">
+              <a:latin typeface="Times New Roman" panose="02020603050405020304" pitchFamily="18" charset="0"/>
+            </a:endParaRPr>
           </a:p>
           <a:p>
             <a:pPr marL="0" indent="0">
@@ -22544,6 +22557,9 @@
               </a:rPr>
               <a:t>2. Exit Criteria</a:t>
             </a:r>
+            <a:endParaRPr lang="en-US" b="1" dirty="0" smtClean="0">
+              <a:latin typeface="Times New Roman" panose="02020603050405020304" pitchFamily="18" charset="0"/>
+            </a:endParaRPr>
           </a:p>
           <a:p>
             <a:pPr marL="0" indent="0">
@@ -22593,6 +22609,9 @@
               </a:rPr>
               <a:t>3. Integration technique to be used</a:t>
             </a:r>
+            <a:endParaRPr lang="en-US" b="1" dirty="0" smtClean="0">
+              <a:latin typeface="Times New Roman" panose="02020603050405020304" pitchFamily="18" charset="0"/>
+            </a:endParaRPr>
           </a:p>
           <a:p>
             <a:pPr marL="0" indent="0">
@@ -22628,6 +22647,9 @@
               </a:rPr>
               <a:t>4. Test configuration setup</a:t>
             </a:r>
+            <a:endParaRPr lang="en-US" b="1" dirty="0" smtClean="0">
+              <a:latin typeface="Times New Roman" panose="02020603050405020304" pitchFamily="18" charset="0"/>
+            </a:endParaRPr>
           </a:p>
           <a:p>
             <a:pPr marL="0" indent="0">
@@ -22639,6 +22661,9 @@
               </a:rPr>
               <a:t>	</a:t>
             </a:r>
+            <a:endParaRPr lang="en-US" b="1" dirty="0">
+              <a:latin typeface="Times New Roman" panose="02020603050405020304" pitchFamily="18" charset="0"/>
+            </a:endParaRPr>
           </a:p>
           <a:p>
             <a:pPr marL="0" indent="0">
@@ -22670,24 +22695,22 @@
               </a:rPr>
               <a:t>	</a:t>
             </a:r>
+            <a:endParaRPr lang="en-US" dirty="0" smtClean="0">
+              <a:latin typeface="Times New Roman" panose="02020603050405020304" pitchFamily="18" charset="0"/>
+            </a:endParaRPr>
           </a:p>
         </p:txBody>
       </p:sp>
     </p:spTree>
-    <p:extLst>
-      <p:ext uri="{BB962C8B-B14F-4D97-AF65-F5344CB8AC3E}">
-        <p14:creationId xmlns:p14="http://schemas.microsoft.com/office/powerpoint/2010/main" val="473508293"/>
-      </p:ext>
-    </p:extLst>
   </p:cSld>
   <p:clrMapOvr>
     <a:masterClrMapping/>
   </p:clrMapOvr>
-  <mc:AlternateContent xmlns:mc="http://schemas.openxmlformats.org/markup-compatibility/2006" xmlns:p14="http://schemas.microsoft.com/office/powerpoint/2010/main">
-    <mc:Choice Requires="p14">
+  <mc:AlternateContent xmlns:mc="http://schemas.openxmlformats.org/markup-compatibility/2006">
+    <mc:Choice xmlns:p14="http://schemas.microsoft.com/office/powerpoint/2010/main" Requires="p14">
       <p:transition spd="slow" p14:dur="2000"/>
     </mc:Choice>
-    <mc:Fallback xmlns="">
+    <mc:Fallback>
       <p:transition spd="slow"/>
     </mc:Fallback>
   </mc:AlternateContent>
@@ -22730,7 +22753,6 @@
         </p:nvSpPr>
         <p:spPr>
           <a:noFill/>
-          <a:ln/>
           <a:extLst>
             <a:ext uri="{909E8E84-426E-40DD-AFC4-6F175D3DCCD1}">
               <a14:hiddenFill xmlns:a14="http://schemas.microsoft.com/office/drawing/2010/main">
@@ -22858,8 +22880,6 @@
                   <a:srgbClr val="000000"/>
                 </a:solidFill>
               </a:rPr>
-              <a:pPr/>
-              <a:t>24</a:t>
             </a:fld>
             <a:endParaRPr lang="en-US" sz="1000">
               <a:solidFill>
@@ -22890,6 +22910,9 @@
               </a:rPr>
               <a:t>Framework for SIT</a:t>
             </a:r>
+            <a:endParaRPr lang="en-US" dirty="0" smtClean="0">
+              <a:latin typeface="Times New Roman" panose="02020603050405020304" pitchFamily="18" charset="0"/>
+            </a:endParaRPr>
           </a:p>
         </p:txBody>
       </p:sp>
@@ -22925,6 +22948,9 @@
               </a:rPr>
               <a:t>. Test specification for each integration test phase</a:t>
             </a:r>
+            <a:endParaRPr lang="en-US" b="1" dirty="0" smtClean="0">
+              <a:latin typeface="Times New Roman" panose="02020603050405020304" pitchFamily="18" charset="0"/>
+            </a:endParaRPr>
           </a:p>
           <a:p>
             <a:pPr marL="0" indent="0">
@@ -22942,6 +22968,9 @@
               </a:rPr>
               <a:t>Test Case ID Number</a:t>
             </a:r>
+            <a:endParaRPr lang="en-US" b="1" dirty="0" smtClean="0">
+              <a:latin typeface="Times New Roman" panose="02020603050405020304" pitchFamily="18" charset="0"/>
+            </a:endParaRPr>
           </a:p>
           <a:p>
             <a:pPr marL="0" indent="0">
@@ -23039,6 +23068,9 @@
               </a:rPr>
               <a:t>How to execute this test?</a:t>
             </a:r>
+            <a:endParaRPr lang="en-US" b="1" dirty="0" smtClean="0">
+              <a:latin typeface="Times New Roman" panose="02020603050405020304" pitchFamily="18" charset="0"/>
+            </a:endParaRPr>
           </a:p>
           <a:p>
             <a:pPr marL="0" indent="0">
@@ -23070,6 +23102,9 @@
               </a:rPr>
               <a:t>5. Actual test results for each integration test phase</a:t>
             </a:r>
+            <a:endParaRPr lang="en-US" b="1" dirty="0" smtClean="0">
+              <a:latin typeface="Times New Roman" panose="02020603050405020304" pitchFamily="18" charset="0"/>
+            </a:endParaRPr>
           </a:p>
           <a:p>
             <a:pPr marL="0" indent="0">
@@ -23081,6 +23116,9 @@
               </a:rPr>
               <a:t>6. References</a:t>
             </a:r>
+            <a:endParaRPr lang="en-US" b="1" dirty="0" smtClean="0">
+              <a:latin typeface="Times New Roman" panose="02020603050405020304" pitchFamily="18" charset="0"/>
+            </a:endParaRPr>
           </a:p>
           <a:p>
             <a:pPr marL="0" indent="0">
@@ -23105,20 +23143,15 @@
         </p:txBody>
       </p:sp>
     </p:spTree>
-    <p:extLst>
-      <p:ext uri="{BB962C8B-B14F-4D97-AF65-F5344CB8AC3E}">
-        <p14:creationId xmlns:p14="http://schemas.microsoft.com/office/powerpoint/2010/main" val="497557804"/>
-      </p:ext>
-    </p:extLst>
   </p:cSld>
   <p:clrMapOvr>
     <a:masterClrMapping/>
   </p:clrMapOvr>
-  <mc:AlternateContent xmlns:mc="http://schemas.openxmlformats.org/markup-compatibility/2006" xmlns:p14="http://schemas.microsoft.com/office/powerpoint/2010/main">
-    <mc:Choice Requires="p14">
+  <mc:AlternateContent xmlns:mc="http://schemas.openxmlformats.org/markup-compatibility/2006">
+    <mc:Choice xmlns:p14="http://schemas.microsoft.com/office/powerpoint/2010/main" Requires="p14">
       <p:transition spd="slow" p14:dur="2000"/>
     </mc:Choice>
-    <mc:Fallback xmlns="">
+    <mc:Fallback>
       <p:transition spd="slow"/>
     </mc:Fallback>
   </mc:AlternateContent>
@@ -23161,7 +23194,6 @@
         </p:nvSpPr>
         <p:spPr>
           <a:noFill/>
-          <a:ln/>
           <a:extLst>
             <a:ext uri="{909E8E84-426E-40DD-AFC4-6F175D3DCCD1}">
               <a14:hiddenFill xmlns:a14="http://schemas.microsoft.com/office/drawing/2010/main">
@@ -23289,8 +23321,6 @@
                   <a:srgbClr val="000000"/>
                 </a:solidFill>
               </a:rPr>
-              <a:pPr/>
-              <a:t>25</a:t>
             </a:fld>
             <a:endParaRPr lang="en-US" sz="1000">
               <a:solidFill>
@@ -23321,6 +23351,9 @@
               </a:rPr>
               <a:t>Framework for SIT</a:t>
             </a:r>
+            <a:endParaRPr lang="en-US" dirty="0" smtClean="0">
+              <a:latin typeface="Times New Roman" panose="02020603050405020304" pitchFamily="18" charset="0"/>
+            </a:endParaRPr>
           </a:p>
         </p:txBody>
       </p:sp>
@@ -23411,20 +23444,15 @@
         </p:txBody>
       </p:sp>
     </p:spTree>
-    <p:extLst>
-      <p:ext uri="{BB962C8B-B14F-4D97-AF65-F5344CB8AC3E}">
-        <p14:creationId xmlns:p14="http://schemas.microsoft.com/office/powerpoint/2010/main" val="4258961721"/>
-      </p:ext>
-    </p:extLst>
   </p:cSld>
   <p:clrMapOvr>
     <a:masterClrMapping/>
   </p:clrMapOvr>
-  <mc:AlternateContent xmlns:mc="http://schemas.openxmlformats.org/markup-compatibility/2006" xmlns:p14="http://schemas.microsoft.com/office/powerpoint/2010/main">
-    <mc:Choice Requires="p14">
+  <mc:AlternateContent xmlns:mc="http://schemas.openxmlformats.org/markup-compatibility/2006">
+    <mc:Choice xmlns:p14="http://schemas.microsoft.com/office/powerpoint/2010/main" Requires="p14">
       <p:transition spd="slow" p14:dur="2000"/>
     </mc:Choice>
-    <mc:Fallback xmlns="">
+    <mc:Fallback>
       <p:transition spd="slow"/>
     </mc:Fallback>
   </mc:AlternateContent>
@@ -23467,7 +23495,6 @@
         </p:nvSpPr>
         <p:spPr>
           <a:noFill/>
-          <a:ln/>
           <a:extLst>
             <a:ext uri="{909E8E84-426E-40DD-AFC4-6F175D3DCCD1}">
               <a14:hiddenFill xmlns:a14="http://schemas.microsoft.com/office/drawing/2010/main">
@@ -23595,8 +23622,6 @@
                   <a:srgbClr val="000000"/>
                 </a:solidFill>
               </a:rPr>
-              <a:pPr/>
-              <a:t>26</a:t>
             </a:fld>
             <a:endParaRPr lang="en-US" sz="1000">
               <a:solidFill>
@@ -23681,6 +23706,7 @@
               <a:rPr lang="en-US" dirty="0" smtClean="0"/>
               <a:t>.</a:t>
             </a:r>
+            <a:endParaRPr lang="en-US" dirty="0" smtClean="0"/>
           </a:p>
           <a:p>
             <a:pPr marL="0" indent="0">
@@ -23705,20 +23731,15 @@
         </p:txBody>
       </p:sp>
     </p:spTree>
-    <p:extLst>
-      <p:ext uri="{BB962C8B-B14F-4D97-AF65-F5344CB8AC3E}">
-        <p14:creationId xmlns:p14="http://schemas.microsoft.com/office/powerpoint/2010/main" val="1887663725"/>
-      </p:ext>
-    </p:extLst>
   </p:cSld>
   <p:clrMapOvr>
     <a:masterClrMapping/>
   </p:clrMapOvr>
-  <mc:AlternateContent xmlns:mc="http://schemas.openxmlformats.org/markup-compatibility/2006" xmlns:p14="http://schemas.microsoft.com/office/powerpoint/2010/main">
-    <mc:Choice Requires="p14">
+  <mc:AlternateContent xmlns:mc="http://schemas.openxmlformats.org/markup-compatibility/2006">
+    <mc:Choice xmlns:p14="http://schemas.microsoft.com/office/powerpoint/2010/main" Requires="p14">
       <p:transition spd="slow" p14:dur="2000"/>
     </mc:Choice>
-    <mc:Fallback xmlns="">
+    <mc:Fallback>
       <p:transition spd="slow"/>
     </mc:Fallback>
   </mc:AlternateContent>
@@ -23761,7 +23782,6 @@
         </p:nvSpPr>
         <p:spPr>
           <a:noFill/>
-          <a:ln/>
           <a:extLst>
             <a:ext uri="{909E8E84-426E-40DD-AFC4-6F175D3DCCD1}">
               <a14:hiddenFill xmlns:a14="http://schemas.microsoft.com/office/drawing/2010/main">
@@ -23889,8 +23909,6 @@
                   <a:srgbClr val="000000"/>
                 </a:solidFill>
               </a:rPr>
-              <a:pPr/>
-              <a:t>27</a:t>
             </a:fld>
             <a:endParaRPr lang="en-US" sz="1000">
               <a:solidFill>
@@ -23969,6 +23987,7 @@
               <a:rPr lang="en-US" dirty="0" smtClean="0"/>
               <a:t>.</a:t>
             </a:r>
+            <a:endParaRPr lang="en-US" dirty="0" smtClean="0"/>
           </a:p>
           <a:p>
             <a:pPr marL="0" indent="0">
@@ -24013,20 +24032,15 @@
         </p:txBody>
       </p:sp>
     </p:spTree>
-    <p:extLst>
-      <p:ext uri="{BB962C8B-B14F-4D97-AF65-F5344CB8AC3E}">
-        <p14:creationId xmlns:p14="http://schemas.microsoft.com/office/powerpoint/2010/main" val="1517306432"/>
-      </p:ext>
-    </p:extLst>
   </p:cSld>
   <p:clrMapOvr>
     <a:masterClrMapping/>
   </p:clrMapOvr>
-  <mc:AlternateContent xmlns:mc="http://schemas.openxmlformats.org/markup-compatibility/2006" xmlns:p14="http://schemas.microsoft.com/office/powerpoint/2010/main">
-    <mc:Choice Requires="p14">
+  <mc:AlternateContent xmlns:mc="http://schemas.openxmlformats.org/markup-compatibility/2006">
+    <mc:Choice xmlns:p14="http://schemas.microsoft.com/office/powerpoint/2010/main" Requires="p14">
       <p:transition spd="slow" p14:dur="2000"/>
     </mc:Choice>
-    <mc:Fallback xmlns="">
+    <mc:Fallback>
       <p:transition spd="slow"/>
     </mc:Fallback>
   </mc:AlternateContent>
@@ -24069,7 +24083,6 @@
         </p:nvSpPr>
         <p:spPr>
           <a:noFill/>
-          <a:ln/>
           <a:extLst>
             <a:ext uri="{909E8E84-426E-40DD-AFC4-6F175D3DCCD1}">
               <a14:hiddenFill xmlns:a14="http://schemas.microsoft.com/office/drawing/2010/main">
@@ -24197,8 +24210,6 @@
                   <a:srgbClr val="000000"/>
                 </a:solidFill>
               </a:rPr>
-              <a:pPr/>
-              <a:t>28</a:t>
             </a:fld>
             <a:endParaRPr lang="en-US" sz="1000">
               <a:solidFill>
@@ -24273,6 +24284,7 @@
               <a:rPr lang="en-US" dirty="0" smtClean="0"/>
               <a:t> test.</a:t>
             </a:r>
+            <a:endParaRPr lang="en-US" dirty="0" smtClean="0"/>
           </a:p>
           <a:p>
             <a:pPr marL="0" indent="0">
@@ -24293,20 +24305,15 @@
         </p:txBody>
       </p:sp>
     </p:spTree>
-    <p:extLst>
-      <p:ext uri="{BB962C8B-B14F-4D97-AF65-F5344CB8AC3E}">
-        <p14:creationId xmlns:p14="http://schemas.microsoft.com/office/powerpoint/2010/main" val="2789423060"/>
-      </p:ext>
-    </p:extLst>
   </p:cSld>
   <p:clrMapOvr>
     <a:masterClrMapping/>
   </p:clrMapOvr>
-  <mc:AlternateContent xmlns:mc="http://schemas.openxmlformats.org/markup-compatibility/2006" xmlns:p14="http://schemas.microsoft.com/office/powerpoint/2010/main">
-    <mc:Choice Requires="p14">
+  <mc:AlternateContent xmlns:mc="http://schemas.openxmlformats.org/markup-compatibility/2006">
+    <mc:Choice xmlns:p14="http://schemas.microsoft.com/office/powerpoint/2010/main" Requires="p14">
       <p:transition spd="slow" p14:dur="2000"/>
     </mc:Choice>
-    <mc:Fallback xmlns="">
+    <mc:Fallback>
       <p:transition spd="slow"/>
     </mc:Fallback>
   </mc:AlternateContent>
@@ -24349,7 +24356,6 @@
         </p:nvSpPr>
         <p:spPr>
           <a:noFill/>
-          <a:ln/>
           <a:extLst>
             <a:ext uri="{909E8E84-426E-40DD-AFC4-6F175D3DCCD1}">
               <a14:hiddenFill xmlns:a14="http://schemas.microsoft.com/office/drawing/2010/main">
@@ -24477,8 +24483,6 @@
                   <a:srgbClr val="000000"/>
                 </a:solidFill>
               </a:rPr>
-              <a:pPr/>
-              <a:t>29</a:t>
             </a:fld>
             <a:endParaRPr lang="en-US" sz="1000">
               <a:solidFill>
@@ -24545,6 +24549,7 @@
               <a:rPr lang="en-US" dirty="0" smtClean="0"/>
               <a:t>.</a:t>
             </a:r>
+            <a:endParaRPr lang="en-US" dirty="0" smtClean="0"/>
           </a:p>
           <a:p>
             <a:pPr marL="0" indent="0">
@@ -24574,6 +24579,9 @@
               </a:rPr>
               <a:t> Usage etc.</a:t>
             </a:r>
+            <a:endParaRPr lang="en-US" sz="2400" b="1" dirty="0" smtClean="0">
+              <a:latin typeface="Times New Roman" panose="02020603050405020304" pitchFamily="18" charset="0"/>
+            </a:endParaRPr>
           </a:p>
           <a:p>
             <a:pPr marL="0" indent="0">
@@ -24598,20 +24606,15 @@
         </p:txBody>
       </p:sp>
     </p:spTree>
-    <p:extLst>
-      <p:ext uri="{BB962C8B-B14F-4D97-AF65-F5344CB8AC3E}">
-        <p14:creationId xmlns:p14="http://schemas.microsoft.com/office/powerpoint/2010/main" val="2337798160"/>
-      </p:ext>
-    </p:extLst>
   </p:cSld>
   <p:clrMapOvr>
     <a:masterClrMapping/>
   </p:clrMapOvr>
-  <mc:AlternateContent xmlns:mc="http://schemas.openxmlformats.org/markup-compatibility/2006" xmlns:p14="http://schemas.microsoft.com/office/powerpoint/2010/main">
-    <mc:Choice Requires="p14">
+  <mc:AlternateContent xmlns:mc="http://schemas.openxmlformats.org/markup-compatibility/2006">
+    <mc:Choice xmlns:p14="http://schemas.microsoft.com/office/powerpoint/2010/main" Requires="p14">
       <p:transition spd="slow" p14:dur="2000"/>
     </mc:Choice>
-    <mc:Fallback xmlns="">
+    <mc:Fallback>
       <p:transition spd="slow"/>
     </mc:Fallback>
   </mc:AlternateContent>
@@ -24654,7 +24657,6 @@
         </p:nvSpPr>
         <p:spPr>
           <a:noFill/>
-          <a:ln/>
           <a:extLst>
             <a:ext uri="{909E8E84-426E-40DD-AFC4-6F175D3DCCD1}">
               <a14:hiddenFill xmlns:a14="http://schemas.microsoft.com/office/drawing/2010/main">
@@ -24782,8 +24784,6 @@
                   <a:srgbClr val="000000"/>
                 </a:solidFill>
               </a:rPr>
-              <a:pPr/>
-              <a:t>3</a:t>
             </a:fld>
             <a:endParaRPr lang="en-US" sz="1000">
               <a:solidFill>
@@ -24814,6 +24814,9 @@
               </a:rPr>
               <a:t>The Concept of Integration Testing</a:t>
             </a:r>
+            <a:endParaRPr lang="en-US" smtClean="0">
+              <a:latin typeface="Times New Roman" panose="02020603050405020304" pitchFamily="18" charset="0"/>
+            </a:endParaRPr>
           </a:p>
         </p:txBody>
       </p:sp>
@@ -24849,6 +24852,9 @@
               </a:rPr>
               <a:t>The major advantages of conducting SIT are as follows:</a:t>
             </a:r>
+            <a:endParaRPr lang="en-US" dirty="0" smtClean="0">
+              <a:latin typeface="Times New Roman" panose="02020603050405020304" pitchFamily="18" charset="0"/>
+            </a:endParaRPr>
           </a:p>
           <a:p>
             <a:pPr>
@@ -24866,6 +24872,9 @@
               </a:rPr>
               <a:t>Defects are detected early</a:t>
             </a:r>
+            <a:endParaRPr lang="en-US" dirty="0" smtClean="0">
+              <a:latin typeface="Times New Roman" panose="02020603050405020304" pitchFamily="18" charset="0"/>
+            </a:endParaRPr>
           </a:p>
           <a:p>
             <a:r>
@@ -24874,6 +24883,9 @@
               </a:rPr>
               <a:t>It is easier to fix defects detected earlier</a:t>
             </a:r>
+            <a:endParaRPr lang="en-US" dirty="0" smtClean="0">
+              <a:latin typeface="Times New Roman" panose="02020603050405020304" pitchFamily="18" charset="0"/>
+            </a:endParaRPr>
           </a:p>
           <a:p>
             <a:r>
@@ -24882,6 +24894,9 @@
               </a:rPr>
               <a:t>We get earlier feedback on the health and acceptability of the individual modules and on the overall system</a:t>
             </a:r>
+            <a:endParaRPr lang="en-US" dirty="0" smtClean="0">
+              <a:latin typeface="Times New Roman" panose="02020603050405020304" pitchFamily="18" charset="0"/>
+            </a:endParaRPr>
           </a:p>
           <a:p>
             <a:r>
@@ -24890,6 +24905,9 @@
               </a:rPr>
               <a:t>Scheduling of defect fixes is flexible, and it can overlap with development.</a:t>
             </a:r>
+            <a:endParaRPr lang="en-US" dirty="0" smtClean="0">
+              <a:latin typeface="Times New Roman" panose="02020603050405020304" pitchFamily="18" charset="0"/>
+            </a:endParaRPr>
           </a:p>
           <a:p>
             <a:pPr>
@@ -24938,6 +24956,9 @@
               </a:rPr>
               <a:t>.</a:t>
             </a:r>
+            <a:endParaRPr lang="en-US" dirty="0" smtClean="0">
+              <a:latin typeface="Times New Roman" panose="02020603050405020304" pitchFamily="18" charset="0"/>
+            </a:endParaRPr>
           </a:p>
           <a:p>
             <a:pPr>
@@ -24981,20 +25002,15 @@
         </p:txBody>
       </p:sp>
     </p:spTree>
-    <p:extLst>
-      <p:ext uri="{BB962C8B-B14F-4D97-AF65-F5344CB8AC3E}">
-        <p14:creationId xmlns:p14="http://schemas.microsoft.com/office/powerpoint/2010/main" val="3031835431"/>
-      </p:ext>
-    </p:extLst>
   </p:cSld>
   <p:clrMapOvr>
     <a:masterClrMapping/>
   </p:clrMapOvr>
-  <mc:AlternateContent xmlns:mc="http://schemas.openxmlformats.org/markup-compatibility/2006" xmlns:p14="http://schemas.microsoft.com/office/powerpoint/2010/main">
-    <mc:Choice Requires="p14">
+  <mc:AlternateContent xmlns:mc="http://schemas.openxmlformats.org/markup-compatibility/2006">
+    <mc:Choice xmlns:p14="http://schemas.microsoft.com/office/powerpoint/2010/main" Requires="p14">
       <p:transition spd="slow" p14:dur="2000"/>
     </mc:Choice>
-    <mc:Fallback xmlns="">
+    <mc:Fallback>
       <p:transition spd="slow"/>
     </mc:Fallback>
   </mc:AlternateContent>
@@ -25037,7 +25053,6 @@
         </p:nvSpPr>
         <p:spPr>
           <a:noFill/>
-          <a:ln/>
           <a:extLst>
             <a:ext uri="{909E8E84-426E-40DD-AFC4-6F175D3DCCD1}">
               <a14:hiddenFill xmlns:a14="http://schemas.microsoft.com/office/drawing/2010/main">
@@ -25165,8 +25180,6 @@
                   <a:srgbClr val="000000"/>
                 </a:solidFill>
               </a:rPr>
-              <a:pPr/>
-              <a:t>30</a:t>
             </a:fld>
             <a:endParaRPr lang="en-US" sz="1000">
               <a:solidFill>
@@ -25203,59 +25216,80 @@
       </p:sp>
       <p:sp>
         <p:nvSpPr>
-          <p:cNvPr id="40964" name="Rectangle 3"/>
-          <p:cNvSpPr>
-            <a:spLocks noGrp="1" noChangeArrowheads="1"/>
-          </p:cNvSpPr>
-          <p:nvPr>
-            <p:ph type="body" idx="4294967295"/>
-          </p:nvPr>
+          <p:cNvPr id="2" name="Text Box 1"/>
+          <p:cNvSpPr txBox="1"/>
+          <p:nvPr/>
         </p:nvSpPr>
-        <p:spPr/>
+        <p:spPr>
+          <a:xfrm>
+            <a:off x="838200" y="2058035"/>
+            <a:ext cx="8840470" cy="3415030"/>
+          </a:xfrm>
+          <a:prstGeom prst="rect">
+            <a:avLst/>
+          </a:prstGeom>
+          <a:noFill/>
+        </p:spPr>
         <p:txBody>
-          <a:bodyPr>
-            <a:normAutofit fontScale="85000" lnSpcReduction="20000"/>
+          <a:bodyPr wrap="square" rtlCol="0">
+            <a:spAutoFit/>
           </a:bodyPr>
-          <a:lstStyle/>
           <a:p>
             <a:pPr marL="0" indent="0">
               <a:buNone/>
             </a:pPr>
             <a:r>
-              <a:rPr lang="en-US" dirty="0"/>
+              <a:rPr lang="en-US" dirty="0">
+                <a:sym typeface="+mn-ea"/>
+              </a:rPr>
               <a:t>Instead of developing a software component from scratch, organizations </a:t>
             </a:r>
             <a:r>
-              <a:rPr lang="en-US" dirty="0" smtClean="0"/>
+              <a:rPr lang="en-US" dirty="0" smtClean="0">
+                <a:sym typeface="+mn-ea"/>
+              </a:rPr>
               <a:t>occasionally </a:t>
             </a:r>
             <a:r>
-              <a:rPr lang="en-US" dirty="0"/>
+              <a:rPr lang="en-US" dirty="0">
+                <a:sym typeface="+mn-ea"/>
+              </a:rPr>
               <a:t>purchase off-the-shelf (OTS) components form third-party vendors and integrate them with their </a:t>
             </a:r>
             <a:r>
-              <a:rPr lang="en-US" dirty="0" smtClean="0"/>
+              <a:rPr lang="en-US" dirty="0" smtClean="0">
+                <a:sym typeface="+mn-ea"/>
+              </a:rPr>
               <a:t>own components </a:t>
             </a:r>
+            <a:endParaRPr lang="en-US" dirty="0" smtClean="0"/>
           </a:p>
           <a:p>
             <a:pPr marL="0" indent="0">
               <a:buNone/>
             </a:pPr>
             <a:r>
-              <a:rPr lang="en-US" dirty="0" err="1"/>
+              <a:rPr lang="en-US" dirty="0" err="1">
+                <a:sym typeface="+mn-ea"/>
+              </a:rPr>
               <a:t>Vigder</a:t>
             </a:r>
             <a:r>
-              <a:rPr lang="en-US" dirty="0"/>
+              <a:rPr lang="en-US" dirty="0">
+                <a:sym typeface="+mn-ea"/>
+              </a:rPr>
               <a:t> and Dean [9] have presented elements of an architecture for </a:t>
             </a:r>
             <a:r>
-              <a:rPr lang="en-US" dirty="0" smtClean="0"/>
+              <a:rPr lang="en-US" dirty="0" smtClean="0">
+                <a:sym typeface="+mn-ea"/>
+              </a:rPr>
               <a:t>integration </a:t>
             </a:r>
             <a:r>
-              <a:rPr lang="en-US" dirty="0"/>
+              <a:rPr lang="en-US" dirty="0">
+                <a:sym typeface="+mn-ea"/>
+              </a:rPr>
               <a:t>and have defined rules that facilitate integration of components. </a:t>
             </a:r>
             <a:endParaRPr lang="en-US" dirty="0" smtClean="0"/>
@@ -25265,36 +25299,51 @@
               <a:buNone/>
             </a:pPr>
             <a:r>
-              <a:rPr lang="en-US" dirty="0" smtClean="0"/>
+              <a:rPr lang="en-US" dirty="0" smtClean="0">
+                <a:sym typeface="+mn-ea"/>
+              </a:rPr>
               <a:t>They </a:t>
             </a:r>
             <a:r>
-              <a:rPr lang="en-US" dirty="0"/>
+              <a:rPr lang="en-US" dirty="0">
+                <a:sym typeface="+mn-ea"/>
+              </a:rPr>
               <a:t>have identified a useful set of supporting components for integrating the actual, </a:t>
             </a:r>
             <a:r>
-              <a:rPr lang="en-US" dirty="0" smtClean="0"/>
+              <a:rPr lang="en-US" dirty="0" smtClean="0">
+                <a:sym typeface="+mn-ea"/>
+              </a:rPr>
               <a:t>serving </a:t>
             </a:r>
             <a:r>
-              <a:rPr lang="en-US" dirty="0"/>
+              <a:rPr lang="en-US" dirty="0">
+                <a:sym typeface="+mn-ea"/>
+              </a:rPr>
               <a:t>components. The supporting components are wrappers, glue, and tailoring</a:t>
             </a:r>
             <a:r>
-              <a:rPr lang="en-US" dirty="0" smtClean="0"/>
+              <a:rPr lang="en-US" dirty="0" smtClean="0">
+                <a:sym typeface="+mn-ea"/>
+              </a:rPr>
               <a:t>.</a:t>
             </a:r>
+            <a:endParaRPr lang="en-US" dirty="0" smtClean="0"/>
           </a:p>
           <a:p>
             <a:pPr marL="0" indent="0">
               <a:buNone/>
             </a:pPr>
             <a:r>
-              <a:rPr lang="en-US" dirty="0" err="1"/>
+              <a:rPr lang="en-US" dirty="0" err="1">
+                <a:sym typeface="+mn-ea"/>
+              </a:rPr>
               <a:t>Rine</a:t>
             </a:r>
             <a:r>
-              <a:rPr lang="en-US" dirty="0"/>
+              <a:rPr lang="en-US" dirty="0">
+                <a:sym typeface="+mn-ea"/>
+              </a:rPr>
               <a:t> et al. [10] have proposed the concept of adapters to integrate components. </a:t>
             </a:r>
             <a:endParaRPr lang="en-US" dirty="0" smtClean="0"/>
@@ -25304,19 +25353,27 @@
               <a:buNone/>
             </a:pPr>
             <a:r>
-              <a:rPr lang="en-US" dirty="0" smtClean="0"/>
+              <a:rPr lang="en-US" dirty="0" smtClean="0">
+                <a:sym typeface="+mn-ea"/>
+              </a:rPr>
               <a:t>An </a:t>
             </a:r>
             <a:r>
-              <a:rPr lang="en-US" dirty="0"/>
+              <a:rPr lang="en-US" dirty="0">
+                <a:sym typeface="+mn-ea"/>
+              </a:rPr>
               <a:t>adapter is associated with each component; the adapter runs an interaction protocol to </a:t>
             </a:r>
             <a:r>
-              <a:rPr lang="en-US" dirty="0" smtClean="0"/>
+              <a:rPr lang="en-US" dirty="0" smtClean="0">
+                <a:sym typeface="+mn-ea"/>
+              </a:rPr>
               <a:t>manage </a:t>
             </a:r>
             <a:r>
-              <a:rPr lang="en-US" dirty="0"/>
+              <a:rPr lang="en-US" dirty="0">
+                <a:sym typeface="+mn-ea"/>
+              </a:rPr>
               <a:t>communications among the components. </a:t>
             </a:r>
             <a:endParaRPr lang="en-US" dirty="0" smtClean="0"/>
@@ -25326,11 +25383,15 @@
               <a:buNone/>
             </a:pPr>
             <a:r>
-              <a:rPr lang="en-US" dirty="0" smtClean="0"/>
+              <a:rPr lang="en-US" dirty="0" smtClean="0">
+                <a:sym typeface="+mn-ea"/>
+              </a:rPr>
               <a:t>Components </a:t>
             </a:r>
             <a:r>
-              <a:rPr lang="en-US" dirty="0"/>
+              <a:rPr lang="en-US" dirty="0">
+                <a:sym typeface="+mn-ea"/>
+              </a:rPr>
               <a:t>request services from others through their associated adapters. </a:t>
             </a:r>
             <a:endParaRPr lang="en-US" dirty="0" smtClean="0"/>
@@ -25340,34 +25401,31 @@
               <a:buNone/>
             </a:pPr>
             <a:r>
-              <a:rPr lang="en-US" dirty="0" smtClean="0"/>
+              <a:rPr lang="en-US" dirty="0" smtClean="0">
+                <a:sym typeface="+mn-ea"/>
+              </a:rPr>
               <a:t>An </a:t>
             </a:r>
             <a:r>
-              <a:rPr lang="en-US" dirty="0"/>
+              <a:rPr lang="en-US" dirty="0">
+                <a:sym typeface="+mn-ea"/>
+              </a:rPr>
               <a:t>adapter is responsible for resolving any syntactic interface mismatch.</a:t>
             </a:r>
-            <a:endParaRPr lang="en-US" b="1" dirty="0" smtClean="0">
-              <a:latin typeface="Times New Roman" panose="02020603050405020304" pitchFamily="18" charset="0"/>
-            </a:endParaRPr>
+            <a:endParaRPr lang="en-US" dirty="0"/>
           </a:p>
         </p:txBody>
       </p:sp>
     </p:spTree>
-    <p:extLst>
-      <p:ext uri="{BB962C8B-B14F-4D97-AF65-F5344CB8AC3E}">
-        <p14:creationId xmlns:p14="http://schemas.microsoft.com/office/powerpoint/2010/main" val="793057212"/>
-      </p:ext>
-    </p:extLst>
   </p:cSld>
   <p:clrMapOvr>
     <a:masterClrMapping/>
   </p:clrMapOvr>
-  <mc:AlternateContent xmlns:mc="http://schemas.openxmlformats.org/markup-compatibility/2006" xmlns:p14="http://schemas.microsoft.com/office/powerpoint/2010/main">
-    <mc:Choice Requires="p14">
+  <mc:AlternateContent xmlns:mc="http://schemas.openxmlformats.org/markup-compatibility/2006">
+    <mc:Choice xmlns:p14="http://schemas.microsoft.com/office/powerpoint/2010/main" Requires="p14">
       <p:transition spd="slow" p14:dur="2000"/>
     </mc:Choice>
-    <mc:Fallback xmlns="">
+    <mc:Fallback>
       <p:transition spd="slow"/>
     </mc:Fallback>
   </mc:AlternateContent>
@@ -25410,7 +25468,6 @@
         </p:nvSpPr>
         <p:spPr>
           <a:noFill/>
-          <a:ln/>
           <a:extLst>
             <a:ext uri="{909E8E84-426E-40DD-AFC4-6F175D3DCCD1}">
               <a14:hiddenFill xmlns:a14="http://schemas.microsoft.com/office/drawing/2010/main">
@@ -25538,8 +25595,6 @@
                   <a:srgbClr val="000000"/>
                 </a:solidFill>
               </a:rPr>
-              <a:pPr/>
-              <a:t>31</a:t>
             </a:fld>
             <a:endParaRPr lang="en-US" sz="1000">
               <a:solidFill>
@@ -25610,6 +25665,7 @@
               <a:rPr lang="en-US" dirty="0" smtClean="0"/>
               <a:t>.</a:t>
             </a:r>
+            <a:endParaRPr lang="en-US" dirty="0" smtClean="0"/>
           </a:p>
           <a:p>
             <a:pPr marL="0" indent="0">
@@ -25623,6 +25679,7 @@
               <a:rPr lang="en-US" dirty="0" smtClean="0"/>
               <a:t>.</a:t>
             </a:r>
+            <a:endParaRPr lang="en-US" dirty="0" smtClean="0"/>
           </a:p>
           <a:p>
             <a:pPr marL="0" indent="0">
@@ -25639,20 +25696,15 @@
         </p:txBody>
       </p:sp>
     </p:spTree>
-    <p:extLst>
-      <p:ext uri="{BB962C8B-B14F-4D97-AF65-F5344CB8AC3E}">
-        <p14:creationId xmlns:p14="http://schemas.microsoft.com/office/powerpoint/2010/main" val="3128750519"/>
-      </p:ext>
-    </p:extLst>
   </p:cSld>
   <p:clrMapOvr>
     <a:masterClrMapping/>
   </p:clrMapOvr>
-  <mc:AlternateContent xmlns:mc="http://schemas.openxmlformats.org/markup-compatibility/2006" xmlns:p14="http://schemas.microsoft.com/office/powerpoint/2010/main">
-    <mc:Choice Requires="p14">
+  <mc:AlternateContent xmlns:mc="http://schemas.openxmlformats.org/markup-compatibility/2006">
+    <mc:Choice xmlns:p14="http://schemas.microsoft.com/office/powerpoint/2010/main" Requires="p14">
       <p:transition spd="slow" p14:dur="2000"/>
     </mc:Choice>
-    <mc:Fallback xmlns="">
+    <mc:Fallback>
       <p:transition spd="slow"/>
     </mc:Fallback>
   </mc:AlternateContent>
@@ -25695,7 +25747,6 @@
         </p:nvSpPr>
         <p:spPr>
           <a:noFill/>
-          <a:ln/>
           <a:extLst>
             <a:ext uri="{909E8E84-426E-40DD-AFC4-6F175D3DCCD1}">
               <a14:hiddenFill xmlns:a14="http://schemas.microsoft.com/office/drawing/2010/main">
@@ -25823,8 +25874,6 @@
                   <a:srgbClr val="000000"/>
                 </a:solidFill>
               </a:rPr>
-              <a:pPr/>
-              <a:t>32</a:t>
             </a:fld>
             <a:endParaRPr lang="en-US" sz="1000">
               <a:solidFill>
@@ -25913,6 +25962,7 @@
               <a:rPr lang="en-US" dirty="0" smtClean="0"/>
               <a:t>.</a:t>
             </a:r>
+            <a:endParaRPr lang="en-US" dirty="0" smtClean="0"/>
           </a:p>
           <a:p>
             <a:pPr marL="0" indent="0">
@@ -25925,20 +25975,15 @@
         </p:txBody>
       </p:sp>
     </p:spTree>
-    <p:extLst>
-      <p:ext uri="{BB962C8B-B14F-4D97-AF65-F5344CB8AC3E}">
-        <p14:creationId xmlns:p14="http://schemas.microsoft.com/office/powerpoint/2010/main" val="2173923553"/>
-      </p:ext>
-    </p:extLst>
   </p:cSld>
   <p:clrMapOvr>
     <a:masterClrMapping/>
   </p:clrMapOvr>
-  <mc:AlternateContent xmlns:mc="http://schemas.openxmlformats.org/markup-compatibility/2006" xmlns:p14="http://schemas.microsoft.com/office/powerpoint/2010/main">
-    <mc:Choice Requires="p14">
+  <mc:AlternateContent xmlns:mc="http://schemas.openxmlformats.org/markup-compatibility/2006">
+    <mc:Choice xmlns:p14="http://schemas.microsoft.com/office/powerpoint/2010/main" Requires="p14">
       <p:transition spd="slow" p14:dur="2000"/>
     </mc:Choice>
-    <mc:Fallback xmlns="">
+    <mc:Fallback>
       <p:transition spd="slow"/>
     </mc:Fallback>
   </mc:AlternateContent>
@@ -25981,7 +26026,6 @@
         </p:nvSpPr>
         <p:spPr>
           <a:noFill/>
-          <a:ln/>
           <a:extLst>
             <a:ext uri="{909E8E84-426E-40DD-AFC4-6F175D3DCCD1}">
               <a14:hiddenFill xmlns:a14="http://schemas.microsoft.com/office/drawing/2010/main">
@@ -26109,8 +26153,6 @@
                   <a:srgbClr val="000000"/>
                 </a:solidFill>
               </a:rPr>
-              <a:pPr/>
-              <a:t>33</a:t>
             </a:fld>
             <a:endParaRPr lang="en-US" sz="1000">
               <a:solidFill>
@@ -26177,6 +26219,7 @@
               <a:rPr lang="en-US" dirty="0" smtClean="0"/>
               <a:t>:</a:t>
             </a:r>
+            <a:endParaRPr lang="en-US" dirty="0" smtClean="0"/>
           </a:p>
           <a:p>
             <a:pPr marL="0" indent="0">
@@ -26220,6 +26263,7 @@
               <a:rPr lang="en-US" dirty="0" smtClean="0"/>
               <a:t>.</a:t>
             </a:r>
+            <a:endParaRPr lang="en-US" dirty="0" smtClean="0"/>
           </a:p>
           <a:p>
             <a:pPr marL="0" indent="0">
@@ -26240,20 +26284,15 @@
         </p:txBody>
       </p:sp>
     </p:spTree>
-    <p:extLst>
-      <p:ext uri="{BB962C8B-B14F-4D97-AF65-F5344CB8AC3E}">
-        <p14:creationId xmlns:p14="http://schemas.microsoft.com/office/powerpoint/2010/main" val="2285483951"/>
-      </p:ext>
-    </p:extLst>
   </p:cSld>
   <p:clrMapOvr>
     <a:masterClrMapping/>
   </p:clrMapOvr>
-  <mc:AlternateContent xmlns:mc="http://schemas.openxmlformats.org/markup-compatibility/2006" xmlns:p14="http://schemas.microsoft.com/office/powerpoint/2010/main">
-    <mc:Choice Requires="p14">
+  <mc:AlternateContent xmlns:mc="http://schemas.openxmlformats.org/markup-compatibility/2006">
+    <mc:Choice xmlns:p14="http://schemas.microsoft.com/office/powerpoint/2010/main" Requires="p14">
       <p:transition spd="slow" p14:dur="2000"/>
     </mc:Choice>
-    <mc:Fallback xmlns="">
+    <mc:Fallback>
       <p:transition spd="slow"/>
     </mc:Fallback>
   </mc:AlternateContent>
@@ -26296,7 +26335,6 @@
         </p:nvSpPr>
         <p:spPr>
           <a:noFill/>
-          <a:ln/>
           <a:extLst>
             <a:ext uri="{909E8E84-426E-40DD-AFC4-6F175D3DCCD1}">
               <a14:hiddenFill xmlns:a14="http://schemas.microsoft.com/office/drawing/2010/main">
@@ -26424,8 +26462,6 @@
                   <a:srgbClr val="000000"/>
                 </a:solidFill>
               </a:rPr>
-              <a:pPr/>
-              <a:t>34</a:t>
             </a:fld>
             <a:endParaRPr lang="en-US" sz="1000">
               <a:solidFill>
@@ -26493,6 +26529,7 @@
               <a:rPr lang="en-US" dirty="0" smtClean="0"/>
               <a:t>quality</a:t>
             </a:r>
+            <a:endParaRPr lang="en-US" dirty="0" smtClean="0"/>
           </a:p>
           <a:p>
             <a:pPr marL="0" indent="0">
@@ -26542,6 +26579,7 @@
               <a:rPr lang="en-US" dirty="0" smtClean="0"/>
               <a:t>:</a:t>
             </a:r>
+            <a:endParaRPr lang="en-US" dirty="0" smtClean="0"/>
           </a:p>
           <a:p>
             <a:pPr marL="0" indent="0">
@@ -26584,20 +26622,15 @@
         </p:txBody>
       </p:sp>
     </p:spTree>
-    <p:extLst>
-      <p:ext uri="{BB962C8B-B14F-4D97-AF65-F5344CB8AC3E}">
-        <p14:creationId xmlns:p14="http://schemas.microsoft.com/office/powerpoint/2010/main" val="3915245360"/>
-      </p:ext>
-    </p:extLst>
   </p:cSld>
   <p:clrMapOvr>
     <a:masterClrMapping/>
   </p:clrMapOvr>
-  <mc:AlternateContent xmlns:mc="http://schemas.openxmlformats.org/markup-compatibility/2006" xmlns:p14="http://schemas.microsoft.com/office/powerpoint/2010/main">
-    <mc:Choice Requires="p14">
+  <mc:AlternateContent xmlns:mc="http://schemas.openxmlformats.org/markup-compatibility/2006">
+    <mc:Choice xmlns:p14="http://schemas.microsoft.com/office/powerpoint/2010/main" Requires="p14">
       <p:transition spd="slow" p14:dur="2000"/>
     </mc:Choice>
-    <mc:Fallback xmlns="">
+    <mc:Fallback>
       <p:transition spd="slow"/>
     </mc:Fallback>
   </mc:AlternateContent>
@@ -26659,6 +26692,7 @@
               <a:rPr lang="en-US" dirty="0"/>
               <a:t>AND INTERFACE ERRORS</a:t>
             </a:r>
+            <a:endParaRPr lang="en-US" dirty="0"/>
           </a:p>
         </p:txBody>
       </p:sp>
@@ -26715,6 +26749,7 @@
               <a:rPr lang="en-US" sz="2400" dirty="0" smtClean="0"/>
               <a:t>:</a:t>
             </a:r>
+            <a:endParaRPr lang="en-US" sz="2400" dirty="0" smtClean="0"/>
           </a:p>
           <a:p>
             <a:r>
@@ -26757,6 +26792,7 @@
               <a:rPr lang="en-US" sz="2400" dirty="0" smtClean="0"/>
               <a:t>.</a:t>
             </a:r>
+            <a:endParaRPr lang="en-US" sz="2400" dirty="0" smtClean="0"/>
           </a:p>
           <a:p>
             <a:r>
@@ -26775,6 +26811,7 @@
               <a:rPr lang="en-US" sz="2400" dirty="0"/>
               <a:t>block of memory is shared between two</a:t>
             </a:r>
+            <a:endParaRPr lang="en-US" sz="2400" dirty="0"/>
           </a:p>
           <a:p>
             <a:r>
@@ -26793,6 +26830,7 @@
               <a:rPr lang="en-US" sz="2400" dirty="0" smtClean="0"/>
               <a:t>.</a:t>
             </a:r>
+            <a:endParaRPr lang="en-US" sz="2400" dirty="0" smtClean="0"/>
           </a:p>
           <a:p>
             <a:r>
@@ -26823,6 +26861,7 @@
               <a:rPr lang="en-US" sz="2400" dirty="0"/>
               <a:t>form of module interaction is common in client–server-based systems</a:t>
             </a:r>
+            <a:endParaRPr lang="en-US" sz="2400" dirty="0"/>
           </a:p>
           <a:p>
             <a:r>
@@ -26838,11 +26877,6 @@
         </p:txBody>
       </p:sp>
     </p:spTree>
-    <p:extLst>
-      <p:ext uri="{BB962C8B-B14F-4D97-AF65-F5344CB8AC3E}">
-        <p14:creationId xmlns:p14="http://schemas.microsoft.com/office/powerpoint/2010/main" val="2997188436"/>
-      </p:ext>
-    </p:extLst>
   </p:cSld>
   <p:clrMapOvr>
     <a:masterClrMapping/>
@@ -26900,6 +26934,7 @@
               <a:rPr lang="en-US" dirty="0"/>
               <a:t>AND INTERFACE ERRORS</a:t>
             </a:r>
+            <a:endParaRPr lang="en-US" dirty="0"/>
           </a:p>
         </p:txBody>
       </p:sp>
@@ -26909,13 +26944,7 @@
           <p:cNvGraphicFramePr>
             <a:graphicFrameLocks noGrp="1"/>
           </p:cNvGraphicFramePr>
-          <p:nvPr>
-            <p:extLst>
-              <p:ext uri="{D42A27DB-BD31-4B8C-83A1-F6EECF244321}">
-                <p14:modId xmlns:p14="http://schemas.microsoft.com/office/powerpoint/2010/main" val="390729934"/>
-              </p:ext>
-            </p:extLst>
-          </p:nvPr>
+          <p:nvPr/>
         </p:nvGraphicFramePr>
         <p:xfrm>
           <a:off x="746975" y="2052369"/>
@@ -27150,6 +27179,13 @@
                         </a:rPr>
                         <a:t> (Handles user interaction)</a:t>
                       </a:r>
+                      <a:endParaRPr lang="en-US" sz="1200" dirty="0">
+                        <a:solidFill>
+                          <a:srgbClr val="1B1C1D"/>
+                        </a:solidFill>
+                        <a:effectLst/>
+                        <a:latin typeface="Google Sans Text"/>
+                      </a:endParaRPr>
                     </a:p>
                   </a:txBody>
                   <a:tcPr marL="75895" marR="75895" marT="50597" marB="50597" anchor="ctr">
@@ -27283,6 +27319,13 @@
                         </a:rPr>
                         <a:t> (Manages stock levels)</a:t>
                       </a:r>
+                      <a:endParaRPr lang="en-US" sz="1200">
+                        <a:solidFill>
+                          <a:srgbClr val="1B1C1D"/>
+                        </a:solidFill>
+                        <a:effectLst/>
+                        <a:latin typeface="Google Sans Text"/>
+                      </a:endParaRPr>
                     </a:p>
                   </a:txBody>
                   <a:tcPr marL="75895" marR="75895" marT="50597" marB="50597" anchor="ctr">
@@ -27406,6 +27449,13 @@
                         </a:rPr>
                         <a:t>Direct function/method invocation (e.g., in Python, Java, or C++)</a:t>
                       </a:r>
+                      <a:endParaRPr lang="en-US" sz="1200">
+                        <a:solidFill>
+                          <a:srgbClr val="1B1C1D"/>
+                        </a:solidFill>
+                        <a:effectLst/>
+                        <a:latin typeface="Google Sans Text"/>
+                      </a:endParaRPr>
                     </a:p>
                   </a:txBody>
                   <a:tcPr marL="75895" marR="75895" marT="50597" marB="50597" anchor="ctr">
@@ -27569,6 +27619,13 @@
                         </a:rPr>
                         <a:t> module.</a:t>
                       </a:r>
+                      <a:endParaRPr lang="en-US" sz="1200" dirty="0">
+                        <a:solidFill>
+                          <a:srgbClr val="1B1C1D"/>
+                        </a:solidFill>
+                        <a:effectLst/>
+                        <a:latin typeface="Google Sans Text"/>
+                      </a:endParaRPr>
                     </a:p>
                   </a:txBody>
                   <a:tcPr marL="75895" marR="75895" marT="50597" marB="50597" anchor="ctr">
@@ -27872,6 +27929,13 @@
                         </a:rPr>
                         <a:t>.</a:t>
                       </a:r>
+                      <a:endParaRPr lang="en-US" sz="1200" dirty="0">
+                        <a:solidFill>
+                          <a:srgbClr val="1B1C1D"/>
+                        </a:solidFill>
+                        <a:effectLst/>
+                        <a:latin typeface="Google Sans Text"/>
+                      </a:endParaRPr>
                     </a:p>
                   </a:txBody>
                   <a:tcPr marL="75895" marR="75895" marT="50597" marB="50597" anchor="ctr">
@@ -28035,6 +28099,13 @@
                         </a:rPr>
                         <a:t> is accurately interpreted (e.g., if the service returns False, the controller displays the correct "Out of Stock" message).</a:t>
                       </a:r>
+                      <a:endParaRPr lang="en-US" sz="1200" dirty="0">
+                        <a:solidFill>
+                          <a:srgbClr val="1B1C1D"/>
+                        </a:solidFill>
+                        <a:effectLst/>
+                        <a:latin typeface="Google Sans Text"/>
+                      </a:endParaRPr>
                     </a:p>
                   </a:txBody>
                   <a:tcPr marL="75895" marR="75895" marT="50597" marB="50597" anchor="ctr">
@@ -28082,11 +28153,6 @@
         </a:graphic>
       </p:graphicFrame>
     </p:spTree>
-    <p:extLst>
-      <p:ext uri="{BB962C8B-B14F-4D97-AF65-F5344CB8AC3E}">
-        <p14:creationId xmlns:p14="http://schemas.microsoft.com/office/powerpoint/2010/main" val="1451031042"/>
-      </p:ext>
-    </p:extLst>
   </p:cSld>
   <p:clrMapOvr>
     <a:masterClrMapping/>
@@ -28144,6 +28210,7 @@
               <a:rPr lang="en-US" dirty="0"/>
               <a:t>AND INTERFACE ERRORS</a:t>
             </a:r>
+            <a:endParaRPr lang="en-US" dirty="0"/>
           </a:p>
         </p:txBody>
       </p:sp>
@@ -28153,13 +28220,7 @@
           <p:cNvGraphicFramePr>
             <a:graphicFrameLocks noGrp="1"/>
           </p:cNvGraphicFramePr>
-          <p:nvPr>
-            <p:extLst>
-              <p:ext uri="{D42A27DB-BD31-4B8C-83A1-F6EECF244321}">
-                <p14:modId xmlns:p14="http://schemas.microsoft.com/office/powerpoint/2010/main" val="1278486993"/>
-              </p:ext>
-            </p:extLst>
-          </p:nvPr>
+          <p:nvPr/>
         </p:nvGraphicFramePr>
         <p:xfrm>
           <a:off x="1090335" y="1875465"/>
@@ -28394,6 +28455,13 @@
                         </a:rPr>
                         <a:t> (Pulls real-time prices from an exchange)</a:t>
                       </a:r>
+                      <a:endParaRPr lang="en-US" sz="1200" dirty="0">
+                        <a:solidFill>
+                          <a:srgbClr val="1B1C1D"/>
+                        </a:solidFill>
+                        <a:effectLst/>
+                        <a:latin typeface="Google Sans Text"/>
+                      </a:endParaRPr>
                     </a:p>
                   </a:txBody>
                   <a:tcPr marL="75895" marR="75895" marT="50597" marB="50597" anchor="ctr">
@@ -28527,6 +28595,13 @@
                         </a:rPr>
                         <a:t> (Calculates buy/sell signals)</a:t>
                       </a:r>
+                      <a:endParaRPr lang="en-US" sz="1200" dirty="0">
+                        <a:solidFill>
+                          <a:srgbClr val="1B1C1D"/>
+                        </a:solidFill>
+                        <a:effectLst/>
+                        <a:latin typeface="Google Sans Text"/>
+                      </a:endParaRPr>
                     </a:p>
                   </a:txBody>
                   <a:tcPr marL="75895" marR="75895" marT="50597" marB="50597" anchor="ctr">
@@ -28670,6 +28745,13 @@
                         </a:rPr>
                         <a:t> (a specific address in RAM).</a:t>
                       </a:r>
+                      <a:endParaRPr lang="en-US" sz="1200" dirty="0">
+                        <a:solidFill>
+                          <a:srgbClr val="1B1C1D"/>
+                        </a:solidFill>
+                        <a:effectLst/>
+                        <a:latin typeface="Google Sans Text"/>
+                      </a:endParaRPr>
                     </a:p>
                   </a:txBody>
                   <a:tcPr marL="75895" marR="75895" marT="50597" marB="50597" anchor="ctr">
@@ -28793,6 +28875,13 @@
                         </a:rPr>
                         <a:t>The two modules do not call each other; they access the shared memory concurrently.</a:t>
                       </a:r>
+                      <a:endParaRPr lang="en-US" sz="1200" dirty="0">
+                        <a:solidFill>
+                          <a:srgbClr val="1B1C1D"/>
+                        </a:solidFill>
+                        <a:effectLst/>
+                        <a:latin typeface="Google Sans Text"/>
+                      </a:endParaRPr>
                     </a:p>
                   </a:txBody>
                   <a:tcPr marL="75895" marR="75895" marT="50597" marB="50597" anchor="ctr">
@@ -28956,6 +29045,13 @@
                         </a:rPr>
                         <a:t> The Engine constantly reads the data from that same slot to trigger a trade decision.</a:t>
                       </a:r>
+                      <a:endParaRPr lang="en-US" sz="1200" dirty="0">
+                        <a:solidFill>
+                          <a:srgbClr val="1B1C1D"/>
+                        </a:solidFill>
+                        <a:effectLst/>
+                        <a:latin typeface="Google Sans Text"/>
+                      </a:endParaRPr>
                     </a:p>
                   </a:txBody>
                   <a:tcPr marL="75895" marR="75895" marT="50597" marB="50597" anchor="ctr">
@@ -29099,6 +29195,13 @@
                         </a:rPr>
                         <a:t> (e.g., deadlocks, race conditions, or one module overwriting data before the other module has finished reading it). The data structure within the shared block must be perfectly aligned between modules.</a:t>
                       </a:r>
+                      <a:endParaRPr lang="en-US" sz="1200" dirty="0">
+                        <a:solidFill>
+                          <a:srgbClr val="1B1C1D"/>
+                        </a:solidFill>
+                        <a:effectLst/>
+                        <a:latin typeface="Google Sans Text"/>
+                      </a:endParaRPr>
                     </a:p>
                   </a:txBody>
                   <a:tcPr marL="75895" marR="75895" marT="50597" marB="50597" anchor="ctr">
@@ -29146,11 +29249,6 @@
         </a:graphic>
       </p:graphicFrame>
     </p:spTree>
-    <p:extLst>
-      <p:ext uri="{BB962C8B-B14F-4D97-AF65-F5344CB8AC3E}">
-        <p14:creationId xmlns:p14="http://schemas.microsoft.com/office/powerpoint/2010/main" val="1048996998"/>
-      </p:ext>
-    </p:extLst>
   </p:cSld>
   <p:clrMapOvr>
     <a:masterClrMapping/>
@@ -29208,6 +29306,7 @@
               <a:rPr lang="en-US" dirty="0"/>
               <a:t>AND INTERFACE ERRORS</a:t>
             </a:r>
+            <a:endParaRPr lang="en-US" dirty="0"/>
           </a:p>
         </p:txBody>
       </p:sp>
@@ -29217,13 +29316,7 @@
           <p:cNvGraphicFramePr>
             <a:graphicFrameLocks noGrp="1"/>
           </p:cNvGraphicFramePr>
-          <p:nvPr>
-            <p:extLst>
-              <p:ext uri="{D42A27DB-BD31-4B8C-83A1-F6EECF244321}">
-                <p14:modId xmlns:p14="http://schemas.microsoft.com/office/powerpoint/2010/main" val="248348429"/>
-              </p:ext>
-            </p:extLst>
-          </p:nvPr>
+          <p:nvPr/>
         </p:nvGraphicFramePr>
         <p:xfrm>
           <a:off x="838200" y="1709738"/>
@@ -29458,6 +29551,13 @@
                         </a:rPr>
                         <a:t> (Responds to the user and creates a ticket record)</a:t>
                       </a:r>
+                      <a:endParaRPr lang="en-US" sz="1100" dirty="0">
+                        <a:solidFill>
+                          <a:srgbClr val="1B1C1D"/>
+                        </a:solidFill>
+                        <a:effectLst/>
+                        <a:latin typeface="Google Sans Text"/>
+                      </a:endParaRPr>
                     </a:p>
                   </a:txBody>
                   <a:tcPr marL="67428" marR="67428" marT="44952" marB="44952" anchor="ctr">
@@ -29591,6 +29691,13 @@
                         </a:rPr>
                         <a:t> (Sends emails and updates Slack channels)</a:t>
                       </a:r>
+                      <a:endParaRPr lang="en-US" sz="1100" dirty="0">
+                        <a:solidFill>
+                          <a:srgbClr val="1B1C1D"/>
+                        </a:solidFill>
+                        <a:effectLst/>
+                        <a:latin typeface="Google Sans Text"/>
+                      </a:endParaRPr>
                     </a:p>
                   </a:txBody>
                   <a:tcPr marL="67428" marR="67428" marT="44952" marB="44952" anchor="ctr">
@@ -29774,6 +29881,13 @@
                         </a:rPr>
                         <a:t>, SQS, or HTTPS).</a:t>
                       </a:r>
+                      <a:endParaRPr lang="en-US" sz="1100" dirty="0">
+                        <a:solidFill>
+                          <a:srgbClr val="1B1C1D"/>
+                        </a:solidFill>
+                        <a:effectLst/>
+                        <a:latin typeface="Google Sans Text"/>
+                      </a:endParaRPr>
                     </a:p>
                   </a:txBody>
                   <a:tcPr marL="67428" marR="67428" marT="44952" marB="44952" anchor="ctr">
@@ -29897,6 +30011,13 @@
                         </a:rPr>
                         <a:t>The sender sends a message/request and immediately continues its work. The receiver picks up the message when ready.</a:t>
                       </a:r>
+                      <a:endParaRPr lang="en-US" sz="1100" dirty="0">
+                        <a:solidFill>
+                          <a:srgbClr val="1B1C1D"/>
+                        </a:solidFill>
+                        <a:effectLst/>
+                        <a:latin typeface="Google Sans Text"/>
+                      </a:endParaRPr>
                     </a:p>
                   </a:txBody>
                   <a:tcPr marL="67428" marR="67428" marT="44952" marB="44952" anchor="ctr">
@@ -30180,6 +30301,13 @@
                         </a:rPr>
                         <a:t> receives the message and executes its tasks (sends email, updates Slack).</a:t>
                       </a:r>
+                      <a:endParaRPr lang="en-US" sz="1100" dirty="0">
+                        <a:solidFill>
+                          <a:srgbClr val="1B1C1D"/>
+                        </a:solidFill>
+                        <a:effectLst/>
+                        <a:latin typeface="Google Sans Text"/>
+                      </a:endParaRPr>
                     </a:p>
                   </a:txBody>
                   <a:tcPr marL="67428" marR="67428" marT="44952" marB="44952" anchor="ctr">
@@ -30323,6 +30451,13 @@
                         </a:rPr>
                         <a:t> is correctly formatted and that the receiver handles the communication protocol errors (e.g., network timeout, invalid JSON structure). This also includes testing queue capacity and message loss.</a:t>
                       </a:r>
+                      <a:endParaRPr lang="en-US" sz="1100" dirty="0">
+                        <a:solidFill>
+                          <a:srgbClr val="1B1C1D"/>
+                        </a:solidFill>
+                        <a:effectLst/>
+                        <a:latin typeface="Google Sans Text"/>
+                      </a:endParaRPr>
                     </a:p>
                   </a:txBody>
                   <a:tcPr marL="67428" marR="67428" marT="44952" marB="44952" anchor="ctr">
@@ -30370,11 +30505,6 @@
         </a:graphic>
       </p:graphicFrame>
     </p:spTree>
-    <p:extLst>
-      <p:ext uri="{BB962C8B-B14F-4D97-AF65-F5344CB8AC3E}">
-        <p14:creationId xmlns:p14="http://schemas.microsoft.com/office/powerpoint/2010/main" val="3028288084"/>
-      </p:ext>
-    </p:extLst>
   </p:cSld>
   <p:clrMapOvr>
     <a:masterClrMapping/>
@@ -30432,6 +30562,7 @@
               <a:rPr lang="en-US" dirty="0"/>
               <a:t>AND INTERFACE ERRORS</a:t>
             </a:r>
+            <a:endParaRPr lang="en-US" dirty="0"/>
           </a:p>
         </p:txBody>
       </p:sp>
@@ -30584,21 +30715,18 @@
               <a:rPr lang="en-US" sz="2400" dirty="0"/>
               <a:t>in the integration testing of complex software systems because of the fact</a:t>
             </a:r>
+            <a:endParaRPr lang="en-US" sz="2400" dirty="0"/>
           </a:p>
           <a:p>
             <a:r>
               <a:rPr lang="en-US" sz="2400" dirty="0"/>
               <a:t>that they have the bigger picture of the system.</a:t>
             </a:r>
+            <a:endParaRPr lang="en-US" sz="2400" dirty="0"/>
           </a:p>
         </p:txBody>
       </p:sp>
     </p:spTree>
-    <p:extLst>
-      <p:ext uri="{BB962C8B-B14F-4D97-AF65-F5344CB8AC3E}">
-        <p14:creationId xmlns:p14="http://schemas.microsoft.com/office/powerpoint/2010/main" val="1475786158"/>
-      </p:ext>
-    </p:extLst>
   </p:cSld>
   <p:clrMapOvr>
     <a:masterClrMapping/>
@@ -30642,7 +30770,6 @@
         </p:nvSpPr>
         <p:spPr>
           <a:noFill/>
-          <a:ln/>
           <a:extLst>
             <a:ext uri="{909E8E84-426E-40DD-AFC4-6F175D3DCCD1}">
               <a14:hiddenFill xmlns:a14="http://schemas.microsoft.com/office/drawing/2010/main">
@@ -30770,8 +30897,6 @@
                   <a:srgbClr val="000000"/>
                 </a:solidFill>
               </a:rPr>
-              <a:pPr/>
-              <a:t>9</a:t>
             </a:fld>
             <a:endParaRPr lang="en-US" sz="1000">
               <a:solidFill>
@@ -30802,6 +30927,9 @@
               </a:rPr>
               <a:t>Granularity of System Integration Testing</a:t>
             </a:r>
+            <a:endParaRPr lang="en-US" dirty="0" smtClean="0">
+              <a:latin typeface="Times New Roman" panose="02020603050405020304" pitchFamily="18" charset="0"/>
+            </a:endParaRPr>
           </a:p>
         </p:txBody>
       </p:sp>
@@ -30831,6 +30959,9 @@
               </a:rPr>
               <a:t>Integration testing includes both white- and black-box testing approaches.</a:t>
             </a:r>
+            <a:endParaRPr lang="en-US" dirty="0">
+              <a:latin typeface="Times New Roman" panose="02020603050405020304" pitchFamily="18" charset="0"/>
+            </a:endParaRPr>
           </a:p>
           <a:p>
             <a:pPr>
@@ -30852,6 +30983,9 @@
               </a:rPr>
               <a:t>System Integration testing is performed at different levels of granularity</a:t>
             </a:r>
+            <a:endParaRPr lang="en-US" dirty="0" smtClean="0">
+              <a:latin typeface="Times New Roman" panose="02020603050405020304" pitchFamily="18" charset="0"/>
+            </a:endParaRPr>
           </a:p>
           <a:p>
             <a:pPr>
@@ -30864,6 +30998,9 @@
               </a:rPr>
               <a:t>Intra-system testing</a:t>
             </a:r>
+            <a:endParaRPr lang="en-US" dirty="0" smtClean="0">
+              <a:latin typeface="Times New Roman" panose="02020603050405020304" pitchFamily="18" charset="0"/>
+            </a:endParaRPr>
           </a:p>
           <a:p>
             <a:pPr lvl="1"/>
@@ -30873,6 +31010,9 @@
               </a:rPr>
               <a:t>This form of testing constitutes low-level integration testing with the objective of combining the modules together to build a cohesive system</a:t>
             </a:r>
+            <a:endParaRPr lang="en-US" dirty="0" smtClean="0">
+              <a:latin typeface="Times New Roman" panose="02020603050405020304" pitchFamily="18" charset="0"/>
+            </a:endParaRPr>
           </a:p>
           <a:p>
             <a:r>
@@ -30881,6 +31021,9 @@
               </a:rPr>
               <a:t>Inter-system testing</a:t>
             </a:r>
+            <a:endParaRPr lang="en-US" dirty="0" smtClean="0">
+              <a:latin typeface="Times New Roman" panose="02020603050405020304" pitchFamily="18" charset="0"/>
+            </a:endParaRPr>
           </a:p>
           <a:p>
             <a:pPr lvl="1"/>
@@ -30890,6 +31033,9 @@
               </a:rPr>
               <a:t>It is a high-level testing phase which requires interfacing independently tested systems</a:t>
             </a:r>
+            <a:endParaRPr lang="en-US" dirty="0" smtClean="0">
+              <a:latin typeface="Times New Roman" panose="02020603050405020304" pitchFamily="18" charset="0"/>
+            </a:endParaRPr>
           </a:p>
           <a:p>
             <a:r>
@@ -30898,6 +31044,9 @@
               </a:rPr>
               <a:t>Pairwise testing</a:t>
             </a:r>
+            <a:endParaRPr lang="en-US" dirty="0" smtClean="0">
+              <a:latin typeface="Times New Roman" panose="02020603050405020304" pitchFamily="18" charset="0"/>
+            </a:endParaRPr>
           </a:p>
           <a:p>
             <a:pPr lvl="1"/>
@@ -30907,6 +31056,9 @@
               </a:rPr>
               <a:t>In pairwise integration, only two interconnected systems in an overall system are tested at a time</a:t>
             </a:r>
+            <a:endParaRPr lang="en-US" dirty="0" smtClean="0">
+              <a:latin typeface="Times New Roman" panose="02020603050405020304" pitchFamily="18" charset="0"/>
+            </a:endParaRPr>
           </a:p>
           <a:p>
             <a:pPr lvl="1"/>
@@ -30916,6 +31068,9 @@
               </a:rPr>
               <a:t>The purpose of pairwise testing is to ensure that two systems under consideration can function together, assuming that the other systems within the overall environment behave as expected</a:t>
             </a:r>
+            <a:endParaRPr lang="en-US" dirty="0" smtClean="0">
+              <a:latin typeface="Times New Roman" panose="02020603050405020304" pitchFamily="18" charset="0"/>
+            </a:endParaRPr>
           </a:p>
           <a:p>
             <a:pPr lvl="1">
@@ -30929,20 +31084,15 @@
         </p:txBody>
       </p:sp>
     </p:spTree>
-    <p:extLst>
-      <p:ext uri="{BB962C8B-B14F-4D97-AF65-F5344CB8AC3E}">
-        <p14:creationId xmlns:p14="http://schemas.microsoft.com/office/powerpoint/2010/main" val="1909749913"/>
-      </p:ext>
-    </p:extLst>
   </p:cSld>
   <p:clrMapOvr>
     <a:masterClrMapping/>
   </p:clrMapOvr>
-  <mc:AlternateContent xmlns:mc="http://schemas.openxmlformats.org/markup-compatibility/2006" xmlns:p14="http://schemas.microsoft.com/office/powerpoint/2010/main">
-    <mc:Choice Requires="p14">
+  <mc:AlternateContent xmlns:mc="http://schemas.openxmlformats.org/markup-compatibility/2006">
+    <mc:Choice xmlns:p14="http://schemas.microsoft.com/office/powerpoint/2010/main" Requires="p14">
       <p:transition spd="slow" p14:dur="2000"/>
     </mc:Choice>
-    <mc:Fallback xmlns="">
+    <mc:Fallback>
       <p:transition spd="slow"/>
     </mc:Fallback>
   </mc:AlternateContent>
@@ -30999,7 +31149,7 @@
     </a:clrScheme>
     <a:fontScheme name="Office">
       <a:majorFont>
-        <a:latin typeface="Calibri Light" panose="020F0302020204030204"/>
+        <a:latin typeface="Calibri Light"/>
         <a:ea typeface=""/>
         <a:cs typeface=""/>
         <a:font script="Jpan" typeface="ＭＳ Ｐゴシック"/>
@@ -31034,7 +31184,7 @@
         <a:font script="Geor" typeface="Sylfaen"/>
       </a:majorFont>
       <a:minorFont>
-        <a:latin typeface="Calibri" panose="020F0502020204030204"/>
+        <a:latin typeface="Calibri"/>
         <a:ea typeface=""/>
         <a:cs typeface=""/>
         <a:font script="Jpan" typeface="ＭＳ Ｐゴシック"/>
@@ -31207,8 +31357,6 @@
       </a:bgFillStyleLst>
     </a:fmtScheme>
   </a:themeElements>
-  <a:objectDefaults/>
-  <a:extraClrSchemeLst/>
   <a:extLst>
     <a:ext uri="{05A4C25C-085E-4340-85A3-A5531E510DB2}">
       <thm15:themeFamily xmlns:thm15="http://schemas.microsoft.com/office/thememl/2012/main" name="Office Theme" id="{62F939B6-93AF-4DB8-9C6B-D6C7DFDC589F}" vid="{4A3C46E8-61CC-4603-A589-7422A47A8E4A}"/>
@@ -31260,7 +31408,7 @@
     </a:clrScheme>
     <a:fontScheme name="Office">
       <a:majorFont>
-        <a:latin typeface="Calibri Light" panose="020F0302020204030204"/>
+        <a:latin typeface="Calibri Light"/>
         <a:ea typeface=""/>
         <a:cs typeface=""/>
         <a:font script="Jpan" typeface="ＭＳ Ｐゴシック"/>
@@ -31295,7 +31443,7 @@
         <a:font script="Geor" typeface="Sylfaen"/>
       </a:majorFont>
       <a:minorFont>
-        <a:latin typeface="Calibri" panose="020F0502020204030204"/>
+        <a:latin typeface="Calibri"/>
         <a:ea typeface=""/>
         <a:cs typeface=""/>
         <a:font script="Jpan" typeface="ＭＳ Ｐゴシック"/>
@@ -31468,8 +31616,6 @@
       </a:bgFillStyleLst>
     </a:fmtScheme>
   </a:themeElements>
-  <a:objectDefaults/>
-  <a:extraClrSchemeLst/>
   <a:extLst>
     <a:ext uri="{05A4C25C-085E-4340-85A3-A5531E510DB2}">
       <thm15:themeFamily xmlns:thm15="http://schemas.microsoft.com/office/thememl/2012/main" name="Office Theme" id="{62F939B6-93AF-4DB8-9C6B-D6C7DFDC589F}" vid="{4A3C46E8-61CC-4603-A589-7422A47A8E4A}"/>
